--- a/node-js/sir-slides/API Design Fundamentals.pptx
+++ b/node-js/sir-slides/API Design Fundamentals.pptx
@@ -4,6 +4,9 @@
   <p:sldMasterIdLst>
     <p:sldMasterId id="2147483648" r:id="rId1"/>
   </p:sldMasterIdLst>
+  <p:notesMasterIdLst>
+    <p:notesMasterId r:id="rId21"/>
+  </p:notesMasterIdLst>
   <p:sldIdLst>
     <p:sldId id="256" r:id="rId2"/>
     <p:sldId id="257" r:id="rId3"/>
@@ -25,21 +28,119 @@
     <p:sldId id="273" r:id="rId19"/>
     <p:sldId id="274" r:id="rId20"/>
   </p:sldIdLst>
-  <p:notesMasterIdLst>
-    <p:notesMasterId r:id="rId21"/>
-  </p:notesMasterIdLst>
   <p:sldSz cx="16256000" cy="9144000"/>
   <p:notesSz cx="9144000" cy="16256000"/>
   <p:embeddedFontLst>
     <p:embeddedFont>
-      <p:font typeface="Liter" charset="-122" pitchFamily="34"/>
-      <p:regular r:id="rId26"/>
+      <p:font typeface="Liter" panose="020B0604020202020204" charset="0"/>
+      <p:regular r:id="rId22"/>
     </p:embeddedFont>
     <p:embeddedFont>
-      <p:font typeface="Quattrocento Sans" charset="-122" pitchFamily="34"/>
-      <p:regular r:id="rId27"/>
+      <p:font typeface="Quattrocento Sans" panose="020B0502050000020003" pitchFamily="34" charset="0"/>
+      <p:regular r:id="rId23"/>
+      <p:bold r:id="rId24"/>
     </p:embeddedFont>
   </p:embeddedFontLst>
+  <p:defaultTextStyle>
+    <a:defPPr>
+      <a:defRPr lang="en-US"/>
+    </a:defPPr>
+    <a:lvl1pPr marL="0" algn="l" defTabSz="914400" rtl="0" eaLnBrk="1" latinLnBrk="0" hangingPunct="1">
+      <a:defRPr sz="1800" kern="1200">
+        <a:solidFill>
+          <a:schemeClr val="tx1"/>
+        </a:solidFill>
+        <a:latin typeface="+mn-lt"/>
+        <a:ea typeface="+mn-ea"/>
+        <a:cs typeface="+mn-cs"/>
+      </a:defRPr>
+    </a:lvl1pPr>
+    <a:lvl2pPr marL="457200" algn="l" defTabSz="914400" rtl="0" eaLnBrk="1" latinLnBrk="0" hangingPunct="1">
+      <a:defRPr sz="1800" kern="1200">
+        <a:solidFill>
+          <a:schemeClr val="tx1"/>
+        </a:solidFill>
+        <a:latin typeface="+mn-lt"/>
+        <a:ea typeface="+mn-ea"/>
+        <a:cs typeface="+mn-cs"/>
+      </a:defRPr>
+    </a:lvl2pPr>
+    <a:lvl3pPr marL="914400" algn="l" defTabSz="914400" rtl="0" eaLnBrk="1" latinLnBrk="0" hangingPunct="1">
+      <a:defRPr sz="1800" kern="1200">
+        <a:solidFill>
+          <a:schemeClr val="tx1"/>
+        </a:solidFill>
+        <a:latin typeface="+mn-lt"/>
+        <a:ea typeface="+mn-ea"/>
+        <a:cs typeface="+mn-cs"/>
+      </a:defRPr>
+    </a:lvl3pPr>
+    <a:lvl4pPr marL="1371600" algn="l" defTabSz="914400" rtl="0" eaLnBrk="1" latinLnBrk="0" hangingPunct="1">
+      <a:defRPr sz="1800" kern="1200">
+        <a:solidFill>
+          <a:schemeClr val="tx1"/>
+        </a:solidFill>
+        <a:latin typeface="+mn-lt"/>
+        <a:ea typeface="+mn-ea"/>
+        <a:cs typeface="+mn-cs"/>
+      </a:defRPr>
+    </a:lvl4pPr>
+    <a:lvl5pPr marL="1828800" algn="l" defTabSz="914400" rtl="0" eaLnBrk="1" latinLnBrk="0" hangingPunct="1">
+      <a:defRPr sz="1800" kern="1200">
+        <a:solidFill>
+          <a:schemeClr val="tx1"/>
+        </a:solidFill>
+        <a:latin typeface="+mn-lt"/>
+        <a:ea typeface="+mn-ea"/>
+        <a:cs typeface="+mn-cs"/>
+      </a:defRPr>
+    </a:lvl5pPr>
+    <a:lvl6pPr marL="2286000" algn="l" defTabSz="914400" rtl="0" eaLnBrk="1" latinLnBrk="0" hangingPunct="1">
+      <a:defRPr sz="1800" kern="1200">
+        <a:solidFill>
+          <a:schemeClr val="tx1"/>
+        </a:solidFill>
+        <a:latin typeface="+mn-lt"/>
+        <a:ea typeface="+mn-ea"/>
+        <a:cs typeface="+mn-cs"/>
+      </a:defRPr>
+    </a:lvl6pPr>
+    <a:lvl7pPr marL="2743200" algn="l" defTabSz="914400" rtl="0" eaLnBrk="1" latinLnBrk="0" hangingPunct="1">
+      <a:defRPr sz="1800" kern="1200">
+        <a:solidFill>
+          <a:schemeClr val="tx1"/>
+        </a:solidFill>
+        <a:latin typeface="+mn-lt"/>
+        <a:ea typeface="+mn-ea"/>
+        <a:cs typeface="+mn-cs"/>
+      </a:defRPr>
+    </a:lvl7pPr>
+    <a:lvl8pPr marL="3200400" algn="l" defTabSz="914400" rtl="0" eaLnBrk="1" latinLnBrk="0" hangingPunct="1">
+      <a:defRPr sz="1800" kern="1200">
+        <a:solidFill>
+          <a:schemeClr val="tx1"/>
+        </a:solidFill>
+        <a:latin typeface="+mn-lt"/>
+        <a:ea typeface="+mn-ea"/>
+        <a:cs typeface="+mn-cs"/>
+      </a:defRPr>
+    </a:lvl8pPr>
+    <a:lvl9pPr marL="3657600" algn="l" defTabSz="914400" rtl="0" eaLnBrk="1" latinLnBrk="0" hangingPunct="1">
+      <a:defRPr sz="1800" kern="1200">
+        <a:solidFill>
+          <a:schemeClr val="tx1"/>
+        </a:solidFill>
+        <a:latin typeface="+mn-lt"/>
+        <a:ea typeface="+mn-ea"/>
+        <a:cs typeface="+mn-cs"/>
+      </a:defRPr>
+    </a:lvl9pPr>
+  </p:defaultTextStyle>
+  <p:extLst>
+    <p:ext uri="{EFAFB233-063F-42B5-8137-9DF3F51BA10A}">
+      <p15:sldGuideLst xmlns:p15="http://schemas.microsoft.com/office/powerpoint/2012/main"/>
+    </p:ext>
+  </p:extLst>
 </p:presentation>
 </file>
 
@@ -65,234 +166,10 @@
           <a:chExt cx="0" cy="0"/>
         </a:xfrm>
       </p:grpSpPr>
-      <p:sp>
-        <p:nvSpPr>
-          <p:cNvPr id="2" name="Header Placeholder 1"/>
-          <p:cNvSpPr>
-            <a:spLocks noGrp="1"/>
-          </p:cNvSpPr>
-          <p:nvPr>
-            <p:ph type="hdr" sz="quarter"/>
-          </p:nvPr>
-        </p:nvSpPr>
-        <p:spPr>
-          <a:xfrm>
-            <a:off x="0" y="0"/>
-            <a:ext cx="2971800" cy="458788"/>
-          </a:xfrm>
-          <a:prstGeom prst="rect">
-            <a:avLst/>
-          </a:prstGeom>
-        </p:spPr>
-        <p:txBody>
-          <a:bodyPr vert="horz" lIns="91440" tIns="45720" rIns="91440" bIns="45720" rtlCol="0"/>
-          <a:lstStyle>
-            <a:lvl1pPr algn="l">
-              <a:defRPr sz="1200"/>
-            </a:lvl1pPr>
-          </a:lstStyle>
-          <a:p>
-            <a:endParaRPr lang="en-US"/>
-          </a:p>
-        </p:txBody>
-      </p:sp>
-      <p:sp>
-        <p:nvSpPr>
-          <p:cNvPr id="3" name="Date Placeholder 2"/>
-          <p:cNvSpPr>
-            <a:spLocks noGrp="1"/>
-          </p:cNvSpPr>
-          <p:nvPr>
-            <p:ph type="dt" idx="1"/>
-          </p:nvPr>
-        </p:nvSpPr>
-        <p:spPr>
-          <a:xfrm>
-            <a:off x="3884613" y="0"/>
-            <a:ext cx="2971800" cy="458788"/>
-          </a:xfrm>
-          <a:prstGeom prst="rect">
-            <a:avLst/>
-          </a:prstGeom>
-        </p:spPr>
-        <p:txBody>
-          <a:bodyPr vert="horz" lIns="91440" tIns="45720" rIns="91440" bIns="45720" rtlCol="0"/>
-          <a:lstStyle>
-            <a:lvl1pPr algn="r">
-              <a:defRPr sz="1200"/>
-            </a:lvl1pPr>
-          </a:lstStyle>
-          <a:p>
-            <a:fld id="{5282F153-3F37-0F45-9E97-73ACFA13230C}" type="datetimeFigureOut">
-              <a:rPr lang="en-US"/>
-              <a:t>7/23/19</a:t>
-            </a:fld>
-            <a:endParaRPr lang="en-US"/>
-          </a:p>
-        </p:txBody>
-      </p:sp>
-      <p:sp>
-        <p:nvSpPr>
-          <p:cNvPr id="4" name="Slide Image Placeholder 3"/>
-          <p:cNvSpPr>
-            <a:spLocks noGrp="1" noRot="1" noChangeAspect="1"/>
-          </p:cNvSpPr>
-          <p:nvPr>
-            <p:ph type="sldImg" idx="2"/>
-          </p:nvPr>
-        </p:nvSpPr>
-        <p:spPr>
-          <a:xfrm>
-            <a:off x="685800" y="1143000"/>
-            <a:ext cx="5486400" cy="3086100"/>
-          </a:xfrm>
-          <a:prstGeom prst="rect">
-            <a:avLst/>
-          </a:prstGeom>
-          <a:noFill/>
-          <a:ln w="12700">
-            <a:solidFill>
-              <a:prstClr val="black"/>
-            </a:solidFill>
-          </a:ln>
-        </p:spPr>
-        <p:txBody>
-          <a:bodyPr vert="horz" lIns="91440" tIns="45720" rIns="91440" bIns="45720" rtlCol="0" anchor="ctr"/>
-          <a:lstStyle/>
-          <a:p>
-            <a:endParaRPr lang="en-US"/>
-          </a:p>
-        </p:txBody>
-      </p:sp>
-      <p:sp>
-        <p:nvSpPr>
-          <p:cNvPr id="5" name="Notes Placeholder 4"/>
-          <p:cNvSpPr>
-            <a:spLocks noGrp="1"/>
-          </p:cNvSpPr>
-          <p:nvPr>
-            <p:ph type="body" sz="quarter" idx="3"/>
-          </p:nvPr>
-        </p:nvSpPr>
-        <p:spPr>
-          <a:xfrm>
-            <a:off x="685800" y="4400550"/>
-            <a:ext cx="5486400" cy="3600450"/>
-          </a:xfrm>
-          <a:prstGeom prst="rect">
-            <a:avLst/>
-          </a:prstGeom>
-        </p:spPr>
-        <p:txBody>
-          <a:bodyPr vert="horz" lIns="91440" tIns="45720" rIns="91440" bIns="45720" rtlCol="0"/>
-          <a:lstStyle/>
-          <a:p>
-            <a:pPr lvl="0"/>
-            <a:r>
-              <a:rPr lang="en-US"/>
-              <a:t>Click to edit Master text styles</a:t>
-            </a:r>
-          </a:p>
-          <a:p>
-            <a:pPr lvl="1"/>
-            <a:r>
-              <a:rPr lang="en-US"/>
-              <a:t>Second level</a:t>
-            </a:r>
-          </a:p>
-          <a:p>
-            <a:pPr lvl="2"/>
-            <a:r>
-              <a:rPr lang="en-US"/>
-              <a:t>Third level</a:t>
-            </a:r>
-          </a:p>
-          <a:p>
-            <a:pPr lvl="3"/>
-            <a:r>
-              <a:rPr lang="en-US"/>
-              <a:t>Fourth level</a:t>
-            </a:r>
-          </a:p>
-          <a:p>
-            <a:pPr lvl="4"/>
-            <a:r>
-              <a:rPr lang="en-US"/>
-              <a:t>Fifth level</a:t>
-            </a:r>
-          </a:p>
-        </p:txBody>
-      </p:sp>
-      <p:sp>
-        <p:nvSpPr>
-          <p:cNvPr id="6" name="Footer Placeholder 5"/>
-          <p:cNvSpPr>
-            <a:spLocks noGrp="1"/>
-          </p:cNvSpPr>
-          <p:nvPr>
-            <p:ph type="ftr" sz="quarter" idx="4"/>
-          </p:nvPr>
-        </p:nvSpPr>
-        <p:spPr>
-          <a:xfrm>
-            <a:off x="0" y="8685213"/>
-            <a:ext cx="2971800" cy="458787"/>
-          </a:xfrm>
-          <a:prstGeom prst="rect">
-            <a:avLst/>
-          </a:prstGeom>
-        </p:spPr>
-        <p:txBody>
-          <a:bodyPr vert="horz" lIns="91440" tIns="45720" rIns="91440" bIns="45720" rtlCol="0" anchor="b"/>
-          <a:lstStyle>
-            <a:lvl1pPr algn="l">
-              <a:defRPr sz="1200"/>
-            </a:lvl1pPr>
-          </a:lstStyle>
-          <a:p>
-            <a:endParaRPr lang="en-US"/>
-          </a:p>
-        </p:txBody>
-      </p:sp>
-      <p:sp>
-        <p:nvSpPr>
-          <p:cNvPr id="7" name="Slide Number Placeholder 6"/>
-          <p:cNvSpPr>
-            <a:spLocks noGrp="1"/>
-          </p:cNvSpPr>
-          <p:nvPr>
-            <p:ph type="sldNum" sz="quarter" idx="5"/>
-          </p:nvPr>
-        </p:nvSpPr>
-        <p:spPr>
-          <a:xfrm>
-            <a:off x="3884613" y="8685213"/>
-            <a:ext cx="2971800" cy="458787"/>
-          </a:xfrm>
-          <a:prstGeom prst="rect">
-            <a:avLst/>
-          </a:prstGeom>
-        </p:spPr>
-        <p:txBody>
-          <a:bodyPr vert="horz" lIns="91440" tIns="45720" rIns="91440" bIns="45720" rtlCol="0" anchor="b"/>
-          <a:lstStyle>
-            <a:lvl1pPr algn="r">
-              <a:defRPr sz="1200"/>
-            </a:lvl1pPr>
-          </a:lstStyle>
-          <a:p>
-            <a:fld id="{CE5E9CC1-C706-0F49-92D6-E571CC5EEA8F}" type="slidenum">
-              <a:rPr lang="en-US"/>
-              <a:t>‹#›</a:t>
-            </a:fld>
-            <a:endParaRPr lang="en-US"/>
-          </a:p>
-        </p:txBody>
-      </p:sp>
     </p:spTree>
     <p:extLst>
       <p:ext uri="{BB962C8B-B14F-4D97-AF65-F5344CB8AC3E}">
-        <p14:creationId xmlns:p14="http://schemas.microsoft.com/office/powerpoint/2010/main" val="1024086991"/>
+        <p14:creationId xmlns:p14="http://schemas.microsoft.com/office/powerpoint/2010/main" val="3764634137"/>
       </p:ext>
     </p:extLst>
   </p:cSld>
@@ -436,10 +313,6 @@
           <a:bodyPr/>
           <a:lstStyle/>
           <a:p>
-            <a:r>
-              <a:rPr lang="en-US" dirty="0"/>
-              <a:t/>
-            </a:r>
             <a:endParaRPr lang="en-US" dirty="0"/>
           </a:p>
         </p:txBody>
@@ -524,10 +397,6 @@
           <a:bodyPr/>
           <a:lstStyle/>
           <a:p>
-            <a:r>
-              <a:rPr lang="en-US" dirty="0"/>
-              <a:t/>
-            </a:r>
             <a:endParaRPr lang="en-US" dirty="0"/>
           </a:p>
         </p:txBody>
@@ -612,10 +481,6 @@
           <a:bodyPr/>
           <a:lstStyle/>
           <a:p>
-            <a:r>
-              <a:rPr lang="en-US" dirty="0"/>
-              <a:t/>
-            </a:r>
             <a:endParaRPr lang="en-US" dirty="0"/>
           </a:p>
         </p:txBody>
@@ -700,10 +565,6 @@
           <a:bodyPr/>
           <a:lstStyle/>
           <a:p>
-            <a:r>
-              <a:rPr lang="en-US" dirty="0"/>
-              <a:t/>
-            </a:r>
             <a:endParaRPr lang="en-US" dirty="0"/>
           </a:p>
         </p:txBody>
@@ -788,10 +649,6 @@
           <a:bodyPr/>
           <a:lstStyle/>
           <a:p>
-            <a:r>
-              <a:rPr lang="en-US" dirty="0"/>
-              <a:t/>
-            </a:r>
             <a:endParaRPr lang="en-US" dirty="0"/>
           </a:p>
         </p:txBody>
@@ -876,10 +733,6 @@
           <a:bodyPr/>
           <a:lstStyle/>
           <a:p>
-            <a:r>
-              <a:rPr lang="en-US" dirty="0"/>
-              <a:t/>
-            </a:r>
             <a:endParaRPr lang="en-US" dirty="0"/>
           </a:p>
         </p:txBody>
@@ -964,10 +817,6 @@
           <a:bodyPr/>
           <a:lstStyle/>
           <a:p>
-            <a:r>
-              <a:rPr lang="en-US" dirty="0"/>
-              <a:t/>
-            </a:r>
             <a:endParaRPr lang="en-US" dirty="0"/>
           </a:p>
         </p:txBody>
@@ -1052,10 +901,6 @@
           <a:bodyPr/>
           <a:lstStyle/>
           <a:p>
-            <a:r>
-              <a:rPr lang="en-US" dirty="0"/>
-              <a:t/>
-            </a:r>
             <a:endParaRPr lang="en-US" dirty="0"/>
           </a:p>
         </p:txBody>
@@ -1140,10 +985,6 @@
           <a:bodyPr/>
           <a:lstStyle/>
           <a:p>
-            <a:r>
-              <a:rPr lang="en-US" dirty="0"/>
-              <a:t/>
-            </a:r>
             <a:endParaRPr lang="en-US" dirty="0"/>
           </a:p>
         </p:txBody>
@@ -1228,10 +1069,6 @@
           <a:bodyPr/>
           <a:lstStyle/>
           <a:p>
-            <a:r>
-              <a:rPr lang="en-US" dirty="0"/>
-              <a:t/>
-            </a:r>
             <a:endParaRPr lang="en-US" dirty="0"/>
           </a:p>
         </p:txBody>
@@ -1316,10 +1153,6 @@
           <a:bodyPr/>
           <a:lstStyle/>
           <a:p>
-            <a:r>
-              <a:rPr lang="en-US" dirty="0"/>
-              <a:t/>
-            </a:r>
             <a:endParaRPr lang="en-US" dirty="0"/>
           </a:p>
         </p:txBody>
@@ -1404,10 +1237,6 @@
           <a:bodyPr/>
           <a:lstStyle/>
           <a:p>
-            <a:r>
-              <a:rPr lang="en-US" dirty="0"/>
-              <a:t/>
-            </a:r>
             <a:endParaRPr lang="en-US" dirty="0"/>
           </a:p>
         </p:txBody>
@@ -1492,10 +1321,6 @@
           <a:bodyPr/>
           <a:lstStyle/>
           <a:p>
-            <a:r>
-              <a:rPr lang="en-US" dirty="0"/>
-              <a:t/>
-            </a:r>
             <a:endParaRPr lang="en-US" dirty="0"/>
           </a:p>
         </p:txBody>
@@ -1580,10 +1405,6 @@
           <a:bodyPr/>
           <a:lstStyle/>
           <a:p>
-            <a:r>
-              <a:rPr lang="en-US" dirty="0"/>
-              <a:t/>
-            </a:r>
             <a:endParaRPr lang="en-US" dirty="0"/>
           </a:p>
         </p:txBody>
@@ -1668,10 +1489,6 @@
           <a:bodyPr/>
           <a:lstStyle/>
           <a:p>
-            <a:r>
-              <a:rPr lang="en-US" dirty="0"/>
-              <a:t/>
-            </a:r>
             <a:endParaRPr lang="en-US" dirty="0"/>
           </a:p>
         </p:txBody>
@@ -1756,10 +1573,6 @@
           <a:bodyPr/>
           <a:lstStyle/>
           <a:p>
-            <a:r>
-              <a:rPr lang="en-US" dirty="0"/>
-              <a:t/>
-            </a:r>
             <a:endParaRPr lang="en-US" dirty="0"/>
           </a:p>
         </p:txBody>
@@ -1844,10 +1657,6 @@
           <a:bodyPr/>
           <a:lstStyle/>
           <a:p>
-            <a:r>
-              <a:rPr lang="en-US" dirty="0"/>
-              <a:t/>
-            </a:r>
             <a:endParaRPr lang="en-US" dirty="0"/>
           </a:p>
         </p:txBody>
@@ -1932,10 +1741,6 @@
           <a:bodyPr/>
           <a:lstStyle/>
           <a:p>
-            <a:r>
-              <a:rPr lang="en-US" dirty="0"/>
-              <a:t/>
-            </a:r>
             <a:endParaRPr lang="en-US" dirty="0"/>
           </a:p>
         </p:txBody>
@@ -2020,10 +1825,6 @@
           <a:bodyPr/>
           <a:lstStyle/>
           <a:p>
-            <a:r>
-              <a:rPr lang="en-US" dirty="0"/>
-              <a:t/>
-            </a:r>
             <a:endParaRPr lang="en-US" dirty="0"/>
           </a:p>
         </p:txBody>
@@ -2097,6 +1898,11 @@
 <file path=ppt/slideMasters/slideMaster1.xml><?xml version="1.0" encoding="utf-8"?>
 <p:sldMaster xmlns:a="http://schemas.openxmlformats.org/drawingml/2006/main" xmlns:r="http://schemas.openxmlformats.org/officeDocument/2006/relationships" xmlns:p="http://schemas.openxmlformats.org/presentationml/2006/main">
   <p:cSld>
+    <p:bg>
+      <p:bgRef idx="1001">
+        <a:schemeClr val="bg1"/>
+      </p:bgRef>
+    </p:bg>
     <p:spTree>
       <p:nvGrpSpPr>
         <p:cNvPr id="1" name=""/>
@@ -2390,15 +2196,15 @@
       </p:grpSpPr>
       <p:pic>
         <p:nvPicPr>
-          <p:cNvPr id="2" name="Image 0" descr="https://kimi-img.moonshot.cn/pub/slides/okc/r3tmzt32f22la/mnt/agents/output/api_design/images/3_Abstract_Digital_Network_Grid_With.png">    </p:cNvPr>
+          <p:cNvPr id="2" name="Image 0" descr="https://kimi-img.moonshot.cn/pub/slides/okc/r3tmzt32f22la/mnt/agents/output/api_design/images/3_Abstract_Digital_Network_Grid_With.png"/>
           <p:cNvPicPr>
             <a:picLocks noChangeAspect="1"/>
           </p:cNvPicPr>
           <p:nvPr/>
         </p:nvPicPr>
         <p:blipFill>
-          <a:blip r:embed="rId1"/>
-          <a:srcRect l="1481" r="1481" t="0" b="0"/>
+          <a:blip r:embed="rId3"/>
+          <a:srcRect l="1481" r="1481"/>
           <a:stretch/>
         </p:blipFill>
         <p:spPr>
@@ -2425,7 +2231,7 @@
           <a:prstGeom prst="rect">
             <a:avLst/>
           </a:prstGeom>
-          <a:gradFill rotWithShape="1" flip="none">
+          <a:gradFill flip="none" rotWithShape="1">
             <a:gsLst>
               <a:gs pos="0">
                 <a:srgbClr val="1B4D4D">
@@ -2449,6 +2255,13 @@
             <a:prstDash val="solid"/>
           </a:ln>
         </p:spPr>
+        <p:txBody>
+          <a:bodyPr/>
+          <a:lstStyle/>
+          <a:p>
+            <a:endParaRPr lang="en-US"/>
+          </a:p>
+        </p:txBody>
       </p:sp>
       <p:sp>
         <p:nvSpPr>
@@ -2477,7 +2290,7 @@
               </a:lnSpc>
             </a:pPr>
             <a:r>
-              <a:rPr lang="en-US" sz="1300" spc="200" kern="0" dirty="0">
+              <a:rPr lang="en-US" sz="1300" kern="0" spc="200" dirty="0">
                 <a:solidFill>
                   <a:srgbClr val="D4943A"/>
                 </a:solidFill>
@@ -2518,7 +2331,7 @@
               </a:lnSpc>
             </a:pPr>
             <a:r>
-              <a:rPr lang="en-US" sz="4800" spc="600" kern="0" dirty="0">
+              <a:rPr lang="en-US" sz="4800" kern="0" spc="600" dirty="0">
                 <a:solidFill>
                   <a:srgbClr val="FFFFFF"/>
                 </a:solidFill>
@@ -2592,6 +2405,13 @@
           </a:solidFill>
           <a:ln/>
         </p:spPr>
+        <p:txBody>
+          <a:bodyPr/>
+          <a:lstStyle/>
+          <a:p>
+            <a:endParaRPr lang="en-US"/>
+          </a:p>
+        </p:txBody>
       </p:sp>
       <p:sp>
         <p:nvSpPr>
@@ -2641,7 +2461,6 @@
   </p:clrMapOvr>
   <p:transition>
     <p:fade/>
-    <p:spd val="med"/>
   </p:transition>
 </p:sld>
 </file>
@@ -2654,6 +2473,7 @@
         <a:solidFill>
           <a:srgbClr val="F5F3EF"/>
         </a:solidFill>
+        <a:effectLst/>
       </p:bgPr>
     </p:bg>
     <p:spTree>
@@ -2697,7 +2517,7 @@
               </a:lnSpc>
             </a:pPr>
             <a:r>
-              <a:rPr lang="en-US" sz="1300" spc="200" kern="0" dirty="0">
+              <a:rPr lang="en-US" sz="1300" kern="0" spc="200" dirty="0">
                 <a:solidFill>
                   <a:srgbClr val="8A9B8C"/>
                 </a:solidFill>
@@ -2771,6 +2591,13 @@
           </a:solidFill>
           <a:ln/>
         </p:spPr>
+        <p:txBody>
+          <a:bodyPr/>
+          <a:lstStyle/>
+          <a:p>
+            <a:endParaRPr lang="en-US"/>
+          </a:p>
+        </p:txBody>
       </p:sp>
       <p:sp>
         <p:nvSpPr>
@@ -2809,11 +2636,6 @@
               </a:rPr>
               <a:t>Status codes tell the client </a:t>
             </a:r>
-            <a:pPr algn="l">
-              <a:lnSpc>
-                <a:spcPct val="140000"/>
-              </a:lnSpc>
-            </a:pPr>
             <a:r>
               <a:rPr lang="en-US" sz="1600" b="1" dirty="0">
                 <a:solidFill>
@@ -2825,11 +2647,6 @@
               </a:rPr>
               <a:t>what happened</a:t>
             </a:r>
-            <a:pPr algn="l">
-              <a:lnSpc>
-                <a:spcPct val="140000"/>
-              </a:lnSpc>
-            </a:pPr>
             <a:r>
               <a:rPr lang="en-US" sz="1600" dirty="0">
                 <a:solidFill>
@@ -2861,17 +2678,41 @@
         </p:nvGraphicFramePr>
         <p:xfrm>
           <a:off x="762000" y="2133600"/>
-          <a:ext cx="14732000" cy="4953000"/>
+          <a:ext cx="14732000" cy="3689985"/>
         </p:xfrm>
         <a:graphic>
           <a:graphicData uri="http://schemas.openxmlformats.org/drawingml/2006/table">
             <a:tbl>
               <a:tblPr/>
               <a:tblGrid>
-                <a:gridCol w="1767840"/>
-                <a:gridCol w="2651760"/>
-                <a:gridCol w="5156200"/>
-                <a:gridCol w="5156200"/>
+                <a:gridCol w="1767840">
+                  <a:extLst>
+                    <a:ext uri="{9D8B030D-6E8A-4147-A177-3AD203B41FA5}">
+                      <a16:colId xmlns:a16="http://schemas.microsoft.com/office/drawing/2014/main" val="20000"/>
+                    </a:ext>
+                  </a:extLst>
+                </a:gridCol>
+                <a:gridCol w="2651760">
+                  <a:extLst>
+                    <a:ext uri="{9D8B030D-6E8A-4147-A177-3AD203B41FA5}">
+                      <a16:colId xmlns:a16="http://schemas.microsoft.com/office/drawing/2014/main" val="20001"/>
+                    </a:ext>
+                  </a:extLst>
+                </a:gridCol>
+                <a:gridCol w="5156200">
+                  <a:extLst>
+                    <a:ext uri="{9D8B030D-6E8A-4147-A177-3AD203B41FA5}">
+                      <a16:colId xmlns:a16="http://schemas.microsoft.com/office/drawing/2014/main" val="20002"/>
+                    </a:ext>
+                  </a:extLst>
+                </a:gridCol>
+                <a:gridCol w="5156200">
+                  <a:extLst>
+                    <a:ext uri="{9D8B030D-6E8A-4147-A177-3AD203B41FA5}">
+                      <a16:colId xmlns:a16="http://schemas.microsoft.com/office/drawing/2014/main" val="20003"/>
+                    </a:ext>
+                  </a:extLst>
+                </a:gridCol>
               </a:tblGrid>
               <a:tr h="594360">
                 <a:tc>
@@ -3090,6 +2931,11 @@
                     </a:solidFill>
                   </a:tcPr>
                 </a:tc>
+                <a:extLst>
+                  <a:ext uri="{0D108BD9-81ED-4DB2-BD59-A6C34878D82A}">
+                    <a16:rowId xmlns:a16="http://schemas.microsoft.com/office/drawing/2014/main" val="10000"/>
+                  </a:ext>
+                </a:extLst>
               </a:tr>
               <a:tr h="619125">
                 <a:tc>
@@ -3271,7 +3117,6 @@
                         </a:rPr>
                         <a:t>200</a:t>
                       </a:r>
-                      <a:pPr algn="l"/>
                       <a:r>
                         <a:rPr lang="en-US" sz="1500" dirty="0">
                           <a:solidFill>
@@ -3283,7 +3128,6 @@
                         </a:rPr>
                         <a:t> OK, </a:t>
                       </a:r>
-                      <a:pPr algn="l"/>
                       <a:r>
                         <a:rPr lang="en-US" sz="1500" b="1" dirty="0">
                           <a:solidFill>
@@ -3295,7 +3139,6 @@
                         </a:rPr>
                         <a:t>201</a:t>
                       </a:r>
-                      <a:pPr algn="l"/>
                       <a:r>
                         <a:rPr lang="en-US" sz="1500" dirty="0">
                           <a:solidFill>
@@ -3307,7 +3150,6 @@
                         </a:rPr>
                         <a:t> Created, </a:t>
                       </a:r>
-                      <a:pPr algn="l"/>
                       <a:r>
                         <a:rPr lang="en-US" sz="1500" b="1" dirty="0">
                           <a:solidFill>
@@ -3319,7 +3161,6 @@
                         </a:rPr>
                         <a:t>204</a:t>
                       </a:r>
-                      <a:pPr algn="l"/>
                       <a:r>
                         <a:rPr lang="en-US" sz="1500" dirty="0">
                           <a:solidFill>
@@ -3368,6 +3209,11 @@
                     </a:solidFill>
                   </a:tcPr>
                 </a:tc>
+                <a:extLst>
+                  <a:ext uri="{0D108BD9-81ED-4DB2-BD59-A6C34878D82A}">
+                    <a16:rowId xmlns:a16="http://schemas.microsoft.com/office/drawing/2014/main" val="10001"/>
+                  </a:ext>
+                </a:extLst>
               </a:tr>
               <a:tr h="619125">
                 <a:tc>
@@ -3549,7 +3395,6 @@
                         </a:rPr>
                         <a:t>301</a:t>
                       </a:r>
-                      <a:pPr algn="l"/>
                       <a:r>
                         <a:rPr lang="en-US" sz="1500" dirty="0">
                           <a:solidFill>
@@ -3561,7 +3406,6 @@
                         </a:rPr>
                         <a:t> Moved Permanently, </a:t>
                       </a:r>
-                      <a:pPr algn="l"/>
                       <a:r>
                         <a:rPr lang="en-US" sz="1500" b="1" dirty="0">
                           <a:solidFill>
@@ -3573,7 +3417,6 @@
                         </a:rPr>
                         <a:t>304</a:t>
                       </a:r>
-                      <a:pPr algn="l"/>
                       <a:r>
                         <a:rPr lang="en-US" sz="1500" dirty="0">
                           <a:solidFill>
@@ -3622,6 +3465,11 @@
                     </a:solidFill>
                   </a:tcPr>
                 </a:tc>
+                <a:extLst>
+                  <a:ext uri="{0D108BD9-81ED-4DB2-BD59-A6C34878D82A}">
+                    <a16:rowId xmlns:a16="http://schemas.microsoft.com/office/drawing/2014/main" val="10002"/>
+                  </a:ext>
+                </a:extLst>
               </a:tr>
               <a:tr h="619125">
                 <a:tc>
@@ -3803,7 +3651,6 @@
                         </a:rPr>
                         <a:t>400</a:t>
                       </a:r>
-                      <a:pPr algn="l"/>
                       <a:r>
                         <a:rPr lang="en-US" sz="1500" dirty="0">
                           <a:solidFill>
@@ -3815,7 +3662,6 @@
                         </a:rPr>
                         <a:t> Bad Request, </a:t>
                       </a:r>
-                      <a:pPr algn="l"/>
                       <a:r>
                         <a:rPr lang="en-US" sz="1500" b="1" dirty="0">
                           <a:solidFill>
@@ -3827,7 +3673,6 @@
                         </a:rPr>
                         <a:t>401</a:t>
                       </a:r>
-                      <a:pPr algn="l"/>
                       <a:r>
                         <a:rPr lang="en-US" sz="1500" dirty="0">
                           <a:solidFill>
@@ -3839,7 +3684,6 @@
                         </a:rPr>
                         <a:t> Unauthorized, </a:t>
                       </a:r>
-                      <a:pPr algn="l"/>
                       <a:r>
                         <a:rPr lang="en-US" sz="1500" b="1" dirty="0">
                           <a:solidFill>
@@ -3851,7 +3695,6 @@
                         </a:rPr>
                         <a:t>403</a:t>
                       </a:r>
-                      <a:pPr algn="l"/>
                       <a:r>
                         <a:rPr lang="en-US" sz="1500" dirty="0">
                           <a:solidFill>
@@ -3900,6 +3743,11 @@
                     </a:solidFill>
                   </a:tcPr>
                 </a:tc>
+                <a:extLst>
+                  <a:ext uri="{0D108BD9-81ED-4DB2-BD59-A6C34878D82A}">
+                    <a16:rowId xmlns:a16="http://schemas.microsoft.com/office/drawing/2014/main" val="10003"/>
+                  </a:ext>
+                </a:extLst>
               </a:tr>
               <a:tr h="619125">
                 <a:tc>
@@ -4081,7 +3929,6 @@
                         </a:rPr>
                         <a:t>404</a:t>
                       </a:r>
-                      <a:pPr algn="l"/>
                       <a:r>
                         <a:rPr lang="en-US" sz="1500" dirty="0">
                           <a:solidFill>
@@ -4093,7 +3940,6 @@
                         </a:rPr>
                         <a:t> Not Found, </a:t>
                       </a:r>
-                      <a:pPr algn="l"/>
                       <a:r>
                         <a:rPr lang="en-US" sz="1500" b="1" dirty="0">
                           <a:solidFill>
@@ -4105,7 +3951,6 @@
                         </a:rPr>
                         <a:t>409</a:t>
                       </a:r>
-                      <a:pPr algn="l"/>
                       <a:r>
                         <a:rPr lang="en-US" sz="1500" dirty="0">
                           <a:solidFill>
@@ -4117,7 +3962,6 @@
                         </a:rPr>
                         <a:t> Conflict, </a:t>
                       </a:r>
-                      <a:pPr algn="l"/>
                       <a:r>
                         <a:rPr lang="en-US" sz="1500" b="1" dirty="0">
                           <a:solidFill>
@@ -4129,7 +3973,6 @@
                         </a:rPr>
                         <a:t>422</a:t>
                       </a:r>
-                      <a:pPr algn="l"/>
                       <a:r>
                         <a:rPr lang="en-US" sz="1500" dirty="0">
                           <a:solidFill>
@@ -4178,6 +4021,11 @@
                     </a:solidFill>
                   </a:tcPr>
                 </a:tc>
+                <a:extLst>
+                  <a:ext uri="{0D108BD9-81ED-4DB2-BD59-A6C34878D82A}">
+                    <a16:rowId xmlns:a16="http://schemas.microsoft.com/office/drawing/2014/main" val="10004"/>
+                  </a:ext>
+                </a:extLst>
               </a:tr>
               <a:tr h="619125">
                 <a:tc>
@@ -4359,7 +4207,6 @@
                         </a:rPr>
                         <a:t>500</a:t>
                       </a:r>
-                      <a:pPr algn="l"/>
                       <a:r>
                         <a:rPr lang="en-US" sz="1500" dirty="0">
                           <a:solidFill>
@@ -4371,7 +4218,6 @@
                         </a:rPr>
                         <a:t> Internal Error, </a:t>
                       </a:r>
-                      <a:pPr algn="l"/>
                       <a:r>
                         <a:rPr lang="en-US" sz="1500" b="1" dirty="0">
                           <a:solidFill>
@@ -4383,7 +4229,6 @@
                         </a:rPr>
                         <a:t>502</a:t>
                       </a:r>
-                      <a:pPr algn="l"/>
                       <a:r>
                         <a:rPr lang="en-US" sz="1500" dirty="0">
                           <a:solidFill>
@@ -4395,7 +4240,6 @@
                         </a:rPr>
                         <a:t> Bad Gateway, </a:t>
                       </a:r>
-                      <a:pPr algn="l"/>
                       <a:r>
                         <a:rPr lang="en-US" sz="1500" b="1" dirty="0">
                           <a:solidFill>
@@ -4407,7 +4251,6 @@
                         </a:rPr>
                         <a:t>503</a:t>
                       </a:r>
-                      <a:pPr algn="l"/>
                       <a:r>
                         <a:rPr lang="en-US" sz="1500" dirty="0">
                           <a:solidFill>
@@ -4456,6 +4299,11 @@
                     </a:solidFill>
                   </a:tcPr>
                 </a:tc>
+                <a:extLst>
+                  <a:ext uri="{0D108BD9-81ED-4DB2-BD59-A6C34878D82A}">
+                    <a16:rowId xmlns:a16="http://schemas.microsoft.com/office/drawing/2014/main" val="10005"/>
+                  </a:ext>
+                </a:extLst>
               </a:tr>
             </a:tbl>
           </a:graphicData>
@@ -4484,6 +4332,13 @@
           </a:solidFill>
           <a:ln/>
         </p:spPr>
+        <p:txBody>
+          <a:bodyPr/>
+          <a:lstStyle/>
+          <a:p>
+            <a:endParaRPr lang="en-US"/>
+          </a:p>
+        </p:txBody>
       </p:sp>
       <p:sp>
         <p:nvSpPr>
@@ -4504,6 +4359,13 @@
           </a:solidFill>
           <a:ln/>
         </p:spPr>
+        <p:txBody>
+          <a:bodyPr/>
+          <a:lstStyle/>
+          <a:p>
+            <a:endParaRPr lang="en-US"/>
+          </a:p>
+        </p:txBody>
       </p:sp>
       <p:sp>
         <p:nvSpPr>
@@ -4640,6 +4502,13 @@
           </a:solidFill>
           <a:ln/>
         </p:spPr>
+        <p:txBody>
+          <a:bodyPr/>
+          <a:lstStyle/>
+          <a:p>
+            <a:endParaRPr lang="en-US"/>
+          </a:p>
+        </p:txBody>
       </p:sp>
       <p:sp>
         <p:nvSpPr>
@@ -4678,11 +4547,6 @@
               </a:rPr>
               <a:t>Remember:</a:t>
             </a:r>
-            <a:pPr algn="l">
-              <a:lnSpc>
-                <a:spcPct val="150000"/>
-              </a:lnSpc>
-            </a:pPr>
             <a:r>
               <a:rPr lang="en-US" sz="1600" dirty="0">
                 <a:solidFill>
@@ -4700,7 +4564,7 @@
       </p:sp>
       <p:sp>
         <p:nvSpPr>
-          <p:cNvPr id="11" name="Shape 8"/>
+          <p:cNvPr id="6" name="Shape 8"/>
           <p:cNvSpPr/>
           <p:nvPr/>
         </p:nvSpPr>
@@ -4724,6 +4588,13 @@
             <a:tailEnd type="none"/>
           </a:ln>
         </p:spPr>
+        <p:txBody>
+          <a:bodyPr/>
+          <a:lstStyle/>
+          <a:p>
+            <a:endParaRPr lang="en-US"/>
+          </a:p>
+        </p:txBody>
       </p:sp>
     </p:spTree>
   </p:cSld>
@@ -4732,7 +4603,6 @@
   </p:clrMapOvr>
   <p:transition>
     <p:fade/>
-    <p:spd val="med"/>
   </p:transition>
 </p:sld>
 </file>
@@ -4756,15 +4626,15 @@
       </p:grpSpPr>
       <p:pic>
         <p:nvPicPr>
-          <p:cNvPr id="2" name="Image 0" descr="https://kimi-img.moonshot.cn/pub/slides/okc/r3tmzt32f22la/mnt/agents/output/api_design/images/1_Futuristic_Data_Center_Server_Racks.png">    </p:cNvPr>
+          <p:cNvPr id="2" name="Image 0" descr="https://kimi-img.moonshot.cn/pub/slides/okc/r3tmzt32f22la/mnt/agents/output/api_design/images/1_Futuristic_Data_Center_Server_Racks.png"/>
           <p:cNvPicPr>
             <a:picLocks noChangeAspect="1"/>
           </p:cNvPicPr>
           <p:nvPr/>
         </p:nvPicPr>
         <p:blipFill>
-          <a:blip r:embed="rId1"/>
-          <a:srcRect l="0" r="0" t="9821" b="9821"/>
+          <a:blip r:embed="rId3"/>
+          <a:srcRect t="9821" b="9821"/>
           <a:stretch/>
         </p:blipFill>
         <p:spPr>
@@ -4791,7 +4661,7 @@
           <a:prstGeom prst="rect">
             <a:avLst/>
           </a:prstGeom>
-          <a:gradFill rotWithShape="1" flip="none">
+          <a:gradFill flip="none" rotWithShape="1">
             <a:gsLst>
               <a:gs pos="0">
                 <a:srgbClr val="1B4D4D">
@@ -4815,6 +4685,13 @@
             <a:prstDash val="solid"/>
           </a:ln>
         </p:spPr>
+        <p:txBody>
+          <a:bodyPr/>
+          <a:lstStyle/>
+          <a:p>
+            <a:endParaRPr lang="en-US"/>
+          </a:p>
+        </p:txBody>
       </p:sp>
       <p:sp>
         <p:nvSpPr>
@@ -4876,6 +4753,13 @@
           </a:solidFill>
           <a:ln/>
         </p:spPr>
+        <p:txBody>
+          <a:bodyPr/>
+          <a:lstStyle/>
+          <a:p>
+            <a:endParaRPr lang="en-US"/>
+          </a:p>
+        </p:txBody>
       </p:sp>
       <p:sp>
         <p:nvSpPr>
@@ -4904,7 +4788,7 @@
               </a:lnSpc>
             </a:pPr>
             <a:r>
-              <a:rPr lang="en-US" sz="4000" spc="400" kern="0" dirty="0">
+              <a:rPr lang="en-US" sz="4000" kern="0" spc="400" dirty="0">
                 <a:solidFill>
                   <a:srgbClr val="FFFFFF"/>
                 </a:solidFill>
@@ -4966,7 +4850,6 @@
   </p:clrMapOvr>
   <p:transition>
     <p:fade/>
-    <p:spd val="med"/>
   </p:transition>
 </p:sld>
 </file>
@@ -4979,6 +4862,7 @@
         <a:solidFill>
           <a:srgbClr val="F5F3EF"/>
         </a:solidFill>
+        <a:effectLst/>
       </p:bgPr>
     </p:bg>
     <p:spTree>
@@ -5022,7 +4906,7 @@
               </a:lnSpc>
             </a:pPr>
             <a:r>
-              <a:rPr lang="en-US" sz="1300" spc="200" kern="0" dirty="0">
+              <a:rPr lang="en-US" sz="1300" kern="0" spc="200" dirty="0">
                 <a:solidFill>
                   <a:srgbClr val="8A9B8C"/>
                 </a:solidFill>
@@ -5096,6 +4980,13 @@
           </a:solidFill>
           <a:ln/>
         </p:spPr>
+        <p:txBody>
+          <a:bodyPr/>
+          <a:lstStyle/>
+          <a:p>
+            <a:endParaRPr lang="en-US"/>
+          </a:p>
+        </p:txBody>
       </p:sp>
       <p:sp>
         <p:nvSpPr>
@@ -5124,7 +5015,7 @@
               </a:lnSpc>
             </a:pPr>
             <a:r>
-              <a:rPr lang="en-US" sz="1300" spc="200" kern="0" dirty="0">
+              <a:rPr lang="en-US" sz="1300" kern="0" spc="200" dirty="0">
                 <a:solidFill>
                   <a:srgbClr val="D4943A"/>
                 </a:solidFill>
@@ -5159,6 +5050,13 @@
           </a:solidFill>
           <a:ln/>
         </p:spPr>
+        <p:txBody>
+          <a:bodyPr/>
+          <a:lstStyle/>
+          <a:p>
+            <a:endParaRPr lang="en-US"/>
+          </a:p>
+        </p:txBody>
       </p:sp>
       <p:sp>
         <p:nvSpPr>
@@ -5262,6 +5160,13 @@
           </a:solidFill>
           <a:ln/>
         </p:spPr>
+        <p:txBody>
+          <a:bodyPr/>
+          <a:lstStyle/>
+          <a:p>
+            <a:endParaRPr lang="en-US"/>
+          </a:p>
+        </p:txBody>
       </p:sp>
       <p:sp>
         <p:nvSpPr>
@@ -5300,11 +5205,6 @@
               </a:rPr>
               <a:t>Backward Compatibility</a:t>
             </a:r>
-            <a:pPr algn="l">
-              <a:lnSpc>
-                <a:spcPct val="140000"/>
-              </a:lnSpc>
-            </a:pPr>
             <a:r>
               <a:rPr lang="en-US" sz="1400" dirty="0">
                 <a:solidFill>
@@ -5341,6 +5241,13 @@
           </a:solidFill>
           <a:ln/>
         </p:spPr>
+        <p:txBody>
+          <a:bodyPr/>
+          <a:lstStyle/>
+          <a:p>
+            <a:endParaRPr lang="en-US"/>
+          </a:p>
+        </p:txBody>
       </p:sp>
       <p:sp>
         <p:nvSpPr>
@@ -5751,6 +5658,13 @@
           </a:solidFill>
           <a:ln/>
         </p:spPr>
+        <p:txBody>
+          <a:bodyPr/>
+          <a:lstStyle/>
+          <a:p>
+            <a:endParaRPr lang="en-US"/>
+          </a:p>
+        </p:txBody>
       </p:sp>
       <p:sp>
         <p:nvSpPr>
@@ -5789,11 +5703,6 @@
               </a:rPr>
               <a:t>Controlled Upgrades</a:t>
             </a:r>
-            <a:pPr algn="l">
-              <a:lnSpc>
-                <a:spcPct val="140000"/>
-              </a:lnSpc>
-            </a:pPr>
             <a:r>
               <a:rPr lang="en-US" sz="1400" dirty="0">
                 <a:solidFill>
@@ -5830,6 +5739,13 @@
           </a:solidFill>
           <a:ln/>
         </p:spPr>
+        <p:txBody>
+          <a:bodyPr/>
+          <a:lstStyle/>
+          <a:p>
+            <a:endParaRPr lang="en-US"/>
+          </a:p>
+        </p:txBody>
       </p:sp>
       <p:sp>
         <p:nvSpPr>
@@ -5998,6 +5914,13 @@
           </a:solidFill>
           <a:ln/>
         </p:spPr>
+        <p:txBody>
+          <a:bodyPr/>
+          <a:lstStyle/>
+          <a:p>
+            <a:endParaRPr lang="en-US"/>
+          </a:p>
+        </p:txBody>
       </p:sp>
       <p:sp>
         <p:nvSpPr>
@@ -6036,11 +5959,6 @@
               </a:rPr>
               <a:t>Deprecation Strategy</a:t>
             </a:r>
-            <a:pPr algn="l">
-              <a:lnSpc>
-                <a:spcPct val="140000"/>
-              </a:lnSpc>
-            </a:pPr>
             <a:r>
               <a:rPr lang="en-US" sz="1400" dirty="0">
                 <a:solidFill>
@@ -6083,7 +6001,7 @@
               </a:lnSpc>
             </a:pPr>
             <a:r>
-              <a:rPr lang="en-US" sz="1300" spc="200" kern="0" dirty="0">
+              <a:rPr lang="en-US" sz="1300" kern="0" spc="200" dirty="0">
                 <a:solidFill>
                   <a:srgbClr val="D4943A"/>
                 </a:solidFill>
@@ -6118,6 +6036,13 @@
           </a:solidFill>
           <a:ln/>
         </p:spPr>
+        <p:txBody>
+          <a:bodyPr/>
+          <a:lstStyle/>
+          <a:p>
+            <a:endParaRPr lang="en-US"/>
+          </a:p>
+        </p:txBody>
       </p:sp>
       <p:sp>
         <p:nvSpPr>
@@ -6146,7 +6071,7 @@
               </a:lnSpc>
             </a:pPr>
             <a:r>
-              <a:rPr lang="en-US" sz="1200" spc="100" kern="0" dirty="0">
+              <a:rPr lang="en-US" sz="1200" kern="0" spc="100" dirty="0">
                 <a:solidFill>
                   <a:srgbClr val="D4943A"/>
                 </a:solidFill>
@@ -6279,11 +6204,6 @@
               </a:rPr>
               <a:t>Pros:</a:t>
             </a:r>
-            <a:pPr algn="l">
-              <a:lnSpc>
-                <a:spcPct val="150000"/>
-              </a:lnSpc>
-            </a:pPr>
             <a:r>
               <a:rPr lang="en-US" sz="1400" dirty="0">
                 <a:solidFill>
@@ -6317,6 +6237,183 @@
               </a:rPr>
               <a:t>Cons:</a:t>
             </a:r>
+            <a:r>
+              <a:rPr lang="en-US" sz="1400" dirty="0">
+                <a:solidFill>
+                  <a:srgbClr val="FFFFFF"/>
+                </a:solidFill>
+                <a:latin typeface="Quattrocento Sans" pitchFamily="34" charset="0"/>
+                <a:ea typeface="Quattrocento Sans" pitchFamily="34" charset="-122"/>
+                <a:cs typeface="Quattrocento Sans" pitchFamily="34" charset="-120"/>
+              </a:rPr>
+              <a:t> Alters URL structure, can clutter routes</a:t>
+            </a:r>
+            <a:endParaRPr lang="en-US" sz="1400" dirty="0"/>
+          </a:p>
+        </p:txBody>
+      </p:sp>
+      <p:sp>
+        <p:nvSpPr>
+          <p:cNvPr id="21" name="Shape 19"/>
+          <p:cNvSpPr/>
+          <p:nvPr/>
+        </p:nvSpPr>
+        <p:spPr>
+          <a:xfrm>
+            <a:off x="5778500" y="3683000"/>
+            <a:ext cx="4699000" cy="3302000"/>
+          </a:xfrm>
+          <a:prstGeom prst="roundRect">
+            <a:avLst>
+              <a:gd name="adj" fmla="val 8000"/>
+            </a:avLst>
+          </a:prstGeom>
+          <a:solidFill>
+            <a:srgbClr val="E8EDE9"/>
+          </a:solidFill>
+          <a:ln/>
+        </p:spPr>
+        <p:txBody>
+          <a:bodyPr/>
+          <a:lstStyle/>
+          <a:p>
+            <a:endParaRPr lang="en-US"/>
+          </a:p>
+        </p:txBody>
+      </p:sp>
+      <p:sp>
+        <p:nvSpPr>
+          <p:cNvPr id="22" name="Text 20"/>
+          <p:cNvSpPr/>
+          <p:nvPr/>
+        </p:nvSpPr>
+        <p:spPr>
+          <a:xfrm>
+            <a:off x="6032500" y="3937000"/>
+            <a:ext cx="4191000" cy="381000"/>
+          </a:xfrm>
+          <a:prstGeom prst="rect">
+            <a:avLst/>
+          </a:prstGeom>
+          <a:noFill/>
+          <a:ln/>
+        </p:spPr>
+        <p:txBody>
+          <a:bodyPr wrap="none" lIns="0" tIns="0" rIns="0" bIns="0" rtlCol="0" anchor="ctr"/>
+          <a:lstStyle/>
+          <a:p>
+            <a:pPr algn="l">
+              <a:lnSpc>
+                <a:spcPct val="120000"/>
+              </a:lnSpc>
+            </a:pPr>
+            <a:r>
+              <a:rPr lang="en-US" sz="2000" b="1" dirty="0">
+                <a:solidFill>
+                  <a:srgbClr val="1B4D4D"/>
+                </a:solidFill>
+                <a:latin typeface="Liter" pitchFamily="34" charset="0"/>
+                <a:ea typeface="Liter" pitchFamily="34" charset="-122"/>
+                <a:cs typeface="Liter" pitchFamily="34" charset="-120"/>
+              </a:rPr>
+              <a:t>Header-Based</a:t>
+            </a:r>
+            <a:endParaRPr lang="en-US" sz="2000" dirty="0"/>
+          </a:p>
+        </p:txBody>
+      </p:sp>
+      <p:sp>
+        <p:nvSpPr>
+          <p:cNvPr id="23" name="Text 21"/>
+          <p:cNvSpPr/>
+          <p:nvPr/>
+        </p:nvSpPr>
+        <p:spPr>
+          <a:xfrm>
+            <a:off x="6032500" y="4419600"/>
+            <a:ext cx="4191000" cy="355600"/>
+          </a:xfrm>
+          <a:prstGeom prst="rect">
+            <a:avLst/>
+          </a:prstGeom>
+          <a:noFill/>
+          <a:ln/>
+        </p:spPr>
+        <p:txBody>
+          <a:bodyPr wrap="none" lIns="0" tIns="0" rIns="0" bIns="0" rtlCol="0" anchor="ctr"/>
+          <a:lstStyle/>
+          <a:p>
+            <a:pPr algn="l">
+              <a:lnSpc>
+                <a:spcPct val="120000"/>
+              </a:lnSpc>
+            </a:pPr>
+            <a:r>
+              <a:rPr lang="en-US" sz="1300" dirty="0">
+                <a:solidFill>
+                  <a:srgbClr val="D4943A"/>
+                </a:solidFill>
+                <a:latin typeface="Quattrocento Sans" pitchFamily="34" charset="0"/>
+                <a:ea typeface="Quattrocento Sans" pitchFamily="34" charset="-122"/>
+                <a:cs typeface="Quattrocento Sans" pitchFamily="34" charset="-120"/>
+              </a:rPr>
+              <a:t>Accept: application/vnd.v2+json</a:t>
+            </a:r>
+            <a:endParaRPr lang="en-US" sz="1300" dirty="0"/>
+          </a:p>
+        </p:txBody>
+      </p:sp>
+      <p:sp>
+        <p:nvSpPr>
+          <p:cNvPr id="24" name="Text 22"/>
+          <p:cNvSpPr/>
+          <p:nvPr/>
+        </p:nvSpPr>
+        <p:spPr>
+          <a:xfrm>
+            <a:off x="6032500" y="4889500"/>
+            <a:ext cx="4191000" cy="1841500"/>
+          </a:xfrm>
+          <a:prstGeom prst="rect">
+            <a:avLst/>
+          </a:prstGeom>
+          <a:noFill/>
+          <a:ln/>
+        </p:spPr>
+        <p:txBody>
+          <a:bodyPr wrap="square" lIns="0" tIns="0" rIns="0" bIns="0" rtlCol="0" anchor="t"/>
+          <a:lstStyle/>
+          <a:p>
+            <a:pPr algn="l">
+              <a:lnSpc>
+                <a:spcPct val="150000"/>
+              </a:lnSpc>
+            </a:pPr>
+            <a:r>
+              <a:rPr lang="en-US" sz="1400" dirty="0">
+                <a:solidFill>
+                  <a:srgbClr val="D4943A"/>
+                </a:solidFill>
+                <a:latin typeface="Quattrocento Sans" pitchFamily="34" charset="0"/>
+                <a:ea typeface="Quattrocento Sans" pitchFamily="34" charset="-122"/>
+                <a:cs typeface="Quattrocento Sans" pitchFamily="34" charset="-120"/>
+              </a:rPr>
+              <a:t>Pros:</a:t>
+            </a:r>
+            <a:r>
+              <a:rPr lang="en-US" sz="1400" dirty="0">
+                <a:solidFill>
+                  <a:srgbClr val="1C1C1E"/>
+                </a:solidFill>
+                <a:latin typeface="Quattrocento Sans" pitchFamily="34" charset="0"/>
+                <a:ea typeface="Quattrocento Sans" pitchFamily="34" charset="-122"/>
+                <a:cs typeface="Quattrocento Sans" pitchFamily="34" charset="-120"/>
+              </a:rPr>
+              <a:t> Keeps URLs clean and unchanged</a:t>
+            </a:r>
+            <a:endParaRPr lang="en-US" sz="1400" dirty="0"/>
+          </a:p>
+          <a:p>
             <a:pPr algn="l">
               <a:lnSpc>
                 <a:spcPct val="150000"/>
@@ -6328,13 +6425,24 @@
             <a:r>
               <a:rPr lang="en-US" sz="1400" dirty="0">
                 <a:solidFill>
-                  <a:srgbClr val="FFFFFF"/>
-                </a:solidFill>
-                <a:latin typeface="Quattrocento Sans" pitchFamily="34" charset="0"/>
-                <a:ea typeface="Quattrocento Sans" pitchFamily="34" charset="-122"/>
-                <a:cs typeface="Quattrocento Sans" pitchFamily="34" charset="-120"/>
-              </a:rPr>
-              <a:t> Alters URL structure, can clutter routes</a:t>
+                  <a:srgbClr val="FF6B6B"/>
+                </a:solidFill>
+                <a:latin typeface="Quattrocento Sans" pitchFamily="34" charset="0"/>
+                <a:ea typeface="Quattrocento Sans" pitchFamily="34" charset="-122"/>
+                <a:cs typeface="Quattrocento Sans" pitchFamily="34" charset="-120"/>
+              </a:rPr>
+              <a:t>Cons:</a:t>
+            </a:r>
+            <a:r>
+              <a:rPr lang="en-US" sz="1400" dirty="0">
+                <a:solidFill>
+                  <a:srgbClr val="1C1C1E"/>
+                </a:solidFill>
+                <a:latin typeface="Quattrocento Sans" pitchFamily="34" charset="0"/>
+                <a:ea typeface="Quattrocento Sans" pitchFamily="34" charset="-122"/>
+                <a:cs typeface="Quattrocento Sans" pitchFamily="34" charset="-120"/>
+              </a:rPr>
+              <a:t> Requires header management, more complex setup</a:t>
             </a:r>
             <a:endParaRPr lang="en-US" sz="1400" dirty="0"/>
           </a:p>
@@ -6342,13 +6450,13 @@
       </p:sp>
       <p:sp>
         <p:nvSpPr>
-          <p:cNvPr id="21" name="Shape 19"/>
-          <p:cNvSpPr/>
-          <p:nvPr/>
-        </p:nvSpPr>
-        <p:spPr>
-          <a:xfrm>
-            <a:off x="5778500" y="3683000"/>
+          <p:cNvPr id="25" name="Shape 23"/>
+          <p:cNvSpPr/>
+          <p:nvPr/>
+        </p:nvSpPr>
+        <p:spPr>
+          <a:xfrm>
+            <a:off x="10795000" y="3683000"/>
             <a:ext cx="4699000" cy="3302000"/>
           </a:xfrm>
           <a:prstGeom prst="roundRect">
@@ -6361,16 +6469,23 @@
           </a:solidFill>
           <a:ln/>
         </p:spPr>
-      </p:sp>
-      <p:sp>
-        <p:nvSpPr>
-          <p:cNvPr id="22" name="Text 20"/>
-          <p:cNvSpPr/>
-          <p:nvPr/>
-        </p:nvSpPr>
-        <p:spPr>
-          <a:xfrm>
-            <a:off x="6032500" y="3937000"/>
+        <p:txBody>
+          <a:bodyPr/>
+          <a:lstStyle/>
+          <a:p>
+            <a:endParaRPr lang="en-US"/>
+          </a:p>
+        </p:txBody>
+      </p:sp>
+      <p:sp>
+        <p:nvSpPr>
+          <p:cNvPr id="26" name="Text 24"/>
+          <p:cNvSpPr/>
+          <p:nvPr/>
+        </p:nvSpPr>
+        <p:spPr>
+          <a:xfrm>
+            <a:off x="11049000" y="3937000"/>
             <a:ext cx="4191000" cy="381000"/>
           </a:xfrm>
           <a:prstGeom prst="rect">
@@ -6397,7 +6512,7 @@
                 <a:ea typeface="Liter" pitchFamily="34" charset="-122"/>
                 <a:cs typeface="Liter" pitchFamily="34" charset="-120"/>
               </a:rPr>
-              <a:t>Header-Based</a:t>
+              <a:t>Query Parameter</a:t>
             </a:r>
             <a:endParaRPr lang="en-US" sz="2000" dirty="0"/>
           </a:p>
@@ -6405,13 +6520,13 @@
       </p:sp>
       <p:sp>
         <p:nvSpPr>
-          <p:cNvPr id="23" name="Text 21"/>
-          <p:cNvSpPr/>
-          <p:nvPr/>
-        </p:nvSpPr>
-        <p:spPr>
-          <a:xfrm>
-            <a:off x="6032500" y="4419600"/>
+          <p:cNvPr id="27" name="Text 25"/>
+          <p:cNvSpPr/>
+          <p:nvPr/>
+        </p:nvSpPr>
+        <p:spPr>
+          <a:xfrm>
+            <a:off x="11049000" y="4419600"/>
             <a:ext cx="4191000" cy="355600"/>
           </a:xfrm>
           <a:prstGeom prst="rect">
@@ -6430,7 +6545,7 @@
               </a:lnSpc>
             </a:pPr>
             <a:r>
-              <a:rPr lang="en-US" sz="1300" dirty="0">
+              <a:rPr lang="en-US" sz="1500" dirty="0">
                 <a:solidFill>
                   <a:srgbClr val="D4943A"/>
                 </a:solidFill>
@@ -6438,21 +6553,21 @@
                 <a:ea typeface="Quattrocento Sans" pitchFamily="34" charset="-122"/>
                 <a:cs typeface="Quattrocento Sans" pitchFamily="34" charset="-120"/>
               </a:rPr>
-              <a:t>Accept: application/vnd.v2+json</a:t>
-            </a:r>
-            <a:endParaRPr lang="en-US" sz="1300" dirty="0"/>
-          </a:p>
-        </p:txBody>
-      </p:sp>
-      <p:sp>
-        <p:nvSpPr>
-          <p:cNvPr id="24" name="Text 22"/>
-          <p:cNvSpPr/>
-          <p:nvPr/>
-        </p:nvSpPr>
-        <p:spPr>
-          <a:xfrm>
-            <a:off x="6032500" y="4889500"/>
+              <a:t>/users?version=2</a:t>
+            </a:r>
+            <a:endParaRPr lang="en-US" sz="1500" dirty="0"/>
+          </a:p>
+        </p:txBody>
+      </p:sp>
+      <p:sp>
+        <p:nvSpPr>
+          <p:cNvPr id="28" name="Text 26"/>
+          <p:cNvSpPr/>
+          <p:nvPr/>
+        </p:nvSpPr>
+        <p:spPr>
+          <a:xfrm>
+            <a:off x="11049000" y="4889500"/>
             <a:ext cx="4191000" cy="1841500"/>
           </a:xfrm>
           <a:prstGeom prst="rect">
@@ -6481,11 +6596,6 @@
               </a:rPr>
               <a:t>Pros:</a:t>
             </a:r>
-            <a:pPr algn="l">
-              <a:lnSpc>
-                <a:spcPct val="150000"/>
-              </a:lnSpc>
-            </a:pPr>
             <a:r>
               <a:rPr lang="en-US" sz="1400" dirty="0">
                 <a:solidFill>
@@ -6495,7 +6605,7 @@
                 <a:ea typeface="Quattrocento Sans" pitchFamily="34" charset="-122"/>
                 <a:cs typeface="Quattrocento Sans" pitchFamily="34" charset="-120"/>
               </a:rPr>
-              <a:t> Keeps URLs clean and unchanged</a:t>
+              <a:t> Easy to implement</a:t>
             </a:r>
             <a:endParaRPr lang="en-US" sz="1400" dirty="0"/>
           </a:p>
@@ -6519,216 +6629,6 @@
               </a:rPr>
               <a:t>Cons:</a:t>
             </a:r>
-            <a:pPr algn="l">
-              <a:lnSpc>
-                <a:spcPct val="150000"/>
-              </a:lnSpc>
-              <a:spcBef>
-                <a:spcPts val="600"/>
-              </a:spcBef>
-            </a:pPr>
-            <a:r>
-              <a:rPr lang="en-US" sz="1400" dirty="0">
-                <a:solidFill>
-                  <a:srgbClr val="1C1C1E"/>
-                </a:solidFill>
-                <a:latin typeface="Quattrocento Sans" pitchFamily="34" charset="0"/>
-                <a:ea typeface="Quattrocento Sans" pitchFamily="34" charset="-122"/>
-                <a:cs typeface="Quattrocento Sans" pitchFamily="34" charset="-120"/>
-              </a:rPr>
-              <a:t> Requires header management, more complex setup</a:t>
-            </a:r>
-            <a:endParaRPr lang="en-US" sz="1400" dirty="0"/>
-          </a:p>
-        </p:txBody>
-      </p:sp>
-      <p:sp>
-        <p:nvSpPr>
-          <p:cNvPr id="25" name="Shape 23"/>
-          <p:cNvSpPr/>
-          <p:nvPr/>
-        </p:nvSpPr>
-        <p:spPr>
-          <a:xfrm>
-            <a:off x="10795000" y="3683000"/>
-            <a:ext cx="4699000" cy="3302000"/>
-          </a:xfrm>
-          <a:prstGeom prst="roundRect">
-            <a:avLst>
-              <a:gd name="adj" fmla="val 8000"/>
-            </a:avLst>
-          </a:prstGeom>
-          <a:solidFill>
-            <a:srgbClr val="E8EDE9"/>
-          </a:solidFill>
-          <a:ln/>
-        </p:spPr>
-      </p:sp>
-      <p:sp>
-        <p:nvSpPr>
-          <p:cNvPr id="26" name="Text 24"/>
-          <p:cNvSpPr/>
-          <p:nvPr/>
-        </p:nvSpPr>
-        <p:spPr>
-          <a:xfrm>
-            <a:off x="11049000" y="3937000"/>
-            <a:ext cx="4191000" cy="381000"/>
-          </a:xfrm>
-          <a:prstGeom prst="rect">
-            <a:avLst/>
-          </a:prstGeom>
-          <a:noFill/>
-          <a:ln/>
-        </p:spPr>
-        <p:txBody>
-          <a:bodyPr wrap="none" lIns="0" tIns="0" rIns="0" bIns="0" rtlCol="0" anchor="ctr"/>
-          <a:lstStyle/>
-          <a:p>
-            <a:pPr algn="l">
-              <a:lnSpc>
-                <a:spcPct val="120000"/>
-              </a:lnSpc>
-            </a:pPr>
-            <a:r>
-              <a:rPr lang="en-US" sz="2000" b="1" dirty="0">
-                <a:solidFill>
-                  <a:srgbClr val="1B4D4D"/>
-                </a:solidFill>
-                <a:latin typeface="Liter" pitchFamily="34" charset="0"/>
-                <a:ea typeface="Liter" pitchFamily="34" charset="-122"/>
-                <a:cs typeface="Liter" pitchFamily="34" charset="-120"/>
-              </a:rPr>
-              <a:t>Query Parameter</a:t>
-            </a:r>
-            <a:endParaRPr lang="en-US" sz="2000" dirty="0"/>
-          </a:p>
-        </p:txBody>
-      </p:sp>
-      <p:sp>
-        <p:nvSpPr>
-          <p:cNvPr id="27" name="Text 25"/>
-          <p:cNvSpPr/>
-          <p:nvPr/>
-        </p:nvSpPr>
-        <p:spPr>
-          <a:xfrm>
-            <a:off x="11049000" y="4419600"/>
-            <a:ext cx="4191000" cy="355600"/>
-          </a:xfrm>
-          <a:prstGeom prst="rect">
-            <a:avLst/>
-          </a:prstGeom>
-          <a:noFill/>
-          <a:ln/>
-        </p:spPr>
-        <p:txBody>
-          <a:bodyPr wrap="none" lIns="0" tIns="0" rIns="0" bIns="0" rtlCol="0" anchor="ctr"/>
-          <a:lstStyle/>
-          <a:p>
-            <a:pPr algn="l">
-              <a:lnSpc>
-                <a:spcPct val="120000"/>
-              </a:lnSpc>
-            </a:pPr>
-            <a:r>
-              <a:rPr lang="en-US" sz="1500" dirty="0">
-                <a:solidFill>
-                  <a:srgbClr val="D4943A"/>
-                </a:solidFill>
-                <a:latin typeface="Quattrocento Sans" pitchFamily="34" charset="0"/>
-                <a:ea typeface="Quattrocento Sans" pitchFamily="34" charset="-122"/>
-                <a:cs typeface="Quattrocento Sans" pitchFamily="34" charset="-120"/>
-              </a:rPr>
-              <a:t>/users?version=2</a:t>
-            </a:r>
-            <a:endParaRPr lang="en-US" sz="1500" dirty="0"/>
-          </a:p>
-        </p:txBody>
-      </p:sp>
-      <p:sp>
-        <p:nvSpPr>
-          <p:cNvPr id="28" name="Text 26"/>
-          <p:cNvSpPr/>
-          <p:nvPr/>
-        </p:nvSpPr>
-        <p:spPr>
-          <a:xfrm>
-            <a:off x="11049000" y="4889500"/>
-            <a:ext cx="4191000" cy="1841500"/>
-          </a:xfrm>
-          <a:prstGeom prst="rect">
-            <a:avLst/>
-          </a:prstGeom>
-          <a:noFill/>
-          <a:ln/>
-        </p:spPr>
-        <p:txBody>
-          <a:bodyPr wrap="square" lIns="0" tIns="0" rIns="0" bIns="0" rtlCol="0" anchor="t"/>
-          <a:lstStyle/>
-          <a:p>
-            <a:pPr algn="l">
-              <a:lnSpc>
-                <a:spcPct val="150000"/>
-              </a:lnSpc>
-            </a:pPr>
-            <a:r>
-              <a:rPr lang="en-US" sz="1400" dirty="0">
-                <a:solidFill>
-                  <a:srgbClr val="D4943A"/>
-                </a:solidFill>
-                <a:latin typeface="Quattrocento Sans" pitchFamily="34" charset="0"/>
-                <a:ea typeface="Quattrocento Sans" pitchFamily="34" charset="-122"/>
-                <a:cs typeface="Quattrocento Sans" pitchFamily="34" charset="-120"/>
-              </a:rPr>
-              <a:t>Pros:</a:t>
-            </a:r>
-            <a:pPr algn="l">
-              <a:lnSpc>
-                <a:spcPct val="150000"/>
-              </a:lnSpc>
-            </a:pPr>
-            <a:r>
-              <a:rPr lang="en-US" sz="1400" dirty="0">
-                <a:solidFill>
-                  <a:srgbClr val="1C1C1E"/>
-                </a:solidFill>
-                <a:latin typeface="Quattrocento Sans" pitchFamily="34" charset="0"/>
-                <a:ea typeface="Quattrocento Sans" pitchFamily="34" charset="-122"/>
-                <a:cs typeface="Quattrocento Sans" pitchFamily="34" charset="-120"/>
-              </a:rPr>
-              <a:t> Easy to implement</a:t>
-            </a:r>
-            <a:endParaRPr lang="en-US" sz="1400" dirty="0"/>
-          </a:p>
-          <a:p>
-            <a:pPr algn="l">
-              <a:lnSpc>
-                <a:spcPct val="150000"/>
-              </a:lnSpc>
-              <a:spcBef>
-                <a:spcPts val="600"/>
-              </a:spcBef>
-            </a:pPr>
-            <a:r>
-              <a:rPr lang="en-US" sz="1400" dirty="0">
-                <a:solidFill>
-                  <a:srgbClr val="FF6B6B"/>
-                </a:solidFill>
-                <a:latin typeface="Quattrocento Sans" pitchFamily="34" charset="0"/>
-                <a:ea typeface="Quattrocento Sans" pitchFamily="34" charset="-122"/>
-                <a:cs typeface="Quattrocento Sans" pitchFamily="34" charset="-120"/>
-              </a:rPr>
-              <a:t>Cons:</a:t>
-            </a:r>
-            <a:pPr algn="l">
-              <a:lnSpc>
-                <a:spcPct val="150000"/>
-              </a:lnSpc>
-              <a:spcBef>
-                <a:spcPts val="600"/>
-              </a:spcBef>
-            </a:pPr>
             <a:r>
               <a:rPr lang="en-US" sz="1400" dirty="0">
                 <a:solidFill>
@@ -6770,6 +6670,13 @@
             <a:tailEnd type="none"/>
           </a:ln>
         </p:spPr>
+        <p:txBody>
+          <a:bodyPr/>
+          <a:lstStyle/>
+          <a:p>
+            <a:endParaRPr lang="en-US"/>
+          </a:p>
+        </p:txBody>
       </p:sp>
     </p:spTree>
   </p:cSld>
@@ -6778,7 +6685,6 @@
   </p:clrMapOvr>
   <p:transition>
     <p:fade/>
-    <p:spd val="med"/>
   </p:transition>
 </p:sld>
 </file>
@@ -6791,6 +6697,7 @@
         <a:solidFill>
           <a:srgbClr val="F5F3EF"/>
         </a:solidFill>
+        <a:effectLst/>
       </p:bgPr>
     </p:bg>
     <p:spTree>
@@ -6834,7 +6741,7 @@
               </a:lnSpc>
             </a:pPr>
             <a:r>
-              <a:rPr lang="en-US" sz="1300" spc="200" kern="0" dirty="0">
+              <a:rPr lang="en-US" sz="1300" kern="0" spc="200" dirty="0">
                 <a:solidFill>
                   <a:srgbClr val="8A9B8C"/>
                 </a:solidFill>
@@ -6908,6 +6815,13 @@
           </a:solidFill>
           <a:ln/>
         </p:spPr>
+        <p:txBody>
+          <a:bodyPr/>
+          <a:lstStyle/>
+          <a:p>
+            <a:endParaRPr lang="en-US"/>
+          </a:p>
+        </p:txBody>
       </p:sp>
       <p:sp>
         <p:nvSpPr>
@@ -6936,7 +6850,7 @@
               </a:lnSpc>
             </a:pPr>
             <a:r>
-              <a:rPr lang="en-US" sz="1300" spc="200" kern="0" dirty="0">
+              <a:rPr lang="en-US" sz="1300" kern="0" spc="200" dirty="0">
                 <a:solidFill>
                   <a:srgbClr val="D4943A"/>
                 </a:solidFill>
@@ -6987,6 +6901,64 @@
               </a:rPr>
               <a:t>1.</a:t>
             </a:r>
+            <a:r>
+              <a:rPr lang="en-US" sz="1600" dirty="0">
+                <a:solidFill>
+                  <a:srgbClr val="1C1C1E"/>
+                </a:solidFill>
+                <a:latin typeface="Quattrocento Sans" pitchFamily="34" charset="0"/>
+                <a:ea typeface="Quattrocento Sans" pitchFamily="34" charset="-122"/>
+                <a:cs typeface="Quattrocento Sans" pitchFamily="34" charset="-120"/>
+              </a:rPr>
+              <a:t> Use </a:t>
+            </a:r>
+            <a:r>
+              <a:rPr lang="en-US" sz="1600" b="1" dirty="0">
+                <a:solidFill>
+                  <a:srgbClr val="1C1C1E"/>
+                </a:solidFill>
+                <a:latin typeface="Quattrocento Sans" pitchFamily="34" charset="0"/>
+                <a:ea typeface="Quattrocento Sans" pitchFamily="34" charset="-122"/>
+                <a:cs typeface="Quattrocento Sans" pitchFamily="34" charset="-120"/>
+              </a:rPr>
+              <a:t>nouns</a:t>
+            </a:r>
+            <a:r>
+              <a:rPr lang="en-US" sz="1600" dirty="0">
+                <a:solidFill>
+                  <a:srgbClr val="1C1C1E"/>
+                </a:solidFill>
+                <a:latin typeface="Quattrocento Sans" pitchFamily="34" charset="0"/>
+                <a:ea typeface="Quattrocento Sans" pitchFamily="34" charset="-122"/>
+                <a:cs typeface="Quattrocento Sans" pitchFamily="34" charset="-120"/>
+              </a:rPr>
+              <a:t>, not verbs — /products not /getProducts</a:t>
+            </a:r>
+            <a:endParaRPr lang="en-US" sz="1600" dirty="0"/>
+          </a:p>
+        </p:txBody>
+      </p:sp>
+      <p:sp>
+        <p:nvSpPr>
+          <p:cNvPr id="7" name="Text 5"/>
+          <p:cNvSpPr/>
+          <p:nvPr/>
+        </p:nvSpPr>
+        <p:spPr>
+          <a:xfrm>
+            <a:off x="762000" y="2794000"/>
+            <a:ext cx="6858000" cy="698500"/>
+          </a:xfrm>
+          <a:prstGeom prst="rect">
+            <a:avLst/>
+          </a:prstGeom>
+          <a:noFill/>
+          <a:ln/>
+        </p:spPr>
+        <p:txBody>
+          <a:bodyPr wrap="square" lIns="0" tIns="0" rIns="0" bIns="0" rtlCol="0" anchor="t"/>
+          <a:lstStyle/>
+          <a:p>
             <a:pPr algn="l">
               <a:lnSpc>
                 <a:spcPct val="150000"/>
@@ -6995,20 +6967,100 @@
             <a:r>
               <a:rPr lang="en-US" sz="1600" dirty="0">
                 <a:solidFill>
+                  <a:srgbClr val="D4943A"/>
+                </a:solidFill>
+                <a:latin typeface="Quattrocento Sans" pitchFamily="34" charset="0"/>
+                <a:ea typeface="Quattrocento Sans" pitchFamily="34" charset="-122"/>
+                <a:cs typeface="Quattrocento Sans" pitchFamily="34" charset="-120"/>
+              </a:rPr>
+              <a:t>2.</a:t>
+            </a:r>
+            <a:r>
+              <a:rPr lang="en-US" sz="1600" dirty="0">
+                <a:solidFill>
                   <a:srgbClr val="1C1C1E"/>
                 </a:solidFill>
                 <a:latin typeface="Quattrocento Sans" pitchFamily="34" charset="0"/>
                 <a:ea typeface="Quattrocento Sans" pitchFamily="34" charset="-122"/>
                 <a:cs typeface="Quattrocento Sans" pitchFamily="34" charset="-120"/>
               </a:rPr>
-              <a:t> Use </a:t>
-            </a:r>
+              <a:t> Keep it </a:t>
+            </a:r>
+            <a:r>
+              <a:rPr lang="en-US" sz="1600" b="1" dirty="0">
+                <a:solidFill>
+                  <a:srgbClr val="1C1C1E"/>
+                </a:solidFill>
+                <a:latin typeface="Quattrocento Sans" pitchFamily="34" charset="0"/>
+                <a:ea typeface="Quattrocento Sans" pitchFamily="34" charset="-122"/>
+                <a:cs typeface="Quattrocento Sans" pitchFamily="34" charset="-120"/>
+              </a:rPr>
+              <a:t>hierarchical</a:t>
+            </a:r>
+            <a:r>
+              <a:rPr lang="en-US" sz="1600" dirty="0">
+                <a:solidFill>
+                  <a:srgbClr val="1C1C1E"/>
+                </a:solidFill>
+                <a:latin typeface="Quattrocento Sans" pitchFamily="34" charset="0"/>
+                <a:ea typeface="Quattrocento Sans" pitchFamily="34" charset="-122"/>
+                <a:cs typeface="Quattrocento Sans" pitchFamily="34" charset="-120"/>
+              </a:rPr>
+              <a:t> — /users/{id}/orders</a:t>
+            </a:r>
+            <a:endParaRPr lang="en-US" sz="1600" dirty="0"/>
+          </a:p>
+        </p:txBody>
+      </p:sp>
+      <p:sp>
+        <p:nvSpPr>
+          <p:cNvPr id="8" name="Text 6"/>
+          <p:cNvSpPr/>
+          <p:nvPr/>
+        </p:nvSpPr>
+        <p:spPr>
+          <a:xfrm>
+            <a:off x="762000" y="3492500"/>
+            <a:ext cx="6858000" cy="698500"/>
+          </a:xfrm>
+          <a:prstGeom prst="rect">
+            <a:avLst/>
+          </a:prstGeom>
+          <a:noFill/>
+          <a:ln/>
+        </p:spPr>
+        <p:txBody>
+          <a:bodyPr wrap="square" lIns="0" tIns="0" rIns="0" bIns="0" rtlCol="0" anchor="t"/>
+          <a:lstStyle/>
+          <a:p>
             <a:pPr algn="l">
               <a:lnSpc>
                 <a:spcPct val="150000"/>
               </a:lnSpc>
             </a:pPr>
             <a:r>
+              <a:rPr lang="en-US" sz="1600" dirty="0">
+                <a:solidFill>
+                  <a:srgbClr val="D4943A"/>
+                </a:solidFill>
+                <a:latin typeface="Quattrocento Sans" pitchFamily="34" charset="0"/>
+                <a:ea typeface="Quattrocento Sans" pitchFamily="34" charset="-122"/>
+                <a:cs typeface="Quattrocento Sans" pitchFamily="34" charset="-120"/>
+              </a:rPr>
+              <a:t>3.</a:t>
+            </a:r>
+            <a:r>
+              <a:rPr lang="en-US" sz="1600" dirty="0">
+                <a:solidFill>
+                  <a:srgbClr val="1C1C1E"/>
+                </a:solidFill>
+                <a:latin typeface="Quattrocento Sans" pitchFamily="34" charset="0"/>
+                <a:ea typeface="Quattrocento Sans" pitchFamily="34" charset="-122"/>
+                <a:cs typeface="Quattrocento Sans" pitchFamily="34" charset="-120"/>
+              </a:rPr>
+              <a:t> Use </a:t>
+            </a:r>
+            <a:r>
               <a:rPr lang="en-US" sz="1600" b="1" dirty="0">
                 <a:solidFill>
                   <a:srgbClr val="1C1C1E"/>
@@ -7017,8 +7069,44 @@
                 <a:ea typeface="Quattrocento Sans" pitchFamily="34" charset="-122"/>
                 <a:cs typeface="Quattrocento Sans" pitchFamily="34" charset="-120"/>
               </a:rPr>
-              <a:t>nouns</a:t>
-            </a:r>
+              <a:t>plural</a:t>
+            </a:r>
+            <a:r>
+              <a:rPr lang="en-US" sz="1600" dirty="0">
+                <a:solidFill>
+                  <a:srgbClr val="1C1C1E"/>
+                </a:solidFill>
+                <a:latin typeface="Quattrocento Sans" pitchFamily="34" charset="0"/>
+                <a:ea typeface="Quattrocento Sans" pitchFamily="34" charset="-122"/>
+                <a:cs typeface="Quattrocento Sans" pitchFamily="34" charset="-120"/>
+              </a:rPr>
+              <a:t> nouns consistently — /users, /orders</a:t>
+            </a:r>
+            <a:endParaRPr lang="en-US" sz="1600" dirty="0"/>
+          </a:p>
+        </p:txBody>
+      </p:sp>
+      <p:sp>
+        <p:nvSpPr>
+          <p:cNvPr id="9" name="Text 7"/>
+          <p:cNvSpPr/>
+          <p:nvPr/>
+        </p:nvSpPr>
+        <p:spPr>
+          <a:xfrm>
+            <a:off x="762000" y="4191000"/>
+            <a:ext cx="6858000" cy="698500"/>
+          </a:xfrm>
+          <a:prstGeom prst="rect">
+            <a:avLst/>
+          </a:prstGeom>
+          <a:noFill/>
+          <a:ln/>
+        </p:spPr>
+        <p:txBody>
+          <a:bodyPr wrap="square" lIns="0" tIns="0" rIns="0" bIns="0" rtlCol="0" anchor="t"/>
+          <a:lstStyle/>
+          <a:p>
             <a:pPr algn="l">
               <a:lnSpc>
                 <a:spcPct val="150000"/>
@@ -7027,21 +7115,424 @@
             <a:r>
               <a:rPr lang="en-US" sz="1600" dirty="0">
                 <a:solidFill>
+                  <a:srgbClr val="D4943A"/>
+                </a:solidFill>
+                <a:latin typeface="Quattrocento Sans" pitchFamily="34" charset="0"/>
+                <a:ea typeface="Quattrocento Sans" pitchFamily="34" charset="-122"/>
+                <a:cs typeface="Quattrocento Sans" pitchFamily="34" charset="-120"/>
+              </a:rPr>
+              <a:t>4.</a:t>
+            </a:r>
+            <a:r>
+              <a:rPr lang="en-US" sz="1600" dirty="0">
+                <a:solidFill>
                   <a:srgbClr val="1C1C1E"/>
                 </a:solidFill>
                 <a:latin typeface="Quattrocento Sans" pitchFamily="34" charset="0"/>
                 <a:ea typeface="Quattrocento Sans" pitchFamily="34" charset="-122"/>
                 <a:cs typeface="Quattrocento Sans" pitchFamily="34" charset="-120"/>
               </a:rPr>
-              <a:t>, not verbs — </a:t>
-            </a:r>
+              <a:t> Avoid </a:t>
+            </a:r>
+            <a:r>
+              <a:rPr lang="en-US" sz="1600" b="1" dirty="0">
+                <a:solidFill>
+                  <a:srgbClr val="1C1C1E"/>
+                </a:solidFill>
+                <a:latin typeface="Quattrocento Sans" pitchFamily="34" charset="0"/>
+                <a:ea typeface="Quattrocento Sans" pitchFamily="34" charset="-122"/>
+                <a:cs typeface="Quattrocento Sans" pitchFamily="34" charset="-120"/>
+              </a:rPr>
+              <a:t>deep nesting</a:t>
+            </a:r>
+            <a:r>
+              <a:rPr lang="en-US" sz="1600" dirty="0">
+                <a:solidFill>
+                  <a:srgbClr val="1C1C1E"/>
+                </a:solidFill>
+                <a:latin typeface="Quattrocento Sans" pitchFamily="34" charset="0"/>
+                <a:ea typeface="Quattrocento Sans" pitchFamily="34" charset="-122"/>
+                <a:cs typeface="Quattrocento Sans" pitchFamily="34" charset="-120"/>
+              </a:rPr>
+              <a:t> — max 2-3 resource levels</a:t>
+            </a:r>
+            <a:endParaRPr lang="en-US" sz="1600" dirty="0"/>
+          </a:p>
+        </p:txBody>
+      </p:sp>
+      <p:sp>
+        <p:nvSpPr>
+          <p:cNvPr id="10" name="Shape 8"/>
+          <p:cNvSpPr/>
+          <p:nvPr/>
+        </p:nvSpPr>
+        <p:spPr>
+          <a:xfrm>
+            <a:off x="762000" y="5080000"/>
+            <a:ext cx="6858000" cy="1651000"/>
+          </a:xfrm>
+          <a:prstGeom prst="roundRect">
+            <a:avLst>
+              <a:gd name="adj" fmla="val 8000"/>
+            </a:avLst>
+          </a:prstGeom>
+          <a:solidFill>
+            <a:srgbClr val="E8EDE9"/>
+          </a:solidFill>
+          <a:ln/>
+        </p:spPr>
+        <p:txBody>
+          <a:bodyPr/>
+          <a:lstStyle/>
+          <a:p>
+            <a:endParaRPr lang="en-US"/>
+          </a:p>
+        </p:txBody>
+      </p:sp>
+      <p:sp>
+        <p:nvSpPr>
+          <p:cNvPr id="11" name="Text 9"/>
+          <p:cNvSpPr/>
+          <p:nvPr/>
+        </p:nvSpPr>
+        <p:spPr>
+          <a:xfrm>
+            <a:off x="1016000" y="5232400"/>
+            <a:ext cx="1016000" cy="279400"/>
+          </a:xfrm>
+          <a:prstGeom prst="rect">
+            <a:avLst/>
+          </a:prstGeom>
+          <a:noFill/>
+          <a:ln/>
+        </p:spPr>
+        <p:txBody>
+          <a:bodyPr wrap="none" lIns="0" tIns="0" rIns="0" bIns="0" rtlCol="0" anchor="ctr"/>
+          <a:lstStyle/>
+          <a:p>
+            <a:pPr algn="l">
+              <a:lnSpc>
+                <a:spcPct val="120000"/>
+              </a:lnSpc>
+            </a:pPr>
+            <a:r>
+              <a:rPr lang="en-US" sz="1300" kern="0" spc="100" dirty="0">
+                <a:solidFill>
+                  <a:srgbClr val="4A9B6B"/>
+                </a:solidFill>
+                <a:latin typeface="Liter" pitchFamily="34" charset="0"/>
+                <a:ea typeface="Liter" pitchFamily="34" charset="-122"/>
+                <a:cs typeface="Liter" pitchFamily="34" charset="-120"/>
+              </a:rPr>
+              <a:t>GOOD</a:t>
+            </a:r>
+            <a:endParaRPr lang="en-US" sz="1300" dirty="0"/>
+          </a:p>
+        </p:txBody>
+      </p:sp>
+      <p:sp>
+        <p:nvSpPr>
+          <p:cNvPr id="12" name="Text 10"/>
+          <p:cNvSpPr/>
+          <p:nvPr/>
+        </p:nvSpPr>
+        <p:spPr>
+          <a:xfrm>
+            <a:off x="1016000" y="5562600"/>
+            <a:ext cx="6350000" cy="355600"/>
+          </a:xfrm>
+          <a:prstGeom prst="rect">
+            <a:avLst/>
+          </a:prstGeom>
+          <a:noFill/>
+          <a:ln/>
+        </p:spPr>
+        <p:txBody>
+          <a:bodyPr wrap="none" lIns="0" tIns="0" rIns="0" bIns="0" rtlCol="0" anchor="ctr"/>
+          <a:lstStyle/>
+          <a:p>
+            <a:pPr algn="l">
+              <a:lnSpc>
+                <a:spcPct val="120000"/>
+              </a:lnSpc>
+            </a:pPr>
+            <a:r>
+              <a:rPr lang="en-US" sz="1500" dirty="0">
+                <a:solidFill>
+                  <a:srgbClr val="1C1C1E"/>
+                </a:solidFill>
+                <a:latin typeface="Quattrocento Sans" pitchFamily="34" charset="0"/>
+                <a:ea typeface="Quattrocento Sans" pitchFamily="34" charset="-122"/>
+                <a:cs typeface="Quattrocento Sans" pitchFamily="34" charset="-120"/>
+              </a:rPr>
+              <a:t>/users/123/orders?limit=10&amp;page=2</a:t>
+            </a:r>
+            <a:endParaRPr lang="en-US" sz="1500" dirty="0"/>
+          </a:p>
+        </p:txBody>
+      </p:sp>
+      <p:sp>
+        <p:nvSpPr>
+          <p:cNvPr id="13" name="Text 11"/>
+          <p:cNvSpPr/>
+          <p:nvPr/>
+        </p:nvSpPr>
+        <p:spPr>
+          <a:xfrm>
+            <a:off x="1016000" y="5994400"/>
+            <a:ext cx="1016000" cy="279400"/>
+          </a:xfrm>
+          <a:prstGeom prst="rect">
+            <a:avLst/>
+          </a:prstGeom>
+          <a:noFill/>
+          <a:ln/>
+        </p:spPr>
+        <p:txBody>
+          <a:bodyPr wrap="none" lIns="0" tIns="0" rIns="0" bIns="0" rtlCol="0" anchor="ctr"/>
+          <a:lstStyle/>
+          <a:p>
+            <a:pPr algn="l">
+              <a:lnSpc>
+                <a:spcPct val="120000"/>
+              </a:lnSpc>
+            </a:pPr>
+            <a:r>
+              <a:rPr lang="en-US" sz="1300" kern="0" spc="100" dirty="0">
+                <a:solidFill>
+                  <a:srgbClr val="C44D4D"/>
+                </a:solidFill>
+                <a:latin typeface="Liter" pitchFamily="34" charset="0"/>
+                <a:ea typeface="Liter" pitchFamily="34" charset="-122"/>
+                <a:cs typeface="Liter" pitchFamily="34" charset="-120"/>
+              </a:rPr>
+              <a:t>BAD</a:t>
+            </a:r>
+            <a:endParaRPr lang="en-US" sz="1300" dirty="0"/>
+          </a:p>
+        </p:txBody>
+      </p:sp>
+      <p:sp>
+        <p:nvSpPr>
+          <p:cNvPr id="14" name="Text 12"/>
+          <p:cNvSpPr/>
+          <p:nvPr/>
+        </p:nvSpPr>
+        <p:spPr>
+          <a:xfrm>
+            <a:off x="1016000" y="6324600"/>
+            <a:ext cx="6350000" cy="355600"/>
+          </a:xfrm>
+          <a:prstGeom prst="rect">
+            <a:avLst/>
+          </a:prstGeom>
+          <a:noFill/>
+          <a:ln/>
+        </p:spPr>
+        <p:txBody>
+          <a:bodyPr wrap="none" lIns="0" tIns="0" rIns="0" bIns="0" rtlCol="0" anchor="ctr"/>
+          <a:lstStyle/>
+          <a:p>
+            <a:pPr algn="l">
+              <a:lnSpc>
+                <a:spcPct val="120000"/>
+              </a:lnSpc>
+            </a:pPr>
+            <a:r>
+              <a:rPr lang="en-US" sz="1500" dirty="0">
+                <a:solidFill>
+                  <a:srgbClr val="1C1C1E"/>
+                </a:solidFill>
+                <a:latin typeface="Quattrocento Sans" pitchFamily="34" charset="0"/>
+                <a:ea typeface="Quattrocento Sans" pitchFamily="34" charset="-122"/>
+                <a:cs typeface="Quattrocento Sans" pitchFamily="34" charset="-120"/>
+              </a:rPr>
+              <a:t>/getAllTheUsers?id=123&amp;action=orders</a:t>
+            </a:r>
+            <a:endParaRPr lang="en-US" sz="1500" dirty="0"/>
+          </a:p>
+        </p:txBody>
+      </p:sp>
+      <p:sp>
+        <p:nvSpPr>
+          <p:cNvPr id="15" name="Text 13"/>
+          <p:cNvSpPr/>
+          <p:nvPr/>
+        </p:nvSpPr>
+        <p:spPr>
+          <a:xfrm>
+            <a:off x="8382000" y="1651000"/>
+            <a:ext cx="3175000" cy="279400"/>
+          </a:xfrm>
+          <a:prstGeom prst="rect">
+            <a:avLst/>
+          </a:prstGeom>
+          <a:noFill/>
+          <a:ln/>
+        </p:spPr>
+        <p:txBody>
+          <a:bodyPr wrap="none" lIns="0" tIns="0" rIns="0" bIns="0" rtlCol="0" anchor="ctr"/>
+          <a:lstStyle/>
+          <a:p>
+            <a:pPr algn="l">
+              <a:lnSpc>
+                <a:spcPct val="120000"/>
+              </a:lnSpc>
+            </a:pPr>
+            <a:r>
+              <a:rPr lang="en-US" sz="1300" kern="0" spc="200" dirty="0">
+                <a:solidFill>
+                  <a:srgbClr val="D4943A"/>
+                </a:solidFill>
+                <a:latin typeface="Liter" pitchFamily="34" charset="0"/>
+                <a:ea typeface="Liter" pitchFamily="34" charset="-122"/>
+                <a:cs typeface="Liter" pitchFamily="34" charset="-120"/>
+              </a:rPr>
+              <a:t>PAGINATION STRATEGIES</a:t>
+            </a:r>
+            <a:endParaRPr lang="en-US" sz="1300" dirty="0"/>
+          </a:p>
+        </p:txBody>
+      </p:sp>
+      <p:sp>
+        <p:nvSpPr>
+          <p:cNvPr id="16" name="Shape 14"/>
+          <p:cNvSpPr/>
+          <p:nvPr/>
+        </p:nvSpPr>
+        <p:spPr>
+          <a:xfrm>
+            <a:off x="8382000" y="2095500"/>
+            <a:ext cx="7112000" cy="2222500"/>
+          </a:xfrm>
+          <a:prstGeom prst="roundRect">
+            <a:avLst>
+              <a:gd name="adj" fmla="val 8000"/>
+            </a:avLst>
+          </a:prstGeom>
+          <a:solidFill>
+            <a:srgbClr val="E8EDE9"/>
+          </a:solidFill>
+          <a:ln/>
+        </p:spPr>
+        <p:txBody>
+          <a:bodyPr/>
+          <a:lstStyle/>
+          <a:p>
+            <a:endParaRPr lang="en-US"/>
+          </a:p>
+        </p:txBody>
+      </p:sp>
+      <p:sp>
+        <p:nvSpPr>
+          <p:cNvPr id="17" name="Text 15"/>
+          <p:cNvSpPr/>
+          <p:nvPr/>
+        </p:nvSpPr>
+        <p:spPr>
+          <a:xfrm>
+            <a:off x="8636000" y="2260600"/>
+            <a:ext cx="6604000" cy="355600"/>
+          </a:xfrm>
+          <a:prstGeom prst="rect">
+            <a:avLst/>
+          </a:prstGeom>
+          <a:noFill/>
+          <a:ln/>
+        </p:spPr>
+        <p:txBody>
+          <a:bodyPr wrap="none" lIns="0" tIns="0" rIns="0" bIns="0" rtlCol="0" anchor="ctr"/>
+          <a:lstStyle/>
+          <a:p>
+            <a:pPr algn="l">
+              <a:lnSpc>
+                <a:spcPct val="120000"/>
+              </a:lnSpc>
+            </a:pPr>
+            <a:r>
+              <a:rPr lang="en-US" sz="1700" b="1" dirty="0">
+                <a:solidFill>
+                  <a:srgbClr val="1B4D4D"/>
+                </a:solidFill>
+                <a:latin typeface="Liter" pitchFamily="34" charset="0"/>
+                <a:ea typeface="Liter" pitchFamily="34" charset="-122"/>
+                <a:cs typeface="Liter" pitchFamily="34" charset="-120"/>
+              </a:rPr>
+              <a:t>Offset-Based Pagination</a:t>
+            </a:r>
+            <a:endParaRPr lang="en-US" sz="1700" dirty="0"/>
+          </a:p>
+        </p:txBody>
+      </p:sp>
+      <p:sp>
+        <p:nvSpPr>
+          <p:cNvPr id="18" name="Text 16"/>
+          <p:cNvSpPr/>
+          <p:nvPr/>
+        </p:nvSpPr>
+        <p:spPr>
+          <a:xfrm>
+            <a:off x="8636000" y="2667000"/>
+            <a:ext cx="6604000" cy="304800"/>
+          </a:xfrm>
+          <a:prstGeom prst="rect">
+            <a:avLst/>
+          </a:prstGeom>
+          <a:noFill/>
+          <a:ln/>
+        </p:spPr>
+        <p:txBody>
+          <a:bodyPr wrap="none" lIns="0" tIns="0" rIns="0" bIns="0" rtlCol="0" anchor="ctr"/>
+          <a:lstStyle/>
+          <a:p>
+            <a:pPr algn="l">
+              <a:lnSpc>
+                <a:spcPct val="120000"/>
+              </a:lnSpc>
+            </a:pPr>
+            <a:r>
+              <a:rPr lang="en-US" sz="1400" dirty="0">
+                <a:solidFill>
+                  <a:srgbClr val="D4943A"/>
+                </a:solidFill>
+                <a:latin typeface="Quattrocento Sans" pitchFamily="34" charset="0"/>
+                <a:ea typeface="Quattrocento Sans" pitchFamily="34" charset="-122"/>
+                <a:cs typeface="Quattrocento Sans" pitchFamily="34" charset="-120"/>
+              </a:rPr>
+              <a:t>/users?offset=20&amp;limit=10</a:t>
+            </a:r>
+            <a:endParaRPr lang="en-US" sz="1400" dirty="0"/>
+          </a:p>
+        </p:txBody>
+      </p:sp>
+      <p:sp>
+        <p:nvSpPr>
+          <p:cNvPr id="19" name="Text 17"/>
+          <p:cNvSpPr/>
+          <p:nvPr/>
+        </p:nvSpPr>
+        <p:spPr>
+          <a:xfrm>
+            <a:off x="8636000" y="3048000"/>
+            <a:ext cx="6604000" cy="1143000"/>
+          </a:xfrm>
+          <a:prstGeom prst="rect">
+            <a:avLst/>
+          </a:prstGeom>
+          <a:noFill/>
+          <a:ln/>
+        </p:spPr>
+        <p:txBody>
+          <a:bodyPr wrap="square" lIns="0" tIns="0" rIns="0" bIns="0" rtlCol="0" anchor="t"/>
+          <a:lstStyle/>
+          <a:p>
             <a:pPr algn="l">
               <a:lnSpc>
                 <a:spcPct val="150000"/>
               </a:lnSpc>
             </a:pPr>
             <a:r>
-              <a:rPr lang="en-US" sz="1600" dirty="0">
+              <a:rPr lang="en-US" sz="1400" dirty="0">
                 <a:solidFill>
                   <a:srgbClr val="1C1C1E"/>
                 </a:solidFill>
@@ -7049,353 +7540,22 @@
                 <a:ea typeface="Quattrocento Sans" pitchFamily="34" charset="-122"/>
                 <a:cs typeface="Quattrocento Sans" pitchFamily="34" charset="-120"/>
               </a:rPr>
-              <a:t>/products</a:t>
-            </a:r>
-            <a:pPr algn="l">
-              <a:lnSpc>
-                <a:spcPct val="150000"/>
-              </a:lnSpc>
-            </a:pPr>
-            <a:r>
-              <a:rPr lang="en-US" sz="1600" dirty="0">
-                <a:solidFill>
-                  <a:srgbClr val="1C1C1E"/>
-                </a:solidFill>
-                <a:latin typeface="Quattrocento Sans" pitchFamily="34" charset="0"/>
-                <a:ea typeface="Quattrocento Sans" pitchFamily="34" charset="-122"/>
-                <a:cs typeface="Quattrocento Sans" pitchFamily="34" charset="-120"/>
-              </a:rPr>
-              <a:t> not </a:t>
-            </a:r>
-            <a:pPr algn="l">
-              <a:lnSpc>
-                <a:spcPct val="150000"/>
-              </a:lnSpc>
-            </a:pPr>
-            <a:r>
-              <a:rPr lang="en-US" sz="1600" dirty="0">
-                <a:solidFill>
-                  <a:srgbClr val="1C1C1E"/>
-                </a:solidFill>
-                <a:latin typeface="Quattrocento Sans" pitchFamily="34" charset="0"/>
-                <a:ea typeface="Quattrocento Sans" pitchFamily="34" charset="-122"/>
-                <a:cs typeface="Quattrocento Sans" pitchFamily="34" charset="-120"/>
-              </a:rPr>
-              <a:t>/getProducts</a:t>
-            </a:r>
-            <a:endParaRPr lang="en-US" sz="1600" dirty="0"/>
-          </a:p>
-        </p:txBody>
-      </p:sp>
-      <p:sp>
-        <p:nvSpPr>
-          <p:cNvPr id="7" name="Text 5"/>
-          <p:cNvSpPr/>
-          <p:nvPr/>
-        </p:nvSpPr>
-        <p:spPr>
-          <a:xfrm>
-            <a:off x="762000" y="2794000"/>
-            <a:ext cx="6858000" cy="698500"/>
-          </a:xfrm>
-          <a:prstGeom prst="rect">
-            <a:avLst/>
-          </a:prstGeom>
-          <a:noFill/>
-          <a:ln/>
-        </p:spPr>
-        <p:txBody>
-          <a:bodyPr wrap="square" lIns="0" tIns="0" rIns="0" bIns="0" rtlCol="0" anchor="t"/>
-          <a:lstStyle/>
-          <a:p>
-            <a:pPr algn="l">
-              <a:lnSpc>
-                <a:spcPct val="150000"/>
-              </a:lnSpc>
-            </a:pPr>
-            <a:r>
-              <a:rPr lang="en-US" sz="1600" dirty="0">
-                <a:solidFill>
-                  <a:srgbClr val="D4943A"/>
-                </a:solidFill>
-                <a:latin typeface="Quattrocento Sans" pitchFamily="34" charset="0"/>
-                <a:ea typeface="Quattrocento Sans" pitchFamily="34" charset="-122"/>
-                <a:cs typeface="Quattrocento Sans" pitchFamily="34" charset="-120"/>
-              </a:rPr>
-              <a:t>2.</a:t>
-            </a:r>
-            <a:pPr algn="l">
-              <a:lnSpc>
-                <a:spcPct val="150000"/>
-              </a:lnSpc>
-            </a:pPr>
-            <a:r>
-              <a:rPr lang="en-US" sz="1600" dirty="0">
-                <a:solidFill>
-                  <a:srgbClr val="1C1C1E"/>
-                </a:solidFill>
-                <a:latin typeface="Quattrocento Sans" pitchFamily="34" charset="0"/>
-                <a:ea typeface="Quattrocento Sans" pitchFamily="34" charset="-122"/>
-                <a:cs typeface="Quattrocento Sans" pitchFamily="34" charset="-120"/>
-              </a:rPr>
-              <a:t> Keep it </a:t>
-            </a:r>
-            <a:pPr algn="l">
-              <a:lnSpc>
-                <a:spcPct val="150000"/>
-              </a:lnSpc>
-            </a:pPr>
-            <a:r>
-              <a:rPr lang="en-US" sz="1600" b="1" dirty="0">
-                <a:solidFill>
-                  <a:srgbClr val="1C1C1E"/>
-                </a:solidFill>
-                <a:latin typeface="Quattrocento Sans" pitchFamily="34" charset="0"/>
-                <a:ea typeface="Quattrocento Sans" pitchFamily="34" charset="-122"/>
-                <a:cs typeface="Quattrocento Sans" pitchFamily="34" charset="-120"/>
-              </a:rPr>
-              <a:t>hierarchical</a:t>
-            </a:r>
-            <a:pPr algn="l">
-              <a:lnSpc>
-                <a:spcPct val="150000"/>
-              </a:lnSpc>
-            </a:pPr>
-            <a:r>
-              <a:rPr lang="en-US" sz="1600" dirty="0">
-                <a:solidFill>
-                  <a:srgbClr val="1C1C1E"/>
-                </a:solidFill>
-                <a:latin typeface="Quattrocento Sans" pitchFamily="34" charset="0"/>
-                <a:ea typeface="Quattrocento Sans" pitchFamily="34" charset="-122"/>
-                <a:cs typeface="Quattrocento Sans" pitchFamily="34" charset="-120"/>
-              </a:rPr>
-              <a:t> — </a:t>
-            </a:r>
-            <a:pPr algn="l">
-              <a:lnSpc>
-                <a:spcPct val="150000"/>
-              </a:lnSpc>
-            </a:pPr>
-            <a:r>
-              <a:rPr lang="en-US" sz="1600" dirty="0">
-                <a:solidFill>
-                  <a:srgbClr val="1C1C1E"/>
-                </a:solidFill>
-                <a:latin typeface="Quattrocento Sans" pitchFamily="34" charset="0"/>
-                <a:ea typeface="Quattrocento Sans" pitchFamily="34" charset="-122"/>
-                <a:cs typeface="Quattrocento Sans" pitchFamily="34" charset="-120"/>
-              </a:rPr>
-              <a:t>/users/{id}/orders</a:t>
-            </a:r>
-            <a:endParaRPr lang="en-US" sz="1600" dirty="0"/>
-          </a:p>
-        </p:txBody>
-      </p:sp>
-      <p:sp>
-        <p:nvSpPr>
-          <p:cNvPr id="8" name="Text 6"/>
-          <p:cNvSpPr/>
-          <p:nvPr/>
-        </p:nvSpPr>
-        <p:spPr>
-          <a:xfrm>
-            <a:off x="762000" y="3492500"/>
-            <a:ext cx="6858000" cy="698500"/>
-          </a:xfrm>
-          <a:prstGeom prst="rect">
-            <a:avLst/>
-          </a:prstGeom>
-          <a:noFill/>
-          <a:ln/>
-        </p:spPr>
-        <p:txBody>
-          <a:bodyPr wrap="square" lIns="0" tIns="0" rIns="0" bIns="0" rtlCol="0" anchor="t"/>
-          <a:lstStyle/>
-          <a:p>
-            <a:pPr algn="l">
-              <a:lnSpc>
-                <a:spcPct val="150000"/>
-              </a:lnSpc>
-            </a:pPr>
-            <a:r>
-              <a:rPr lang="en-US" sz="1600" dirty="0">
-                <a:solidFill>
-                  <a:srgbClr val="D4943A"/>
-                </a:solidFill>
-                <a:latin typeface="Quattrocento Sans" pitchFamily="34" charset="0"/>
-                <a:ea typeface="Quattrocento Sans" pitchFamily="34" charset="-122"/>
-                <a:cs typeface="Quattrocento Sans" pitchFamily="34" charset="-120"/>
-              </a:rPr>
-              <a:t>3.</a:t>
-            </a:r>
-            <a:pPr algn="l">
-              <a:lnSpc>
-                <a:spcPct val="150000"/>
-              </a:lnSpc>
-            </a:pPr>
-            <a:r>
-              <a:rPr lang="en-US" sz="1600" dirty="0">
-                <a:solidFill>
-                  <a:srgbClr val="1C1C1E"/>
-                </a:solidFill>
-                <a:latin typeface="Quattrocento Sans" pitchFamily="34" charset="0"/>
-                <a:ea typeface="Quattrocento Sans" pitchFamily="34" charset="-122"/>
-                <a:cs typeface="Quattrocento Sans" pitchFamily="34" charset="-120"/>
-              </a:rPr>
-              <a:t> Use </a:t>
-            </a:r>
-            <a:pPr algn="l">
-              <a:lnSpc>
-                <a:spcPct val="150000"/>
-              </a:lnSpc>
-            </a:pPr>
-            <a:r>
-              <a:rPr lang="en-US" sz="1600" b="1" dirty="0">
-                <a:solidFill>
-                  <a:srgbClr val="1C1C1E"/>
-                </a:solidFill>
-                <a:latin typeface="Quattrocento Sans" pitchFamily="34" charset="0"/>
-                <a:ea typeface="Quattrocento Sans" pitchFamily="34" charset="-122"/>
-                <a:cs typeface="Quattrocento Sans" pitchFamily="34" charset="-120"/>
-              </a:rPr>
-              <a:t>plural</a:t>
-            </a:r>
-            <a:pPr algn="l">
-              <a:lnSpc>
-                <a:spcPct val="150000"/>
-              </a:lnSpc>
-            </a:pPr>
-            <a:r>
-              <a:rPr lang="en-US" sz="1600" dirty="0">
-                <a:solidFill>
-                  <a:srgbClr val="1C1C1E"/>
-                </a:solidFill>
-                <a:latin typeface="Quattrocento Sans" pitchFamily="34" charset="0"/>
-                <a:ea typeface="Quattrocento Sans" pitchFamily="34" charset="-122"/>
-                <a:cs typeface="Quattrocento Sans" pitchFamily="34" charset="-120"/>
-              </a:rPr>
-              <a:t> nouns consistently — </a:t>
-            </a:r>
-            <a:pPr algn="l">
-              <a:lnSpc>
-                <a:spcPct val="150000"/>
-              </a:lnSpc>
-            </a:pPr>
-            <a:r>
-              <a:rPr lang="en-US" sz="1600" dirty="0">
-                <a:solidFill>
-                  <a:srgbClr val="1C1C1E"/>
-                </a:solidFill>
-                <a:latin typeface="Quattrocento Sans" pitchFamily="34" charset="0"/>
-                <a:ea typeface="Quattrocento Sans" pitchFamily="34" charset="-122"/>
-                <a:cs typeface="Quattrocento Sans" pitchFamily="34" charset="-120"/>
-              </a:rPr>
-              <a:t>/users, /orders</a:t>
-            </a:r>
-            <a:endParaRPr lang="en-US" sz="1600" dirty="0"/>
-          </a:p>
-        </p:txBody>
-      </p:sp>
-      <p:sp>
-        <p:nvSpPr>
-          <p:cNvPr id="9" name="Text 7"/>
-          <p:cNvSpPr/>
-          <p:nvPr/>
-        </p:nvSpPr>
-        <p:spPr>
-          <a:xfrm>
-            <a:off x="762000" y="4191000"/>
-            <a:ext cx="6858000" cy="698500"/>
-          </a:xfrm>
-          <a:prstGeom prst="rect">
-            <a:avLst/>
-          </a:prstGeom>
-          <a:noFill/>
-          <a:ln/>
-        </p:spPr>
-        <p:txBody>
-          <a:bodyPr wrap="square" lIns="0" tIns="0" rIns="0" bIns="0" rtlCol="0" anchor="t"/>
-          <a:lstStyle/>
-          <a:p>
-            <a:pPr algn="l">
-              <a:lnSpc>
-                <a:spcPct val="150000"/>
-              </a:lnSpc>
-            </a:pPr>
-            <a:r>
-              <a:rPr lang="en-US" sz="1600" dirty="0">
-                <a:solidFill>
-                  <a:srgbClr val="D4943A"/>
-                </a:solidFill>
-                <a:latin typeface="Quattrocento Sans" pitchFamily="34" charset="0"/>
-                <a:ea typeface="Quattrocento Sans" pitchFamily="34" charset="-122"/>
-                <a:cs typeface="Quattrocento Sans" pitchFamily="34" charset="-120"/>
-              </a:rPr>
-              <a:t>4.</a:t>
-            </a:r>
-            <a:pPr algn="l">
-              <a:lnSpc>
-                <a:spcPct val="150000"/>
-              </a:lnSpc>
-            </a:pPr>
-            <a:r>
-              <a:rPr lang="en-US" sz="1600" dirty="0">
-                <a:solidFill>
-                  <a:srgbClr val="1C1C1E"/>
-                </a:solidFill>
-                <a:latin typeface="Quattrocento Sans" pitchFamily="34" charset="0"/>
-                <a:ea typeface="Quattrocento Sans" pitchFamily="34" charset="-122"/>
-                <a:cs typeface="Quattrocento Sans" pitchFamily="34" charset="-120"/>
-              </a:rPr>
-              <a:t> Avoid </a:t>
-            </a:r>
-            <a:pPr algn="l">
-              <a:lnSpc>
-                <a:spcPct val="150000"/>
-              </a:lnSpc>
-            </a:pPr>
-            <a:r>
-              <a:rPr lang="en-US" sz="1600" b="1" dirty="0">
-                <a:solidFill>
-                  <a:srgbClr val="1C1C1E"/>
-                </a:solidFill>
-                <a:latin typeface="Quattrocento Sans" pitchFamily="34" charset="0"/>
-                <a:ea typeface="Quattrocento Sans" pitchFamily="34" charset="-122"/>
-                <a:cs typeface="Quattrocento Sans" pitchFamily="34" charset="-120"/>
-              </a:rPr>
-              <a:t>deep nesting</a:t>
-            </a:r>
-            <a:pPr algn="l">
-              <a:lnSpc>
-                <a:spcPct val="150000"/>
-              </a:lnSpc>
-            </a:pPr>
-            <a:r>
-              <a:rPr lang="en-US" sz="1600" dirty="0">
-                <a:solidFill>
-                  <a:srgbClr val="1C1C1E"/>
-                </a:solidFill>
-                <a:latin typeface="Quattrocento Sans" pitchFamily="34" charset="0"/>
-                <a:ea typeface="Quattrocento Sans" pitchFamily="34" charset="-122"/>
-                <a:cs typeface="Quattrocento Sans" pitchFamily="34" charset="-120"/>
-              </a:rPr>
-              <a:t> — max 2-3 resource levels</a:t>
-            </a:r>
-            <a:endParaRPr lang="en-US" sz="1600" dirty="0"/>
-          </a:p>
-        </p:txBody>
-      </p:sp>
-      <p:sp>
-        <p:nvSpPr>
-          <p:cNvPr id="10" name="Shape 8"/>
-          <p:cNvSpPr/>
-          <p:nvPr/>
-        </p:nvSpPr>
-        <p:spPr>
-          <a:xfrm>
-            <a:off x="762000" y="5080000"/>
-            <a:ext cx="6858000" cy="1651000"/>
+              <a:t>Simple but can be slow for large datasets. Like flipping to page 100 — you must turn every page before it.</a:t>
+            </a:r>
+            <a:endParaRPr lang="en-US" sz="1400" dirty="0"/>
+          </a:p>
+        </p:txBody>
+      </p:sp>
+      <p:sp>
+        <p:nvSpPr>
+          <p:cNvPr id="20" name="Shape 18"/>
+          <p:cNvSpPr/>
+          <p:nvPr/>
+        </p:nvSpPr>
+        <p:spPr>
+          <a:xfrm>
+            <a:off x="8382000" y="4572000"/>
+            <a:ext cx="7112000" cy="2222500"/>
           </a:xfrm>
           <a:prstGeom prst="roundRect">
             <a:avLst>
@@ -7403,382 +7563,17 @@
             </a:avLst>
           </a:prstGeom>
           <a:solidFill>
-            <a:srgbClr val="E8EDE9"/>
-          </a:solidFill>
-          <a:ln/>
-        </p:spPr>
-      </p:sp>
-      <p:sp>
-        <p:nvSpPr>
-          <p:cNvPr id="11" name="Text 9"/>
-          <p:cNvSpPr/>
-          <p:nvPr/>
-        </p:nvSpPr>
-        <p:spPr>
-          <a:xfrm>
-            <a:off x="1016000" y="5232400"/>
-            <a:ext cx="1016000" cy="279400"/>
-          </a:xfrm>
-          <a:prstGeom prst="rect">
-            <a:avLst/>
-          </a:prstGeom>
-          <a:noFill/>
-          <a:ln/>
-        </p:spPr>
-        <p:txBody>
-          <a:bodyPr wrap="none" lIns="0" tIns="0" rIns="0" bIns="0" rtlCol="0" anchor="ctr"/>
-          <a:lstStyle/>
-          <a:p>
-            <a:pPr algn="l">
-              <a:lnSpc>
-                <a:spcPct val="120000"/>
-              </a:lnSpc>
-            </a:pPr>
-            <a:r>
-              <a:rPr lang="en-US" sz="1300" spc="100" kern="0" dirty="0">
-                <a:solidFill>
-                  <a:srgbClr val="4A9B6B"/>
-                </a:solidFill>
-                <a:latin typeface="Liter" pitchFamily="34" charset="0"/>
-                <a:ea typeface="Liter" pitchFamily="34" charset="-122"/>
-                <a:cs typeface="Liter" pitchFamily="34" charset="-120"/>
-              </a:rPr>
-              <a:t>GOOD</a:t>
-            </a:r>
-            <a:endParaRPr lang="en-US" sz="1300" dirty="0"/>
-          </a:p>
-        </p:txBody>
-      </p:sp>
-      <p:sp>
-        <p:nvSpPr>
-          <p:cNvPr id="12" name="Text 10"/>
-          <p:cNvSpPr/>
-          <p:nvPr/>
-        </p:nvSpPr>
-        <p:spPr>
-          <a:xfrm>
-            <a:off x="1016000" y="5562600"/>
-            <a:ext cx="6350000" cy="355600"/>
-          </a:xfrm>
-          <a:prstGeom prst="rect">
-            <a:avLst/>
-          </a:prstGeom>
-          <a:noFill/>
-          <a:ln/>
-        </p:spPr>
-        <p:txBody>
-          <a:bodyPr wrap="none" lIns="0" tIns="0" rIns="0" bIns="0" rtlCol="0" anchor="ctr"/>
-          <a:lstStyle/>
-          <a:p>
-            <a:pPr algn="l">
-              <a:lnSpc>
-                <a:spcPct val="120000"/>
-              </a:lnSpc>
-            </a:pPr>
-            <a:r>
-              <a:rPr lang="en-US" sz="1500" dirty="0">
-                <a:solidFill>
-                  <a:srgbClr val="1C1C1E"/>
-                </a:solidFill>
-                <a:latin typeface="Quattrocento Sans" pitchFamily="34" charset="0"/>
-                <a:ea typeface="Quattrocento Sans" pitchFamily="34" charset="-122"/>
-                <a:cs typeface="Quattrocento Sans" pitchFamily="34" charset="-120"/>
-              </a:rPr>
-              <a:t>/users/123/orders?limit=10&amp;page=2</a:t>
-            </a:r>
-            <a:endParaRPr lang="en-US" sz="1500" dirty="0"/>
-          </a:p>
-        </p:txBody>
-      </p:sp>
-      <p:sp>
-        <p:nvSpPr>
-          <p:cNvPr id="13" name="Text 11"/>
-          <p:cNvSpPr/>
-          <p:nvPr/>
-        </p:nvSpPr>
-        <p:spPr>
-          <a:xfrm>
-            <a:off x="1016000" y="5994400"/>
-            <a:ext cx="1016000" cy="279400"/>
-          </a:xfrm>
-          <a:prstGeom prst="rect">
-            <a:avLst/>
-          </a:prstGeom>
-          <a:noFill/>
-          <a:ln/>
-        </p:spPr>
-        <p:txBody>
-          <a:bodyPr wrap="none" lIns="0" tIns="0" rIns="0" bIns="0" rtlCol="0" anchor="ctr"/>
-          <a:lstStyle/>
-          <a:p>
-            <a:pPr algn="l">
-              <a:lnSpc>
-                <a:spcPct val="120000"/>
-              </a:lnSpc>
-            </a:pPr>
-            <a:r>
-              <a:rPr lang="en-US" sz="1300" spc="100" kern="0" dirty="0">
-                <a:solidFill>
-                  <a:srgbClr val="C44D4D"/>
-                </a:solidFill>
-                <a:latin typeface="Liter" pitchFamily="34" charset="0"/>
-                <a:ea typeface="Liter" pitchFamily="34" charset="-122"/>
-                <a:cs typeface="Liter" pitchFamily="34" charset="-120"/>
-              </a:rPr>
-              <a:t>BAD</a:t>
-            </a:r>
-            <a:endParaRPr lang="en-US" sz="1300" dirty="0"/>
-          </a:p>
-        </p:txBody>
-      </p:sp>
-      <p:sp>
-        <p:nvSpPr>
-          <p:cNvPr id="14" name="Text 12"/>
-          <p:cNvSpPr/>
-          <p:nvPr/>
-        </p:nvSpPr>
-        <p:spPr>
-          <a:xfrm>
-            <a:off x="1016000" y="6324600"/>
-            <a:ext cx="6350000" cy="355600"/>
-          </a:xfrm>
-          <a:prstGeom prst="rect">
-            <a:avLst/>
-          </a:prstGeom>
-          <a:noFill/>
-          <a:ln/>
-        </p:spPr>
-        <p:txBody>
-          <a:bodyPr wrap="none" lIns="0" tIns="0" rIns="0" bIns="0" rtlCol="0" anchor="ctr"/>
-          <a:lstStyle/>
-          <a:p>
-            <a:pPr algn="l">
-              <a:lnSpc>
-                <a:spcPct val="120000"/>
-              </a:lnSpc>
-            </a:pPr>
-            <a:r>
-              <a:rPr lang="en-US" sz="1500" dirty="0">
-                <a:solidFill>
-                  <a:srgbClr val="1C1C1E"/>
-                </a:solidFill>
-                <a:latin typeface="Quattrocento Sans" pitchFamily="34" charset="0"/>
-                <a:ea typeface="Quattrocento Sans" pitchFamily="34" charset="-122"/>
-                <a:cs typeface="Quattrocento Sans" pitchFamily="34" charset="-120"/>
-              </a:rPr>
-              <a:t>/getAllTheUsers?id=123&amp;action=orders</a:t>
-            </a:r>
-            <a:endParaRPr lang="en-US" sz="1500" dirty="0"/>
-          </a:p>
-        </p:txBody>
-      </p:sp>
-      <p:sp>
-        <p:nvSpPr>
-          <p:cNvPr id="15" name="Text 13"/>
-          <p:cNvSpPr/>
-          <p:nvPr/>
-        </p:nvSpPr>
-        <p:spPr>
-          <a:xfrm>
-            <a:off x="8382000" y="1651000"/>
-            <a:ext cx="3175000" cy="279400"/>
-          </a:xfrm>
-          <a:prstGeom prst="rect">
-            <a:avLst/>
-          </a:prstGeom>
-          <a:noFill/>
-          <a:ln/>
-        </p:spPr>
-        <p:txBody>
-          <a:bodyPr wrap="none" lIns="0" tIns="0" rIns="0" bIns="0" rtlCol="0" anchor="ctr"/>
-          <a:lstStyle/>
-          <a:p>
-            <a:pPr algn="l">
-              <a:lnSpc>
-                <a:spcPct val="120000"/>
-              </a:lnSpc>
-            </a:pPr>
-            <a:r>
-              <a:rPr lang="en-US" sz="1300" spc="200" kern="0" dirty="0">
-                <a:solidFill>
-                  <a:srgbClr val="D4943A"/>
-                </a:solidFill>
-                <a:latin typeface="Liter" pitchFamily="34" charset="0"/>
-                <a:ea typeface="Liter" pitchFamily="34" charset="-122"/>
-                <a:cs typeface="Liter" pitchFamily="34" charset="-120"/>
-              </a:rPr>
-              <a:t>PAGINATION STRATEGIES</a:t>
-            </a:r>
-            <a:endParaRPr lang="en-US" sz="1300" dirty="0"/>
-          </a:p>
-        </p:txBody>
-      </p:sp>
-      <p:sp>
-        <p:nvSpPr>
-          <p:cNvPr id="16" name="Shape 14"/>
-          <p:cNvSpPr/>
-          <p:nvPr/>
-        </p:nvSpPr>
-        <p:spPr>
-          <a:xfrm>
-            <a:off x="8382000" y="2095500"/>
-            <a:ext cx="7112000" cy="2222500"/>
-          </a:xfrm>
-          <a:prstGeom prst="roundRect">
-            <a:avLst>
-              <a:gd name="adj" fmla="val 8000"/>
-            </a:avLst>
-          </a:prstGeom>
-          <a:solidFill>
-            <a:srgbClr val="E8EDE9"/>
-          </a:solidFill>
-          <a:ln/>
-        </p:spPr>
-      </p:sp>
-      <p:sp>
-        <p:nvSpPr>
-          <p:cNvPr id="17" name="Text 15"/>
-          <p:cNvSpPr/>
-          <p:nvPr/>
-        </p:nvSpPr>
-        <p:spPr>
-          <a:xfrm>
-            <a:off x="8636000" y="2260600"/>
-            <a:ext cx="6604000" cy="355600"/>
-          </a:xfrm>
-          <a:prstGeom prst="rect">
-            <a:avLst/>
-          </a:prstGeom>
-          <a:noFill/>
-          <a:ln/>
-        </p:spPr>
-        <p:txBody>
-          <a:bodyPr wrap="none" lIns="0" tIns="0" rIns="0" bIns="0" rtlCol="0" anchor="ctr"/>
-          <a:lstStyle/>
-          <a:p>
-            <a:pPr algn="l">
-              <a:lnSpc>
-                <a:spcPct val="120000"/>
-              </a:lnSpc>
-            </a:pPr>
-            <a:r>
-              <a:rPr lang="en-US" sz="1700" b="1" dirty="0">
-                <a:solidFill>
-                  <a:srgbClr val="1B4D4D"/>
-                </a:solidFill>
-                <a:latin typeface="Liter" pitchFamily="34" charset="0"/>
-                <a:ea typeface="Liter" pitchFamily="34" charset="-122"/>
-                <a:cs typeface="Liter" pitchFamily="34" charset="-120"/>
-              </a:rPr>
-              <a:t>Offset-Based Pagination</a:t>
-            </a:r>
-            <a:endParaRPr lang="en-US" sz="1700" dirty="0"/>
-          </a:p>
-        </p:txBody>
-      </p:sp>
-      <p:sp>
-        <p:nvSpPr>
-          <p:cNvPr id="18" name="Text 16"/>
-          <p:cNvSpPr/>
-          <p:nvPr/>
-        </p:nvSpPr>
-        <p:spPr>
-          <a:xfrm>
-            <a:off x="8636000" y="2667000"/>
-            <a:ext cx="6604000" cy="304800"/>
-          </a:xfrm>
-          <a:prstGeom prst="rect">
-            <a:avLst/>
-          </a:prstGeom>
-          <a:noFill/>
-          <a:ln/>
-        </p:spPr>
-        <p:txBody>
-          <a:bodyPr wrap="none" lIns="0" tIns="0" rIns="0" bIns="0" rtlCol="0" anchor="ctr"/>
-          <a:lstStyle/>
-          <a:p>
-            <a:pPr algn="l">
-              <a:lnSpc>
-                <a:spcPct val="120000"/>
-              </a:lnSpc>
-            </a:pPr>
-            <a:r>
-              <a:rPr lang="en-US" sz="1400" dirty="0">
-                <a:solidFill>
-                  <a:srgbClr val="D4943A"/>
-                </a:solidFill>
-                <a:latin typeface="Quattrocento Sans" pitchFamily="34" charset="0"/>
-                <a:ea typeface="Quattrocento Sans" pitchFamily="34" charset="-122"/>
-                <a:cs typeface="Quattrocento Sans" pitchFamily="34" charset="-120"/>
-              </a:rPr>
-              <a:t>/users?offset=20&amp;limit=10</a:t>
-            </a:r>
-            <a:endParaRPr lang="en-US" sz="1400" dirty="0"/>
-          </a:p>
-        </p:txBody>
-      </p:sp>
-      <p:sp>
-        <p:nvSpPr>
-          <p:cNvPr id="19" name="Text 17"/>
-          <p:cNvSpPr/>
-          <p:nvPr/>
-        </p:nvSpPr>
-        <p:spPr>
-          <a:xfrm>
-            <a:off x="8636000" y="3048000"/>
-            <a:ext cx="6604000" cy="1143000"/>
-          </a:xfrm>
-          <a:prstGeom prst="rect">
-            <a:avLst/>
-          </a:prstGeom>
-          <a:noFill/>
-          <a:ln/>
-        </p:spPr>
-        <p:txBody>
-          <a:bodyPr wrap="square" lIns="0" tIns="0" rIns="0" bIns="0" rtlCol="0" anchor="t"/>
-          <a:lstStyle/>
-          <a:p>
-            <a:pPr algn="l">
-              <a:lnSpc>
-                <a:spcPct val="150000"/>
-              </a:lnSpc>
-            </a:pPr>
-            <a:r>
-              <a:rPr lang="en-US" sz="1400" dirty="0">
-                <a:solidFill>
-                  <a:srgbClr val="1C1C1E"/>
-                </a:solidFill>
-                <a:latin typeface="Quattrocento Sans" pitchFamily="34" charset="0"/>
-                <a:ea typeface="Quattrocento Sans" pitchFamily="34" charset="-122"/>
-                <a:cs typeface="Quattrocento Sans" pitchFamily="34" charset="-120"/>
-              </a:rPr>
-              <a:t>Simple but can be slow for large datasets. Like flipping to page 100 — you must turn every page before it.</a:t>
-            </a:r>
-            <a:endParaRPr lang="en-US" sz="1400" dirty="0"/>
-          </a:p>
-        </p:txBody>
-      </p:sp>
-      <p:sp>
-        <p:nvSpPr>
-          <p:cNvPr id="20" name="Shape 18"/>
-          <p:cNvSpPr/>
-          <p:nvPr/>
-        </p:nvSpPr>
-        <p:spPr>
-          <a:xfrm>
-            <a:off x="8382000" y="4572000"/>
-            <a:ext cx="7112000" cy="2222500"/>
-          </a:xfrm>
-          <a:prstGeom prst="roundRect">
-            <a:avLst>
-              <a:gd name="adj" fmla="val 8000"/>
-            </a:avLst>
-          </a:prstGeom>
-          <a:solidFill>
             <a:srgbClr val="1B4D4D"/>
           </a:solidFill>
           <a:ln/>
         </p:spPr>
+        <p:txBody>
+          <a:bodyPr/>
+          <a:lstStyle/>
+          <a:p>
+            <a:endParaRPr lang="en-US"/>
+          </a:p>
+        </p:txBody>
       </p:sp>
       <p:sp>
         <p:nvSpPr>
@@ -7929,6 +7724,13 @@
             <a:tailEnd type="none"/>
           </a:ln>
         </p:spPr>
+        <p:txBody>
+          <a:bodyPr/>
+          <a:lstStyle/>
+          <a:p>
+            <a:endParaRPr lang="en-US"/>
+          </a:p>
+        </p:txBody>
       </p:sp>
     </p:spTree>
   </p:cSld>
@@ -7937,7 +7739,6 @@
   </p:clrMapOvr>
   <p:transition>
     <p:fade/>
-    <p:spd val="med"/>
   </p:transition>
 </p:sld>
 </file>
@@ -7950,6 +7751,7 @@
         <a:solidFill>
           <a:srgbClr val="F5F3EF"/>
         </a:solidFill>
+        <a:effectLst/>
       </p:bgPr>
     </p:bg>
     <p:spTree>
@@ -7993,7 +7795,7 @@
               </a:lnSpc>
             </a:pPr>
             <a:r>
-              <a:rPr lang="en-US" sz="1300" spc="200" kern="0" dirty="0">
+              <a:rPr lang="en-US" sz="1300" kern="0" spc="200" dirty="0">
                 <a:solidFill>
                   <a:srgbClr val="8A9B8C"/>
                 </a:solidFill>
@@ -8067,6 +7869,13 @@
           </a:solidFill>
           <a:ln/>
         </p:spPr>
+        <p:txBody>
+          <a:bodyPr/>
+          <a:lstStyle/>
+          <a:p>
+            <a:endParaRPr lang="en-US"/>
+          </a:p>
+        </p:txBody>
       </p:sp>
       <p:sp>
         <p:nvSpPr>
@@ -8105,11 +7914,6 @@
               </a:rPr>
               <a:t>Authentication verifies </a:t>
             </a:r>
-            <a:pPr algn="l">
-              <a:lnSpc>
-                <a:spcPct val="140000"/>
-              </a:lnSpc>
-            </a:pPr>
             <a:r>
               <a:rPr lang="en-US" sz="1600" b="1" dirty="0">
                 <a:solidFill>
@@ -8121,11 +7925,6 @@
               </a:rPr>
               <a:t>who</a:t>
             </a:r>
-            <a:pPr algn="l">
-              <a:lnSpc>
-                <a:spcPct val="140000"/>
-              </a:lnSpc>
-            </a:pPr>
             <a:r>
               <a:rPr lang="en-US" sz="1600" dirty="0">
                 <a:solidFill>
@@ -8137,11 +7936,6 @@
               </a:rPr>
               <a:t> is making the request. Authorization determines </a:t>
             </a:r>
-            <a:pPr algn="l">
-              <a:lnSpc>
-                <a:spcPct val="140000"/>
-              </a:lnSpc>
-            </a:pPr>
             <a:r>
               <a:rPr lang="en-US" sz="1600" b="1" dirty="0">
                 <a:solidFill>
@@ -8153,11 +7947,6 @@
               </a:rPr>
               <a:t>what</a:t>
             </a:r>
-            <a:pPr algn="l">
-              <a:lnSpc>
-                <a:spcPct val="140000"/>
-              </a:lnSpc>
-            </a:pPr>
             <a:r>
               <a:rPr lang="en-US" sz="1600" dirty="0">
                 <a:solidFill>
@@ -8194,6 +7983,13 @@
           </a:solidFill>
           <a:ln/>
         </p:spPr>
+        <p:txBody>
+          <a:bodyPr/>
+          <a:lstStyle/>
+          <a:p>
+            <a:endParaRPr lang="en-US"/>
+          </a:p>
+        </p:txBody>
       </p:sp>
       <p:sp>
         <p:nvSpPr>
@@ -8214,6 +8010,13 @@
           </a:solidFill>
           <a:ln/>
         </p:spPr>
+        <p:txBody>
+          <a:bodyPr/>
+          <a:lstStyle/>
+          <a:p>
+            <a:endParaRPr lang="en-US"/>
+          </a:p>
+        </p:txBody>
       </p:sp>
       <p:sp>
         <p:nvSpPr>
@@ -8344,6 +8147,13 @@
           </a:solidFill>
           <a:ln/>
         </p:spPr>
+        <p:txBody>
+          <a:bodyPr/>
+          <a:lstStyle/>
+          <a:p>
+            <a:endParaRPr lang="en-US"/>
+          </a:p>
+        </p:txBody>
       </p:sp>
       <p:sp>
         <p:nvSpPr>
@@ -8445,6 +8255,20 @@
               </a:rPr>
               <a:t>Best for:</a:t>
             </a:r>
+            <a:r>
+              <a:rPr lang="en-US" sz="1500" dirty="0">
+                <a:solidFill>
+                  <a:srgbClr val="1C1C1E"/>
+                </a:solidFill>
+                <a:latin typeface="Quattrocento Sans" pitchFamily="34" charset="0"/>
+                <a:ea typeface="Quattrocento Sans" pitchFamily="34" charset="-122"/>
+                <a:cs typeface="Quattrocento Sans" pitchFamily="34" charset="-120"/>
+              </a:rPr>
+              <a:t> Public APIs, rate limiting</a:t>
+            </a:r>
+            <a:endParaRPr lang="en-US" sz="1500" dirty="0"/>
+          </a:p>
+          <a:p>
             <a:pPr algn="l">
               <a:lnSpc>
                 <a:spcPct val="160000"/>
@@ -8456,28 +8280,6 @@
             <a:r>
               <a:rPr lang="en-US" sz="1500" dirty="0">
                 <a:solidFill>
-                  <a:srgbClr val="1C1C1E"/>
-                </a:solidFill>
-                <a:latin typeface="Quattrocento Sans" pitchFamily="34" charset="0"/>
-                <a:ea typeface="Quattrocento Sans" pitchFamily="34" charset="-122"/>
-                <a:cs typeface="Quattrocento Sans" pitchFamily="34" charset="-120"/>
-              </a:rPr>
-              <a:t> Public APIs, rate limiting</a:t>
-            </a:r>
-            <a:endParaRPr lang="en-US" sz="1500" dirty="0"/>
-          </a:p>
-          <a:p>
-            <a:pPr algn="l">
-              <a:lnSpc>
-                <a:spcPct val="160000"/>
-              </a:lnSpc>
-              <a:spcBef>
-                <a:spcPts val="800"/>
-              </a:spcBef>
-            </a:pPr>
-            <a:r>
-              <a:rPr lang="en-US" sz="1500" dirty="0">
-                <a:solidFill>
                   <a:srgbClr val="C44D4D"/>
                 </a:solidFill>
                 <a:latin typeface="Quattrocento Sans" pitchFamily="34" charset="0"/>
@@ -8486,14 +8288,6 @@
               </a:rPr>
               <a:t>Limitation:</a:t>
             </a:r>
-            <a:pPr algn="l">
-              <a:lnSpc>
-                <a:spcPct val="160000"/>
-              </a:lnSpc>
-              <a:spcBef>
-                <a:spcPts val="800"/>
-              </a:spcBef>
-            </a:pPr>
             <a:r>
               <a:rPr lang="en-US" sz="1500" dirty="0">
                 <a:solidFill>
@@ -8530,6 +8324,13 @@
           </a:solidFill>
           <a:ln/>
         </p:spPr>
+        <p:txBody>
+          <a:bodyPr/>
+          <a:lstStyle/>
+          <a:p>
+            <a:endParaRPr lang="en-US"/>
+          </a:p>
+        </p:txBody>
       </p:sp>
       <p:sp>
         <p:nvSpPr>
@@ -8621,6 +8422,13 @@
           </a:solidFill>
           <a:ln/>
         </p:spPr>
+        <p:txBody>
+          <a:bodyPr/>
+          <a:lstStyle/>
+          <a:p>
+            <a:endParaRPr lang="en-US"/>
+          </a:p>
+        </p:txBody>
       </p:sp>
       <p:sp>
         <p:nvSpPr>
@@ -8690,7 +8498,7 @@
               </a:lnSpc>
             </a:pPr>
             <a:r>
-              <a:rPr lang="en-US" sz="1100" spc="100" kern="0" dirty="0">
+              <a:rPr lang="en-US" sz="1100" kern="0" spc="100" dirty="0">
                 <a:solidFill>
                   <a:srgbClr val="D4943A"/>
                 </a:solidFill>
@@ -8763,6 +8571,20 @@
               </a:rPr>
               <a:t>Best for:</a:t>
             </a:r>
+            <a:r>
+              <a:rPr lang="en-US" sz="1500" dirty="0">
+                <a:solidFill>
+                  <a:srgbClr val="FFFFFF"/>
+                </a:solidFill>
+                <a:latin typeface="Quattrocento Sans" pitchFamily="34" charset="0"/>
+                <a:ea typeface="Quattrocento Sans" pitchFamily="34" charset="-122"/>
+                <a:cs typeface="Quattrocento Sans" pitchFamily="34" charset="-120"/>
+              </a:rPr>
+              <a:t> Social login, third-party apps</a:t>
+            </a:r>
+            <a:endParaRPr lang="en-US" sz="1500" dirty="0"/>
+          </a:p>
+          <a:p>
             <a:pPr algn="l">
               <a:lnSpc>
                 <a:spcPct val="160000"/>
@@ -8774,28 +8596,6 @@
             <a:r>
               <a:rPr lang="en-US" sz="1500" dirty="0">
                 <a:solidFill>
-                  <a:srgbClr val="FFFFFF"/>
-                </a:solidFill>
-                <a:latin typeface="Quattrocento Sans" pitchFamily="34" charset="0"/>
-                <a:ea typeface="Quattrocento Sans" pitchFamily="34" charset="-122"/>
-                <a:cs typeface="Quattrocento Sans" pitchFamily="34" charset="-120"/>
-              </a:rPr>
-              <a:t> Social login, third-party apps</a:t>
-            </a:r>
-            <a:endParaRPr lang="en-US" sz="1500" dirty="0"/>
-          </a:p>
-          <a:p>
-            <a:pPr algn="l">
-              <a:lnSpc>
-                <a:spcPct val="160000"/>
-              </a:lnSpc>
-              <a:spcBef>
-                <a:spcPts val="800"/>
-              </a:spcBef>
-            </a:pPr>
-            <a:r>
-              <a:rPr lang="en-US" sz="1500" dirty="0">
-                <a:solidFill>
                   <a:srgbClr val="9EC6A0"/>
                 </a:solidFill>
                 <a:latin typeface="Quattrocento Sans" pitchFamily="34" charset="0"/>
@@ -8804,14 +8604,6 @@
               </a:rPr>
               <a:t>Flow:</a:t>
             </a:r>
-            <a:pPr algn="l">
-              <a:lnSpc>
-                <a:spcPct val="160000"/>
-              </a:lnSpc>
-              <a:spcBef>
-                <a:spcPts val="800"/>
-              </a:spcBef>
-            </a:pPr>
             <a:r>
               <a:rPr lang="en-US" sz="1500" dirty="0">
                 <a:solidFill>
@@ -8848,6 +8640,13 @@
           </a:solidFill>
           <a:ln/>
         </p:spPr>
+        <p:txBody>
+          <a:bodyPr/>
+          <a:lstStyle/>
+          <a:p>
+            <a:endParaRPr lang="en-US"/>
+          </a:p>
+        </p:txBody>
       </p:sp>
       <p:sp>
         <p:nvSpPr>
@@ -8868,6 +8667,13 @@
           </a:solidFill>
           <a:ln/>
         </p:spPr>
+        <p:txBody>
+          <a:bodyPr/>
+          <a:lstStyle/>
+          <a:p>
+            <a:endParaRPr lang="en-US"/>
+          </a:p>
+        </p:txBody>
       </p:sp>
       <p:sp>
         <p:nvSpPr>
@@ -8968,6 +8774,13 @@
           </a:solidFill>
           <a:ln/>
         </p:spPr>
+        <p:txBody>
+          <a:bodyPr/>
+          <a:lstStyle/>
+          <a:p>
+            <a:endParaRPr lang="en-US"/>
+          </a:p>
+        </p:txBody>
       </p:sp>
       <p:sp>
         <p:nvSpPr>
@@ -9069,7 +8882,21 @@
               </a:rPr>
               <a:t>Best for:</a:t>
             </a:r>
-            <a:pPr algn="l">
+            <a:r>
+              <a:rPr lang="en-US" sz="1500" dirty="0">
+                <a:solidFill>
+                  <a:srgbClr val="1C1C1E"/>
+                </a:solidFill>
+                <a:latin typeface="Quattrocento Sans" pitchFamily="34" charset="0"/>
+                <a:ea typeface="Quattrocento Sans" pitchFamily="34" charset="-122"/>
+                <a:cs typeface="Quattrocento Sans" pitchFamily="34" charset="-120"/>
+              </a:rPr>
+              <a:t> Stateless auth, microservices</a:t>
+            </a:r>
+            <a:endParaRPr lang="en-US" sz="1500" dirty="0"/>
+          </a:p>
+          <a:p>
+            <a:pPr>
               <a:lnSpc>
                 <a:spcPct val="160000"/>
               </a:lnSpc>
@@ -9080,44 +8907,46 @@
             <a:r>
               <a:rPr lang="en-US" sz="1500" dirty="0">
                 <a:solidFill>
+                  <a:srgbClr val="9EC6A0"/>
+                </a:solidFill>
+                <a:latin typeface="Quattrocento Sans" pitchFamily="34" charset="0"/>
+                <a:ea typeface="Quattrocento Sans" pitchFamily="34" charset="-122"/>
+                <a:cs typeface="Quattrocento Sans" pitchFamily="34" charset="-120"/>
+              </a:rPr>
+              <a:t>Format:</a:t>
+            </a:r>
+            <a:r>
+              <a:rPr lang="en-US" sz="1500" dirty="0">
+                <a:solidFill>
                   <a:srgbClr val="1C1C1E"/>
                 </a:solidFill>
                 <a:latin typeface="Quattrocento Sans" pitchFamily="34" charset="0"/>
                 <a:ea typeface="Quattrocento Sans" pitchFamily="34" charset="-122"/>
                 <a:cs typeface="Quattrocento Sans" pitchFamily="34" charset="-120"/>
               </a:rPr>
-              <a:t> Stateless auth, microservices</a:t>
-            </a:r>
-            <a:endParaRPr lang="en-US" sz="1500" dirty="0"/>
-          </a:p>
-          <a:p>
-            <a:pPr algn="l">
-              <a:lnSpc>
-                <a:spcPct val="160000"/>
-              </a:lnSpc>
-              <a:spcBef>
-                <a:spcPts val="800"/>
-              </a:spcBef>
-            </a:pPr>
-            <a:r>
+              <a:t> </a:t>
+            </a:r>
+            <a:r>
+              <a:rPr lang="en-US" sz="1500" dirty="0" err="1">
+                <a:solidFill>
+                  <a:srgbClr val="1C1C1E"/>
+                </a:solidFill>
+                <a:latin typeface="Quattrocento Sans" pitchFamily="34" charset="0"/>
+                <a:ea typeface="Quattrocento Sans" pitchFamily="34" charset="-122"/>
+                <a:cs typeface="Quattrocento Sans" pitchFamily="34" charset="-120"/>
+              </a:rPr>
+              <a:t>Header.Payload.Signature</a:t>
+            </a:r>
+            <a:br>
               <a:rPr lang="en-US" sz="1500" dirty="0">
                 <a:solidFill>
-                  <a:srgbClr val="9EC6A0"/>
-                </a:solidFill>
-                <a:latin typeface="Quattrocento Sans" pitchFamily="34" charset="0"/>
-                <a:ea typeface="Quattrocento Sans" pitchFamily="34" charset="-122"/>
-                <a:cs typeface="Quattrocento Sans" pitchFamily="34" charset="-120"/>
-              </a:rPr>
-              <a:t>Format:</a:t>
-            </a:r>
-            <a:pPr algn="l">
-              <a:lnSpc>
-                <a:spcPct val="160000"/>
-              </a:lnSpc>
-              <a:spcBef>
-                <a:spcPts val="800"/>
-              </a:spcBef>
-            </a:pPr>
+                  <a:srgbClr val="1C1C1E"/>
+                </a:solidFill>
+                <a:latin typeface="Quattrocento Sans" pitchFamily="34" charset="0"/>
+                <a:ea typeface="Quattrocento Sans" pitchFamily="34" charset="-122"/>
+                <a:cs typeface="Quattrocento Sans" pitchFamily="34" charset="-120"/>
+              </a:rPr>
+            </a:br>
             <a:r>
               <a:rPr lang="en-US" sz="1500" dirty="0">
                 <a:solidFill>
@@ -9127,7 +8956,7 @@
                 <a:ea typeface="Quattrocento Sans" pitchFamily="34" charset="-122"/>
                 <a:cs typeface="Quattrocento Sans" pitchFamily="34" charset="-120"/>
               </a:rPr>
-              <a:t> Header.Payload.Signature</a:t>
+              <a:t>Hashing Algorithm, .Payload, Signature (sir point)</a:t>
             </a:r>
             <a:endParaRPr lang="en-US" sz="1500" dirty="0"/>
           </a:p>
@@ -9156,6 +8985,13 @@
           </a:solidFill>
           <a:ln/>
         </p:spPr>
+        <p:txBody>
+          <a:bodyPr/>
+          <a:lstStyle/>
+          <a:p>
+            <a:endParaRPr lang="en-US"/>
+          </a:p>
+        </p:txBody>
       </p:sp>
       <p:sp>
         <p:nvSpPr>
@@ -9176,6 +9012,13 @@
           </a:solidFill>
           <a:ln/>
         </p:spPr>
+        <p:txBody>
+          <a:bodyPr/>
+          <a:lstStyle/>
+          <a:p>
+            <a:endParaRPr lang="en-US"/>
+          </a:p>
+        </p:txBody>
       </p:sp>
       <p:sp>
         <p:nvSpPr>
@@ -9204,7 +9047,7 @@
               </a:lnSpc>
             </a:pPr>
             <a:r>
-              <a:rPr lang="en-US" sz="1300" spc="200" kern="0" dirty="0">
+              <a:rPr lang="en-US" sz="1300" kern="0" spc="200" dirty="0">
                 <a:solidFill>
                   <a:srgbClr val="D4943A"/>
                 </a:solidFill>
@@ -9255,12 +9098,81 @@
               </a:rPr>
               <a:t>HTTPS only</a:t>
             </a:r>
+            <a:r>
+              <a:rPr lang="en-US" sz="1500" dirty="0">
+                <a:solidFill>
+                  <a:srgbClr val="1C1C1E"/>
+                </a:solidFill>
+                <a:latin typeface="Quattrocento Sans" pitchFamily="34" charset="0"/>
+                <a:ea typeface="Quattrocento Sans" pitchFamily="34" charset="-122"/>
+                <a:cs typeface="Quattrocento Sans" pitchFamily="34" charset="-120"/>
+              </a:rPr>
+              <a:t> — never send tokens over HTTP  |  </a:t>
+            </a:r>
+            <a:r>
+              <a:rPr lang="en-US" sz="1500" b="1" dirty="0">
+                <a:solidFill>
+                  <a:srgbClr val="1C1C1E"/>
+                </a:solidFill>
+                <a:latin typeface="Quattrocento Sans" pitchFamily="34" charset="0"/>
+                <a:ea typeface="Quattrocento Sans" pitchFamily="34" charset="-122"/>
+                <a:cs typeface="Quattrocento Sans" pitchFamily="34" charset="-120"/>
+              </a:rPr>
+              <a:t>Rate limiting</a:t>
+            </a:r>
+            <a:r>
+              <a:rPr lang="en-US" sz="1500" dirty="0">
+                <a:solidFill>
+                  <a:srgbClr val="1C1C1E"/>
+                </a:solidFill>
+                <a:latin typeface="Quattrocento Sans" pitchFamily="34" charset="0"/>
+                <a:ea typeface="Quattrocento Sans" pitchFamily="34" charset="-122"/>
+                <a:cs typeface="Quattrocento Sans" pitchFamily="34" charset="-120"/>
+              </a:rPr>
+              <a:t> — prevent abuse and DDoS  |  </a:t>
+            </a:r>
+            <a:r>
+              <a:rPr lang="en-US" sz="1500" b="1" dirty="0">
+                <a:solidFill>
+                  <a:srgbClr val="1C1C1E"/>
+                </a:solidFill>
+                <a:latin typeface="Quattrocento Sans" pitchFamily="34" charset="0"/>
+                <a:ea typeface="Quattrocento Sans" pitchFamily="34" charset="-122"/>
+                <a:cs typeface="Quattrocento Sans" pitchFamily="34" charset="-120"/>
+              </a:rPr>
+              <a:t>Input validation</a:t>
+            </a:r>
+            <a:r>
+              <a:rPr lang="en-US" sz="1500" dirty="0">
+                <a:solidFill>
+                  <a:srgbClr val="1C1C1E"/>
+                </a:solidFill>
+                <a:latin typeface="Quattrocento Sans" pitchFamily="34" charset="0"/>
+                <a:ea typeface="Quattrocento Sans" pitchFamily="34" charset="-122"/>
+                <a:cs typeface="Quattrocento Sans" pitchFamily="34" charset="-120"/>
+              </a:rPr>
+              <a:t> — sanitize all user data</a:t>
+            </a:r>
+            <a:endParaRPr lang="en-US" sz="1500" dirty="0"/>
+          </a:p>
+          <a:p>
             <a:pPr algn="l">
               <a:lnSpc>
                 <a:spcPct val="160000"/>
               </a:lnSpc>
             </a:pPr>
             <a:r>
+              <a:rPr lang="en-US" sz="1500" b="1" dirty="0">
+                <a:solidFill>
+                  <a:srgbClr val="1C1C1E"/>
+                </a:solidFill>
+                <a:latin typeface="Quattrocento Sans" pitchFamily="34" charset="0"/>
+                <a:ea typeface="Quattrocento Sans" pitchFamily="34" charset="-122"/>
+                <a:cs typeface="Quattrocento Sans" pitchFamily="34" charset="-120"/>
+              </a:rPr>
+              <a:t>Least privilege</a:t>
+            </a:r>
+            <a:r>
               <a:rPr lang="en-US" sz="1500" dirty="0">
                 <a:solidFill>
                   <a:srgbClr val="1C1C1E"/>
@@ -9269,13 +9181,8 @@
                 <a:ea typeface="Quattrocento Sans" pitchFamily="34" charset="-122"/>
                 <a:cs typeface="Quattrocento Sans" pitchFamily="34" charset="-120"/>
               </a:rPr>
-              <a:t> — never send tokens over HTTP  |  </a:t>
-            </a:r>
-            <a:pPr algn="l">
-              <a:lnSpc>
-                <a:spcPct val="160000"/>
-              </a:lnSpc>
-            </a:pPr>
+              <a:t> — grant minimum necessary access  |  </a:t>
+            </a:r>
             <a:r>
               <a:rPr lang="en-US" sz="1500" b="1" dirty="0">
                 <a:solidFill>
@@ -9285,112 +9192,8 @@
                 <a:ea typeface="Quattrocento Sans" pitchFamily="34" charset="-122"/>
                 <a:cs typeface="Quattrocento Sans" pitchFamily="34" charset="-120"/>
               </a:rPr>
-              <a:t>Rate limiting</a:t>
-            </a:r>
-            <a:pPr algn="l">
-              <a:lnSpc>
-                <a:spcPct val="160000"/>
-              </a:lnSpc>
-            </a:pPr>
-            <a:r>
-              <a:rPr lang="en-US" sz="1500" dirty="0">
-                <a:solidFill>
-                  <a:srgbClr val="1C1C1E"/>
-                </a:solidFill>
-                <a:latin typeface="Quattrocento Sans" pitchFamily="34" charset="0"/>
-                <a:ea typeface="Quattrocento Sans" pitchFamily="34" charset="-122"/>
-                <a:cs typeface="Quattrocento Sans" pitchFamily="34" charset="-120"/>
-              </a:rPr>
-              <a:t> — prevent abuse and DDoS  |  </a:t>
-            </a:r>
-            <a:pPr algn="l">
-              <a:lnSpc>
-                <a:spcPct val="160000"/>
-              </a:lnSpc>
-            </a:pPr>
-            <a:r>
-              <a:rPr lang="en-US" sz="1500" b="1" dirty="0">
-                <a:solidFill>
-                  <a:srgbClr val="1C1C1E"/>
-                </a:solidFill>
-                <a:latin typeface="Quattrocento Sans" pitchFamily="34" charset="0"/>
-                <a:ea typeface="Quattrocento Sans" pitchFamily="34" charset="-122"/>
-                <a:cs typeface="Quattrocento Sans" pitchFamily="34" charset="-120"/>
-              </a:rPr>
-              <a:t>Input validation</a:t>
-            </a:r>
-            <a:pPr algn="l">
-              <a:lnSpc>
-                <a:spcPct val="160000"/>
-              </a:lnSpc>
-            </a:pPr>
-            <a:r>
-              <a:rPr lang="en-US" sz="1500" dirty="0">
-                <a:solidFill>
-                  <a:srgbClr val="1C1C1E"/>
-                </a:solidFill>
-                <a:latin typeface="Quattrocento Sans" pitchFamily="34" charset="0"/>
-                <a:ea typeface="Quattrocento Sans" pitchFamily="34" charset="-122"/>
-                <a:cs typeface="Quattrocento Sans" pitchFamily="34" charset="-120"/>
-              </a:rPr>
-              <a:t> — sanitize all user data</a:t>
-            </a:r>
-            <a:endParaRPr lang="en-US" sz="1500" dirty="0"/>
-          </a:p>
-          <a:p>
-            <a:pPr algn="l">
-              <a:lnSpc>
-                <a:spcPct val="160000"/>
-              </a:lnSpc>
-            </a:pPr>
-            <a:r>
-              <a:rPr lang="en-US" sz="1500" b="1" dirty="0">
-                <a:solidFill>
-                  <a:srgbClr val="1C1C1E"/>
-                </a:solidFill>
-                <a:latin typeface="Quattrocento Sans" pitchFamily="34" charset="0"/>
-                <a:ea typeface="Quattrocento Sans" pitchFamily="34" charset="-122"/>
-                <a:cs typeface="Quattrocento Sans" pitchFamily="34" charset="-120"/>
-              </a:rPr>
-              <a:t>Least privilege</a:t>
-            </a:r>
-            <a:pPr algn="l">
-              <a:lnSpc>
-                <a:spcPct val="160000"/>
-              </a:lnSpc>
-            </a:pPr>
-            <a:r>
-              <a:rPr lang="en-US" sz="1500" dirty="0">
-                <a:solidFill>
-                  <a:srgbClr val="1C1C1E"/>
-                </a:solidFill>
-                <a:latin typeface="Quattrocento Sans" pitchFamily="34" charset="0"/>
-                <a:ea typeface="Quattrocento Sans" pitchFamily="34" charset="-122"/>
-                <a:cs typeface="Quattrocento Sans" pitchFamily="34" charset="-120"/>
-              </a:rPr>
-              <a:t> — grant minimum necessary access  |  </a:t>
-            </a:r>
-            <a:pPr algn="l">
-              <a:lnSpc>
-                <a:spcPct val="160000"/>
-              </a:lnSpc>
-            </a:pPr>
-            <a:r>
-              <a:rPr lang="en-US" sz="1500" b="1" dirty="0">
-                <a:solidFill>
-                  <a:srgbClr val="1C1C1E"/>
-                </a:solidFill>
-                <a:latin typeface="Quattrocento Sans" pitchFamily="34" charset="0"/>
-                <a:ea typeface="Quattrocento Sans" pitchFamily="34" charset="-122"/>
-                <a:cs typeface="Quattrocento Sans" pitchFamily="34" charset="-120"/>
-              </a:rPr>
               <a:t>Token expiry</a:t>
             </a:r>
-            <a:pPr algn="l">
-              <a:lnSpc>
-                <a:spcPct val="160000"/>
-              </a:lnSpc>
-            </a:pPr>
             <a:r>
               <a:rPr lang="en-US" sz="1500" dirty="0">
                 <a:solidFill>
@@ -9432,6 +9235,13 @@
             <a:tailEnd type="none"/>
           </a:ln>
         </p:spPr>
+        <p:txBody>
+          <a:bodyPr/>
+          <a:lstStyle/>
+          <a:p>
+            <a:endParaRPr lang="en-US"/>
+          </a:p>
+        </p:txBody>
       </p:sp>
     </p:spTree>
   </p:cSld>
@@ -9440,7 +9250,6 @@
   </p:clrMapOvr>
   <p:transition>
     <p:fade/>
-    <p:spd val="med"/>
   </p:transition>
 </p:sld>
 </file>
@@ -9464,15 +9273,15 @@
       </p:grpSpPr>
       <p:pic>
         <p:nvPicPr>
-          <p:cNvPr id="2" name="Image 0" descr="https://kimi-img.moonshot.cn/pub/slides/okc/r3tmzt32f22la/mnt/agents/output/api_design/images/6_29_253_Server_Room_Background_Royalty.png">    </p:cNvPr>
+          <p:cNvPr id="2" name="Image 0" descr="https://kimi-img.moonshot.cn/pub/slides/okc/r3tmzt32f22la/mnt/agents/output/api_design/images/6_29_253_Server_Room_Background_Royalty.png"/>
           <p:cNvPicPr>
             <a:picLocks noChangeAspect="1"/>
           </p:cNvPicPr>
           <p:nvPr/>
         </p:nvPicPr>
         <p:blipFill>
-          <a:blip r:embed="rId1"/>
-          <a:srcRect l="0" r="0" t="6607" b="6607"/>
+          <a:blip r:embed="rId3"/>
+          <a:srcRect t="6607" b="6607"/>
           <a:stretch/>
         </p:blipFill>
         <p:spPr>
@@ -9499,7 +9308,7 @@
           <a:prstGeom prst="rect">
             <a:avLst/>
           </a:prstGeom>
-          <a:gradFill rotWithShape="1" flip="none">
+          <a:gradFill flip="none" rotWithShape="1">
             <a:gsLst>
               <a:gs pos="0">
                 <a:srgbClr val="1B4D4D">
@@ -9523,6 +9332,13 @@
             <a:prstDash val="solid"/>
           </a:ln>
         </p:spPr>
+        <p:txBody>
+          <a:bodyPr/>
+          <a:lstStyle/>
+          <a:p>
+            <a:endParaRPr lang="en-US"/>
+          </a:p>
+        </p:txBody>
       </p:sp>
       <p:sp>
         <p:nvSpPr>
@@ -9584,6 +9400,13 @@
           </a:solidFill>
           <a:ln/>
         </p:spPr>
+        <p:txBody>
+          <a:bodyPr/>
+          <a:lstStyle/>
+          <a:p>
+            <a:endParaRPr lang="en-US"/>
+          </a:p>
+        </p:txBody>
       </p:sp>
       <p:sp>
         <p:nvSpPr>
@@ -9612,7 +9435,7 @@
               </a:lnSpc>
             </a:pPr>
             <a:r>
-              <a:rPr lang="en-US" sz="4000" spc="400" kern="0" dirty="0">
+              <a:rPr lang="en-US" sz="4000" kern="0" spc="400" dirty="0">
                 <a:solidFill>
                   <a:srgbClr val="FFFFFF"/>
                 </a:solidFill>
@@ -9674,7 +9497,6 @@
   </p:clrMapOvr>
   <p:transition>
     <p:fade/>
-    <p:spd val="med"/>
   </p:transition>
 </p:sld>
 </file>
@@ -9687,6 +9509,7 @@
         <a:solidFill>
           <a:srgbClr val="F5F3EF"/>
         </a:solidFill>
+        <a:effectLst/>
       </p:bgPr>
     </p:bg>
     <p:spTree>
@@ -9730,7 +9553,7 @@
               </a:lnSpc>
             </a:pPr>
             <a:r>
-              <a:rPr lang="en-US" sz="1300" spc="200" kern="0" dirty="0">
+              <a:rPr lang="en-US" sz="1300" kern="0" spc="200" dirty="0">
                 <a:solidFill>
                   <a:srgbClr val="8A9B8C"/>
                 </a:solidFill>
@@ -9804,6 +9627,13 @@
           </a:solidFill>
           <a:ln/>
         </p:spPr>
+        <p:txBody>
+          <a:bodyPr/>
+          <a:lstStyle/>
+          <a:p>
+            <a:endParaRPr lang="en-US"/>
+          </a:p>
+        </p:txBody>
       </p:sp>
       <p:sp>
         <p:nvSpPr>
@@ -9842,11 +9672,6 @@
               </a:rPr>
               <a:t>OpenAPI</a:t>
             </a:r>
-            <a:pPr algn="l">
-              <a:lnSpc>
-                <a:spcPct val="150000"/>
-              </a:lnSpc>
-            </a:pPr>
             <a:r>
               <a:rPr lang="en-US" sz="1700" dirty="0">
                 <a:solidFill>
@@ -9856,7 +9681,18 @@
                 <a:ea typeface="Quattrocento Sans" pitchFamily="34" charset="-122"/>
                 <a:cs typeface="Quattrocento Sans" pitchFamily="34" charset="-120"/>
               </a:rPr>
-              <a:t> (formerly Swagger) is a machine-readable format for describing REST APIs in YAML or JSON.</a:t>
+              <a:t> (formerly Swagger) is a machine-readable format for describing REST APIs in YAML or JSON. </a:t>
+            </a:r>
+            <a:r>
+              <a:rPr lang="en-US" sz="1700">
+                <a:solidFill>
+                  <a:srgbClr val="1C1C1E"/>
+                </a:solidFill>
+                <a:latin typeface="Quattrocento Sans" pitchFamily="34" charset="0"/>
+                <a:ea typeface="Quattrocento Sans" pitchFamily="34" charset="-122"/>
+                <a:cs typeface="Quattrocento Sans" pitchFamily="34" charset="-120"/>
+              </a:rPr>
+              <a:t>??</a:t>
             </a:r>
             <a:endParaRPr lang="en-US" sz="1700" dirty="0"/>
           </a:p>
@@ -9889,7 +9725,7 @@
               </a:lnSpc>
             </a:pPr>
             <a:r>
-              <a:rPr lang="en-US" sz="1300" spc="200" kern="0" dirty="0">
+              <a:rPr lang="en-US" sz="1300" kern="0" spc="200" dirty="0">
                 <a:solidFill>
                   <a:srgbClr val="D4943A"/>
                 </a:solidFill>
@@ -9924,6 +9760,13 @@
           </a:solidFill>
           <a:ln/>
         </p:spPr>
+        <p:txBody>
+          <a:bodyPr/>
+          <a:lstStyle/>
+          <a:p>
+            <a:endParaRPr lang="en-US"/>
+          </a:p>
+        </p:txBody>
       </p:sp>
       <p:sp>
         <p:nvSpPr>
@@ -10120,6 +9963,13 @@
           </a:solidFill>
           <a:ln/>
         </p:spPr>
+        <p:txBody>
+          <a:bodyPr/>
+          <a:lstStyle/>
+          <a:p>
+            <a:endParaRPr lang="en-US"/>
+          </a:p>
+        </p:txBody>
       </p:sp>
       <p:sp>
         <p:nvSpPr>
@@ -10224,6 +10074,13 @@
           </a:solidFill>
           <a:ln/>
         </p:spPr>
+        <p:txBody>
+          <a:bodyPr/>
+          <a:lstStyle/>
+          <a:p>
+            <a:endParaRPr lang="en-US"/>
+          </a:p>
+        </p:txBody>
       </p:sp>
       <p:sp>
         <p:nvSpPr>
@@ -10364,6 +10221,13 @@
           </a:solidFill>
           <a:ln/>
         </p:spPr>
+        <p:txBody>
+          <a:bodyPr/>
+          <a:lstStyle/>
+          <a:p>
+            <a:endParaRPr lang="en-US"/>
+          </a:p>
+        </p:txBody>
       </p:sp>
       <p:sp>
         <p:nvSpPr>
@@ -10468,6 +10332,13 @@
           </a:solidFill>
           <a:ln/>
         </p:spPr>
+        <p:txBody>
+          <a:bodyPr/>
+          <a:lstStyle/>
+          <a:p>
+            <a:endParaRPr lang="en-US"/>
+          </a:p>
+        </p:txBody>
       </p:sp>
       <p:sp>
         <p:nvSpPr>
@@ -10609,6 +10480,13 @@
           </a:solidFill>
           <a:ln/>
         </p:spPr>
+        <p:txBody>
+          <a:bodyPr/>
+          <a:lstStyle/>
+          <a:p>
+            <a:endParaRPr lang="en-US"/>
+          </a:p>
+        </p:txBody>
       </p:sp>
       <p:sp>
         <p:nvSpPr>
@@ -10713,6 +10591,13 @@
           </a:solidFill>
           <a:ln/>
         </p:spPr>
+        <p:txBody>
+          <a:bodyPr/>
+          <a:lstStyle/>
+          <a:p>
+            <a:endParaRPr lang="en-US"/>
+          </a:p>
+        </p:txBody>
       </p:sp>
       <p:sp>
         <p:nvSpPr>
@@ -10817,6 +10702,13 @@
           </a:solidFill>
           <a:ln/>
         </p:spPr>
+        <p:txBody>
+          <a:bodyPr/>
+          <a:lstStyle/>
+          <a:p>
+            <a:endParaRPr lang="en-US"/>
+          </a:p>
+        </p:txBody>
       </p:sp>
       <p:sp>
         <p:nvSpPr>
@@ -10921,6 +10813,13 @@
           </a:solidFill>
           <a:ln/>
         </p:spPr>
+        <p:txBody>
+          <a:bodyPr/>
+          <a:lstStyle/>
+          <a:p>
+            <a:endParaRPr lang="en-US"/>
+          </a:p>
+        </p:txBody>
       </p:sp>
       <p:sp>
         <p:nvSpPr>
@@ -10949,7 +10848,7 @@
               </a:lnSpc>
             </a:pPr>
             <a:r>
-              <a:rPr lang="en-US" sz="1200" spc="200" kern="0" dirty="0">
+              <a:rPr lang="en-US" sz="1200" kern="0" spc="200" dirty="0">
                 <a:solidFill>
                   <a:srgbClr val="D4943A"/>
                 </a:solidFill>
@@ -11019,6 +10918,64 @@
               </a:rPr>
               <a:t>  </a:t>
             </a:r>
+            <a:r>
+              <a:rPr lang="en-US" sz="1200" dirty="0">
+                <a:solidFill>
+                  <a:srgbClr val="8A9B8C"/>
+                </a:solidFill>
+                <a:latin typeface="Quattrocento Sans" pitchFamily="34" charset="0"/>
+                <a:ea typeface="Quattrocento Sans" pitchFamily="34" charset="-122"/>
+                <a:cs typeface="Quattrocento Sans" pitchFamily="34" charset="-120"/>
+              </a:rPr>
+              <a:t>"openapi"</a:t>
+            </a:r>
+            <a:r>
+              <a:rPr lang="en-US" sz="1200" dirty="0">
+                <a:solidFill>
+                  <a:srgbClr val="D4943A"/>
+                </a:solidFill>
+                <a:latin typeface="Quattrocento Sans" pitchFamily="34" charset="0"/>
+                <a:ea typeface="Quattrocento Sans" pitchFamily="34" charset="-122"/>
+                <a:cs typeface="Quattrocento Sans" pitchFamily="34" charset="-120"/>
+              </a:rPr>
+              <a:t>:</a:t>
+            </a:r>
+            <a:r>
+              <a:rPr lang="en-US" sz="1200" dirty="0">
+                <a:solidFill>
+                  <a:srgbClr val="FFFFFF"/>
+                </a:solidFill>
+                <a:latin typeface="Quattrocento Sans" pitchFamily="34" charset="0"/>
+                <a:ea typeface="Quattrocento Sans" pitchFamily="34" charset="-122"/>
+                <a:cs typeface="Quattrocento Sans" pitchFamily="34" charset="-120"/>
+              </a:rPr>
+              <a:t> </a:t>
+            </a:r>
+            <a:r>
+              <a:rPr lang="en-US" sz="1200" dirty="0">
+                <a:solidFill>
+                  <a:srgbClr val="9EC6A0"/>
+                </a:solidFill>
+                <a:latin typeface="Quattrocento Sans" pitchFamily="34" charset="0"/>
+                <a:ea typeface="Quattrocento Sans" pitchFamily="34" charset="-122"/>
+                <a:cs typeface="Quattrocento Sans" pitchFamily="34" charset="-120"/>
+              </a:rPr>
+              <a:t>"3.0.0"</a:t>
+            </a:r>
+            <a:r>
+              <a:rPr lang="en-US" sz="1200" dirty="0">
+                <a:solidFill>
+                  <a:srgbClr val="D4943A"/>
+                </a:solidFill>
+                <a:latin typeface="Quattrocento Sans" pitchFamily="34" charset="0"/>
+                <a:ea typeface="Quattrocento Sans" pitchFamily="34" charset="-122"/>
+                <a:cs typeface="Quattrocento Sans" pitchFamily="34" charset="-120"/>
+              </a:rPr>
+              <a:t>,</a:t>
+            </a:r>
+            <a:endParaRPr lang="en-US" sz="1200" dirty="0"/>
+          </a:p>
+          <a:p>
             <a:pPr algn="l">
               <a:lnSpc>
                 <a:spcPct val="150000"/>
@@ -11027,14 +10984,39 @@
             <a:r>
               <a:rPr lang="en-US" sz="1200" dirty="0">
                 <a:solidFill>
+                  <a:srgbClr val="FFFFFF"/>
+                </a:solidFill>
+                <a:latin typeface="Quattrocento Sans" pitchFamily="34" charset="0"/>
+                <a:ea typeface="Quattrocento Sans" pitchFamily="34" charset="-122"/>
+                <a:cs typeface="Quattrocento Sans" pitchFamily="34" charset="-120"/>
+              </a:rPr>
+              <a:t>  </a:t>
+            </a:r>
+            <a:r>
+              <a:rPr lang="en-US" sz="1200" dirty="0">
+                <a:solidFill>
                   <a:srgbClr val="8A9B8C"/>
                 </a:solidFill>
                 <a:latin typeface="Quattrocento Sans" pitchFamily="34" charset="0"/>
                 <a:ea typeface="Quattrocento Sans" pitchFamily="34" charset="-122"/>
                 <a:cs typeface="Quattrocento Sans" pitchFamily="34" charset="-120"/>
               </a:rPr>
-              <a:t>"openapi"</a:t>
-            </a:r>
+              <a:t>"info"</a:t>
+            </a:r>
+            <a:r>
+              <a:rPr lang="en-US" sz="1200" dirty="0">
+                <a:solidFill>
+                  <a:srgbClr val="D4943A"/>
+                </a:solidFill>
+                <a:latin typeface="Quattrocento Sans" pitchFamily="34" charset="0"/>
+                <a:ea typeface="Quattrocento Sans" pitchFamily="34" charset="-122"/>
+                <a:cs typeface="Quattrocento Sans" pitchFamily="34" charset="-120"/>
+              </a:rPr>
+              <a:t>: {</a:t>
+            </a:r>
+            <a:endParaRPr lang="en-US" sz="1200" dirty="0"/>
+          </a:p>
+          <a:p>
             <a:pPr algn="l">
               <a:lnSpc>
                 <a:spcPct val="150000"/>
@@ -11043,6 +11025,28 @@
             <a:r>
               <a:rPr lang="en-US" sz="1200" dirty="0">
                 <a:solidFill>
+                  <a:srgbClr val="FFFFFF"/>
+                </a:solidFill>
+                <a:latin typeface="Quattrocento Sans" pitchFamily="34" charset="0"/>
+                <a:ea typeface="Quattrocento Sans" pitchFamily="34" charset="-122"/>
+                <a:cs typeface="Quattrocento Sans" pitchFamily="34" charset="-120"/>
+              </a:rPr>
+              <a:t>    </a:t>
+            </a:r>
+            <a:r>
+              <a:rPr lang="en-US" sz="1200" dirty="0">
+                <a:solidFill>
+                  <a:srgbClr val="8A9B8C"/>
+                </a:solidFill>
+                <a:latin typeface="Quattrocento Sans" pitchFamily="34" charset="0"/>
+                <a:ea typeface="Quattrocento Sans" pitchFamily="34" charset="-122"/>
+                <a:cs typeface="Quattrocento Sans" pitchFamily="34" charset="-120"/>
+              </a:rPr>
+              <a:t>"title"</a:t>
+            </a:r>
+            <a:r>
+              <a:rPr lang="en-US" sz="1200" dirty="0">
+                <a:solidFill>
                   <a:srgbClr val="D4943A"/>
                 </a:solidFill>
                 <a:latin typeface="Quattrocento Sans" pitchFamily="34" charset="0"/>
@@ -11051,6 +11055,42 @@
               </a:rPr>
               <a:t>:</a:t>
             </a:r>
+            <a:r>
+              <a:rPr lang="en-US" sz="1200" dirty="0">
+                <a:solidFill>
+                  <a:srgbClr val="FFFFFF"/>
+                </a:solidFill>
+                <a:latin typeface="Quattrocento Sans" pitchFamily="34" charset="0"/>
+                <a:ea typeface="Quattrocento Sans" pitchFamily="34" charset="-122"/>
+                <a:cs typeface="Quattrocento Sans" pitchFamily="34" charset="-120"/>
+              </a:rPr>
+              <a:t> </a:t>
+            </a:r>
+            <a:r>
+              <a:rPr lang="en-US" sz="1200" dirty="0">
+                <a:solidFill>
+                  <a:srgbClr val="9EC6A0"/>
+                </a:solidFill>
+                <a:latin typeface="Quattrocento Sans" pitchFamily="34" charset="0"/>
+                <a:ea typeface="Quattrocento Sans" pitchFamily="34" charset="-122"/>
+                <a:cs typeface="Quattrocento Sans" pitchFamily="34" charset="-120"/>
+              </a:rPr>
+              <a:t>"User API"</a:t>
+            </a:r>
+            <a:r>
+              <a:rPr lang="en-US" sz="1200" dirty="0">
+                <a:solidFill>
+                  <a:srgbClr val="D4943A"/>
+                </a:solidFill>
+                <a:latin typeface="Quattrocento Sans" pitchFamily="34" charset="0"/>
+                <a:ea typeface="Quattrocento Sans" pitchFamily="34" charset="-122"/>
+                <a:cs typeface="Quattrocento Sans" pitchFamily="34" charset="-120"/>
+              </a:rPr>
+              <a:t>,</a:t>
+            </a:r>
+            <a:endParaRPr lang="en-US" sz="1200" dirty="0"/>
+          </a:p>
+          <a:p>
             <a:pPr algn="l">
               <a:lnSpc>
                 <a:spcPct val="150000"/>
@@ -11065,8 +11105,55 @@
                 <a:ea typeface="Quattrocento Sans" pitchFamily="34" charset="-122"/>
                 <a:cs typeface="Quattrocento Sans" pitchFamily="34" charset="-120"/>
               </a:rPr>
+              <a:t>    </a:t>
+            </a:r>
+            <a:r>
+              <a:rPr lang="en-US" sz="1200" dirty="0">
+                <a:solidFill>
+                  <a:srgbClr val="8A9B8C"/>
+                </a:solidFill>
+                <a:latin typeface="Quattrocento Sans" pitchFamily="34" charset="0"/>
+                <a:ea typeface="Quattrocento Sans" pitchFamily="34" charset="-122"/>
+                <a:cs typeface="Quattrocento Sans" pitchFamily="34" charset="-120"/>
+              </a:rPr>
+              <a:t>"version"</a:t>
+            </a:r>
+            <a:r>
+              <a:rPr lang="en-US" sz="1200" dirty="0">
+                <a:solidFill>
+                  <a:srgbClr val="D4943A"/>
+                </a:solidFill>
+                <a:latin typeface="Quattrocento Sans" pitchFamily="34" charset="0"/>
+                <a:ea typeface="Quattrocento Sans" pitchFamily="34" charset="-122"/>
+                <a:cs typeface="Quattrocento Sans" pitchFamily="34" charset="-120"/>
+              </a:rPr>
+              <a:t>:</a:t>
+            </a:r>
+            <a:r>
+              <a:rPr lang="en-US" sz="1200" dirty="0">
+                <a:solidFill>
+                  <a:srgbClr val="FFFFFF"/>
+                </a:solidFill>
+                <a:latin typeface="Quattrocento Sans" pitchFamily="34" charset="0"/>
+                <a:ea typeface="Quattrocento Sans" pitchFamily="34" charset="-122"/>
+                <a:cs typeface="Quattrocento Sans" pitchFamily="34" charset="-120"/>
+              </a:rPr>
               <a:t> </a:t>
             </a:r>
+            <a:r>
+              <a:rPr lang="en-US" sz="1200" dirty="0">
+                <a:solidFill>
+                  <a:srgbClr val="9EC6A0"/>
+                </a:solidFill>
+                <a:latin typeface="Quattrocento Sans" pitchFamily="34" charset="0"/>
+                <a:ea typeface="Quattrocento Sans" pitchFamily="34" charset="-122"/>
+                <a:cs typeface="Quattrocento Sans" pitchFamily="34" charset="-120"/>
+              </a:rPr>
+              <a:t>"1.0.0"</a:t>
+            </a:r>
+            <a:endParaRPr lang="en-US" sz="1200" dirty="0"/>
+          </a:p>
+          <a:p>
             <a:pPr algn="l">
               <a:lnSpc>
                 <a:spcPct val="150000"/>
@@ -11075,14 +11162,28 @@
             <a:r>
               <a:rPr lang="en-US" sz="1200" dirty="0">
                 <a:solidFill>
-                  <a:srgbClr val="9EC6A0"/>
-                </a:solidFill>
-                <a:latin typeface="Quattrocento Sans" pitchFamily="34" charset="0"/>
-                <a:ea typeface="Quattrocento Sans" pitchFamily="34" charset="-122"/>
-                <a:cs typeface="Quattrocento Sans" pitchFamily="34" charset="-120"/>
-              </a:rPr>
-              <a:t>"3.0.0"</a:t>
-            </a:r>
+                  <a:srgbClr val="FFFFFF"/>
+                </a:solidFill>
+                <a:latin typeface="Quattrocento Sans" pitchFamily="34" charset="0"/>
+                <a:ea typeface="Quattrocento Sans" pitchFamily="34" charset="-122"/>
+                <a:cs typeface="Quattrocento Sans" pitchFamily="34" charset="-120"/>
+              </a:rPr>
+              <a:t>  </a:t>
+            </a:r>
+            <a:r>
+              <a:rPr lang="en-US" sz="1200" dirty="0">
+                <a:solidFill>
+                  <a:srgbClr val="D4943A"/>
+                </a:solidFill>
+                <a:latin typeface="Quattrocento Sans" pitchFamily="34" charset="0"/>
+                <a:ea typeface="Quattrocento Sans" pitchFamily="34" charset="-122"/>
+                <a:cs typeface="Quattrocento Sans" pitchFamily="34" charset="-120"/>
+              </a:rPr>
+              <a:t>},</a:t>
+            </a:r>
+            <a:endParaRPr lang="en-US" sz="1200" dirty="0"/>
+          </a:p>
+          <a:p>
             <a:pPr algn="l">
               <a:lnSpc>
                 <a:spcPct val="150000"/>
@@ -11091,13 +11192,35 @@
             <a:r>
               <a:rPr lang="en-US" sz="1200" dirty="0">
                 <a:solidFill>
+                  <a:srgbClr val="FFFFFF"/>
+                </a:solidFill>
+                <a:latin typeface="Quattrocento Sans" pitchFamily="34" charset="0"/>
+                <a:ea typeface="Quattrocento Sans" pitchFamily="34" charset="-122"/>
+                <a:cs typeface="Quattrocento Sans" pitchFamily="34" charset="-120"/>
+              </a:rPr>
+              <a:t>  </a:t>
+            </a:r>
+            <a:r>
+              <a:rPr lang="en-US" sz="1200" dirty="0">
+                <a:solidFill>
+                  <a:srgbClr val="8A9B8C"/>
+                </a:solidFill>
+                <a:latin typeface="Quattrocento Sans" pitchFamily="34" charset="0"/>
+                <a:ea typeface="Quattrocento Sans" pitchFamily="34" charset="-122"/>
+                <a:cs typeface="Quattrocento Sans" pitchFamily="34" charset="-120"/>
+              </a:rPr>
+              <a:t>"paths"</a:t>
+            </a:r>
+            <a:r>
+              <a:rPr lang="en-US" sz="1200" dirty="0">
+                <a:solidFill>
                   <a:srgbClr val="D4943A"/>
                 </a:solidFill>
                 <a:latin typeface="Quattrocento Sans" pitchFamily="34" charset="0"/>
                 <a:ea typeface="Quattrocento Sans" pitchFamily="34" charset="-122"/>
                 <a:cs typeface="Quattrocento Sans" pitchFamily="34" charset="-120"/>
               </a:rPr>
-              <a:t>,</a:t>
+              <a:t>: {</a:t>
             </a:r>
             <a:endParaRPr lang="en-US" sz="1200" dirty="0"/>
           </a:p>
@@ -11116,8 +11239,33 @@
                 <a:ea typeface="Quattrocento Sans" pitchFamily="34" charset="-122"/>
                 <a:cs typeface="Quattrocento Sans" pitchFamily="34" charset="-120"/>
               </a:rPr>
-              <a:t>  </a:t>
-            </a:r>
+              <a:t>    </a:t>
+            </a:r>
+            <a:r>
+              <a:rPr lang="en-US" sz="1200" dirty="0">
+                <a:solidFill>
+                  <a:srgbClr val="9EC6A0"/>
+                </a:solidFill>
+                <a:latin typeface="Quattrocento Sans" pitchFamily="34" charset="0"/>
+                <a:ea typeface="Quattrocento Sans" pitchFamily="34" charset="-122"/>
+                <a:cs typeface="Quattrocento Sans" pitchFamily="34" charset="-120"/>
+              </a:rPr>
+              <a:t>"/api/users"</a:t>
+            </a:r>
+            <a:r>
+              <a:rPr lang="en-US" sz="1200" dirty="0">
+                <a:solidFill>
+                  <a:srgbClr val="D4943A"/>
+                </a:solidFill>
+                <a:latin typeface="Quattrocento Sans" pitchFamily="34" charset="0"/>
+                <a:ea typeface="Quattrocento Sans" pitchFamily="34" charset="-122"/>
+                <a:cs typeface="Quattrocento Sans" pitchFamily="34" charset="-120"/>
+              </a:rPr>
+              <a:t>: { ... }</a:t>
+            </a:r>
+            <a:endParaRPr lang="en-US" sz="1200" dirty="0"/>
+          </a:p>
+          <a:p>
             <a:pPr algn="l">
               <a:lnSpc>
                 <a:spcPct val="150000"/>
@@ -11126,14 +11274,28 @@
             <a:r>
               <a:rPr lang="en-US" sz="1200" dirty="0">
                 <a:solidFill>
-                  <a:srgbClr val="8A9B8C"/>
-                </a:solidFill>
-                <a:latin typeface="Quattrocento Sans" pitchFamily="34" charset="0"/>
-                <a:ea typeface="Quattrocento Sans" pitchFamily="34" charset="-122"/>
-                <a:cs typeface="Quattrocento Sans" pitchFamily="34" charset="-120"/>
-              </a:rPr>
-              <a:t>"info"</a:t>
-            </a:r>
+                  <a:srgbClr val="FFFFFF"/>
+                </a:solidFill>
+                <a:latin typeface="Quattrocento Sans" pitchFamily="34" charset="0"/>
+                <a:ea typeface="Quattrocento Sans" pitchFamily="34" charset="-122"/>
+                <a:cs typeface="Quattrocento Sans" pitchFamily="34" charset="-120"/>
+              </a:rPr>
+              <a:t>  </a:t>
+            </a:r>
+            <a:r>
+              <a:rPr lang="en-US" sz="1200" dirty="0">
+                <a:solidFill>
+                  <a:srgbClr val="D4943A"/>
+                </a:solidFill>
+                <a:latin typeface="Quattrocento Sans" pitchFamily="34" charset="0"/>
+                <a:ea typeface="Quattrocento Sans" pitchFamily="34" charset="-122"/>
+                <a:cs typeface="Quattrocento Sans" pitchFamily="34" charset="-120"/>
+              </a:rPr>
+              <a:t>}</a:t>
+            </a:r>
+            <a:endParaRPr lang="en-US" sz="1200" dirty="0"/>
+          </a:p>
+          <a:p>
             <a:pPr algn="l">
               <a:lnSpc>
                 <a:spcPct val="150000"/>
@@ -11148,379 +11310,6 @@
                 <a:ea typeface="Quattrocento Sans" pitchFamily="34" charset="-122"/>
                 <a:cs typeface="Quattrocento Sans" pitchFamily="34" charset="-120"/>
               </a:rPr>
-              <a:t>: {</a:t>
-            </a:r>
-            <a:endParaRPr lang="en-US" sz="1200" dirty="0"/>
-          </a:p>
-          <a:p>
-            <a:pPr algn="l">
-              <a:lnSpc>
-                <a:spcPct val="150000"/>
-              </a:lnSpc>
-            </a:pPr>
-            <a:r>
-              <a:rPr lang="en-US" sz="1200" dirty="0">
-                <a:solidFill>
-                  <a:srgbClr val="FFFFFF"/>
-                </a:solidFill>
-                <a:latin typeface="Quattrocento Sans" pitchFamily="34" charset="0"/>
-                <a:ea typeface="Quattrocento Sans" pitchFamily="34" charset="-122"/>
-                <a:cs typeface="Quattrocento Sans" pitchFamily="34" charset="-120"/>
-              </a:rPr>
-              <a:t>    </a:t>
-            </a:r>
-            <a:pPr algn="l">
-              <a:lnSpc>
-                <a:spcPct val="150000"/>
-              </a:lnSpc>
-            </a:pPr>
-            <a:r>
-              <a:rPr lang="en-US" sz="1200" dirty="0">
-                <a:solidFill>
-                  <a:srgbClr val="8A9B8C"/>
-                </a:solidFill>
-                <a:latin typeface="Quattrocento Sans" pitchFamily="34" charset="0"/>
-                <a:ea typeface="Quattrocento Sans" pitchFamily="34" charset="-122"/>
-                <a:cs typeface="Quattrocento Sans" pitchFamily="34" charset="-120"/>
-              </a:rPr>
-              <a:t>"title"</a:t>
-            </a:r>
-            <a:pPr algn="l">
-              <a:lnSpc>
-                <a:spcPct val="150000"/>
-              </a:lnSpc>
-            </a:pPr>
-            <a:r>
-              <a:rPr lang="en-US" sz="1200" dirty="0">
-                <a:solidFill>
-                  <a:srgbClr val="D4943A"/>
-                </a:solidFill>
-                <a:latin typeface="Quattrocento Sans" pitchFamily="34" charset="0"/>
-                <a:ea typeface="Quattrocento Sans" pitchFamily="34" charset="-122"/>
-                <a:cs typeface="Quattrocento Sans" pitchFamily="34" charset="-120"/>
-              </a:rPr>
-              <a:t>:</a:t>
-            </a:r>
-            <a:pPr algn="l">
-              <a:lnSpc>
-                <a:spcPct val="150000"/>
-              </a:lnSpc>
-            </a:pPr>
-            <a:r>
-              <a:rPr lang="en-US" sz="1200" dirty="0">
-                <a:solidFill>
-                  <a:srgbClr val="FFFFFF"/>
-                </a:solidFill>
-                <a:latin typeface="Quattrocento Sans" pitchFamily="34" charset="0"/>
-                <a:ea typeface="Quattrocento Sans" pitchFamily="34" charset="-122"/>
-                <a:cs typeface="Quattrocento Sans" pitchFamily="34" charset="-120"/>
-              </a:rPr>
-              <a:t> </a:t>
-            </a:r>
-            <a:pPr algn="l">
-              <a:lnSpc>
-                <a:spcPct val="150000"/>
-              </a:lnSpc>
-            </a:pPr>
-            <a:r>
-              <a:rPr lang="en-US" sz="1200" dirty="0">
-                <a:solidFill>
-                  <a:srgbClr val="9EC6A0"/>
-                </a:solidFill>
-                <a:latin typeface="Quattrocento Sans" pitchFamily="34" charset="0"/>
-                <a:ea typeface="Quattrocento Sans" pitchFamily="34" charset="-122"/>
-                <a:cs typeface="Quattrocento Sans" pitchFamily="34" charset="-120"/>
-              </a:rPr>
-              <a:t>"User API"</a:t>
-            </a:r>
-            <a:pPr algn="l">
-              <a:lnSpc>
-                <a:spcPct val="150000"/>
-              </a:lnSpc>
-            </a:pPr>
-            <a:r>
-              <a:rPr lang="en-US" sz="1200" dirty="0">
-                <a:solidFill>
-                  <a:srgbClr val="D4943A"/>
-                </a:solidFill>
-                <a:latin typeface="Quattrocento Sans" pitchFamily="34" charset="0"/>
-                <a:ea typeface="Quattrocento Sans" pitchFamily="34" charset="-122"/>
-                <a:cs typeface="Quattrocento Sans" pitchFamily="34" charset="-120"/>
-              </a:rPr>
-              <a:t>,</a:t>
-            </a:r>
-            <a:endParaRPr lang="en-US" sz="1200" dirty="0"/>
-          </a:p>
-          <a:p>
-            <a:pPr algn="l">
-              <a:lnSpc>
-                <a:spcPct val="150000"/>
-              </a:lnSpc>
-            </a:pPr>
-            <a:r>
-              <a:rPr lang="en-US" sz="1200" dirty="0">
-                <a:solidFill>
-                  <a:srgbClr val="FFFFFF"/>
-                </a:solidFill>
-                <a:latin typeface="Quattrocento Sans" pitchFamily="34" charset="0"/>
-                <a:ea typeface="Quattrocento Sans" pitchFamily="34" charset="-122"/>
-                <a:cs typeface="Quattrocento Sans" pitchFamily="34" charset="-120"/>
-              </a:rPr>
-              <a:t>    </a:t>
-            </a:r>
-            <a:pPr algn="l">
-              <a:lnSpc>
-                <a:spcPct val="150000"/>
-              </a:lnSpc>
-            </a:pPr>
-            <a:r>
-              <a:rPr lang="en-US" sz="1200" dirty="0">
-                <a:solidFill>
-                  <a:srgbClr val="8A9B8C"/>
-                </a:solidFill>
-                <a:latin typeface="Quattrocento Sans" pitchFamily="34" charset="0"/>
-                <a:ea typeface="Quattrocento Sans" pitchFamily="34" charset="-122"/>
-                <a:cs typeface="Quattrocento Sans" pitchFamily="34" charset="-120"/>
-              </a:rPr>
-              <a:t>"version"</a:t>
-            </a:r>
-            <a:pPr algn="l">
-              <a:lnSpc>
-                <a:spcPct val="150000"/>
-              </a:lnSpc>
-            </a:pPr>
-            <a:r>
-              <a:rPr lang="en-US" sz="1200" dirty="0">
-                <a:solidFill>
-                  <a:srgbClr val="D4943A"/>
-                </a:solidFill>
-                <a:latin typeface="Quattrocento Sans" pitchFamily="34" charset="0"/>
-                <a:ea typeface="Quattrocento Sans" pitchFamily="34" charset="-122"/>
-                <a:cs typeface="Quattrocento Sans" pitchFamily="34" charset="-120"/>
-              </a:rPr>
-              <a:t>:</a:t>
-            </a:r>
-            <a:pPr algn="l">
-              <a:lnSpc>
-                <a:spcPct val="150000"/>
-              </a:lnSpc>
-            </a:pPr>
-            <a:r>
-              <a:rPr lang="en-US" sz="1200" dirty="0">
-                <a:solidFill>
-                  <a:srgbClr val="FFFFFF"/>
-                </a:solidFill>
-                <a:latin typeface="Quattrocento Sans" pitchFamily="34" charset="0"/>
-                <a:ea typeface="Quattrocento Sans" pitchFamily="34" charset="-122"/>
-                <a:cs typeface="Quattrocento Sans" pitchFamily="34" charset="-120"/>
-              </a:rPr>
-              <a:t> </a:t>
-            </a:r>
-            <a:pPr algn="l">
-              <a:lnSpc>
-                <a:spcPct val="150000"/>
-              </a:lnSpc>
-            </a:pPr>
-            <a:r>
-              <a:rPr lang="en-US" sz="1200" dirty="0">
-                <a:solidFill>
-                  <a:srgbClr val="9EC6A0"/>
-                </a:solidFill>
-                <a:latin typeface="Quattrocento Sans" pitchFamily="34" charset="0"/>
-                <a:ea typeface="Quattrocento Sans" pitchFamily="34" charset="-122"/>
-                <a:cs typeface="Quattrocento Sans" pitchFamily="34" charset="-120"/>
-              </a:rPr>
-              <a:t>"1.0.0"</a:t>
-            </a:r>
-            <a:endParaRPr lang="en-US" sz="1200" dirty="0"/>
-          </a:p>
-          <a:p>
-            <a:pPr algn="l">
-              <a:lnSpc>
-                <a:spcPct val="150000"/>
-              </a:lnSpc>
-            </a:pPr>
-            <a:r>
-              <a:rPr lang="en-US" sz="1200" dirty="0">
-                <a:solidFill>
-                  <a:srgbClr val="FFFFFF"/>
-                </a:solidFill>
-                <a:latin typeface="Quattrocento Sans" pitchFamily="34" charset="0"/>
-                <a:ea typeface="Quattrocento Sans" pitchFamily="34" charset="-122"/>
-                <a:cs typeface="Quattrocento Sans" pitchFamily="34" charset="-120"/>
-              </a:rPr>
-              <a:t>  </a:t>
-            </a:r>
-            <a:pPr algn="l">
-              <a:lnSpc>
-                <a:spcPct val="150000"/>
-              </a:lnSpc>
-            </a:pPr>
-            <a:r>
-              <a:rPr lang="en-US" sz="1200" dirty="0">
-                <a:solidFill>
-                  <a:srgbClr val="D4943A"/>
-                </a:solidFill>
-                <a:latin typeface="Quattrocento Sans" pitchFamily="34" charset="0"/>
-                <a:ea typeface="Quattrocento Sans" pitchFamily="34" charset="-122"/>
-                <a:cs typeface="Quattrocento Sans" pitchFamily="34" charset="-120"/>
-              </a:rPr>
-              <a:t>},</a:t>
-            </a:r>
-            <a:endParaRPr lang="en-US" sz="1200" dirty="0"/>
-          </a:p>
-          <a:p>
-            <a:pPr algn="l">
-              <a:lnSpc>
-                <a:spcPct val="150000"/>
-              </a:lnSpc>
-            </a:pPr>
-            <a:r>
-              <a:rPr lang="en-US" sz="1200" dirty="0">
-                <a:solidFill>
-                  <a:srgbClr val="FFFFFF"/>
-                </a:solidFill>
-                <a:latin typeface="Quattrocento Sans" pitchFamily="34" charset="0"/>
-                <a:ea typeface="Quattrocento Sans" pitchFamily="34" charset="-122"/>
-                <a:cs typeface="Quattrocento Sans" pitchFamily="34" charset="-120"/>
-              </a:rPr>
-              <a:t>  </a:t>
-            </a:r>
-            <a:pPr algn="l">
-              <a:lnSpc>
-                <a:spcPct val="150000"/>
-              </a:lnSpc>
-            </a:pPr>
-            <a:r>
-              <a:rPr lang="en-US" sz="1200" dirty="0">
-                <a:solidFill>
-                  <a:srgbClr val="8A9B8C"/>
-                </a:solidFill>
-                <a:latin typeface="Quattrocento Sans" pitchFamily="34" charset="0"/>
-                <a:ea typeface="Quattrocento Sans" pitchFamily="34" charset="-122"/>
-                <a:cs typeface="Quattrocento Sans" pitchFamily="34" charset="-120"/>
-              </a:rPr>
-              <a:t>"paths"</a:t>
-            </a:r>
-            <a:pPr algn="l">
-              <a:lnSpc>
-                <a:spcPct val="150000"/>
-              </a:lnSpc>
-            </a:pPr>
-            <a:r>
-              <a:rPr lang="en-US" sz="1200" dirty="0">
-                <a:solidFill>
-                  <a:srgbClr val="D4943A"/>
-                </a:solidFill>
-                <a:latin typeface="Quattrocento Sans" pitchFamily="34" charset="0"/>
-                <a:ea typeface="Quattrocento Sans" pitchFamily="34" charset="-122"/>
-                <a:cs typeface="Quattrocento Sans" pitchFamily="34" charset="-120"/>
-              </a:rPr>
-              <a:t>: {</a:t>
-            </a:r>
-            <a:endParaRPr lang="en-US" sz="1200" dirty="0"/>
-          </a:p>
-          <a:p>
-            <a:pPr algn="l">
-              <a:lnSpc>
-                <a:spcPct val="150000"/>
-              </a:lnSpc>
-            </a:pPr>
-            <a:r>
-              <a:rPr lang="en-US" sz="1200" dirty="0">
-                <a:solidFill>
-                  <a:srgbClr val="FFFFFF"/>
-                </a:solidFill>
-                <a:latin typeface="Quattrocento Sans" pitchFamily="34" charset="0"/>
-                <a:ea typeface="Quattrocento Sans" pitchFamily="34" charset="-122"/>
-                <a:cs typeface="Quattrocento Sans" pitchFamily="34" charset="-120"/>
-              </a:rPr>
-              <a:t>    </a:t>
-            </a:r>
-            <a:pPr algn="l">
-              <a:lnSpc>
-                <a:spcPct val="150000"/>
-              </a:lnSpc>
-            </a:pPr>
-            <a:r>
-              <a:rPr lang="en-US" sz="1200" dirty="0">
-                <a:solidFill>
-                  <a:srgbClr val="9EC6A0"/>
-                </a:solidFill>
-                <a:latin typeface="Quattrocento Sans" pitchFamily="34" charset="0"/>
-                <a:ea typeface="Quattrocento Sans" pitchFamily="34" charset="-122"/>
-                <a:cs typeface="Quattrocento Sans" pitchFamily="34" charset="-120"/>
-              </a:rPr>
-              <a:t>"/api/users"</a:t>
-            </a:r>
-            <a:pPr algn="l">
-              <a:lnSpc>
-                <a:spcPct val="150000"/>
-              </a:lnSpc>
-            </a:pPr>
-            <a:r>
-              <a:rPr lang="en-US" sz="1200" dirty="0">
-                <a:solidFill>
-                  <a:srgbClr val="D4943A"/>
-                </a:solidFill>
-                <a:latin typeface="Quattrocento Sans" pitchFamily="34" charset="0"/>
-                <a:ea typeface="Quattrocento Sans" pitchFamily="34" charset="-122"/>
-                <a:cs typeface="Quattrocento Sans" pitchFamily="34" charset="-120"/>
-              </a:rPr>
-              <a:t>: { ... }</a:t>
-            </a:r>
-            <a:endParaRPr lang="en-US" sz="1200" dirty="0"/>
-          </a:p>
-          <a:p>
-            <a:pPr algn="l">
-              <a:lnSpc>
-                <a:spcPct val="150000"/>
-              </a:lnSpc>
-            </a:pPr>
-            <a:r>
-              <a:rPr lang="en-US" sz="1200" dirty="0">
-                <a:solidFill>
-                  <a:srgbClr val="FFFFFF"/>
-                </a:solidFill>
-                <a:latin typeface="Quattrocento Sans" pitchFamily="34" charset="0"/>
-                <a:ea typeface="Quattrocento Sans" pitchFamily="34" charset="-122"/>
-                <a:cs typeface="Quattrocento Sans" pitchFamily="34" charset="-120"/>
-              </a:rPr>
-              <a:t>  </a:t>
-            </a:r>
-            <a:pPr algn="l">
-              <a:lnSpc>
-                <a:spcPct val="150000"/>
-              </a:lnSpc>
-            </a:pPr>
-            <a:r>
-              <a:rPr lang="en-US" sz="1200" dirty="0">
-                <a:solidFill>
-                  <a:srgbClr val="D4943A"/>
-                </a:solidFill>
-                <a:latin typeface="Quattrocento Sans" pitchFamily="34" charset="0"/>
-                <a:ea typeface="Quattrocento Sans" pitchFamily="34" charset="-122"/>
-                <a:cs typeface="Quattrocento Sans" pitchFamily="34" charset="-120"/>
-              </a:rPr>
-              <a:t>}</a:t>
-            </a:r>
-            <a:endParaRPr lang="en-US" sz="1200" dirty="0"/>
-          </a:p>
-          <a:p>
-            <a:pPr algn="l">
-              <a:lnSpc>
-                <a:spcPct val="150000"/>
-              </a:lnSpc>
-            </a:pPr>
-            <a:r>
-              <a:rPr lang="en-US" sz="1200" dirty="0">
-                <a:solidFill>
-                  <a:srgbClr val="D4943A"/>
-                </a:solidFill>
-                <a:latin typeface="Quattrocento Sans" pitchFamily="34" charset="0"/>
-                <a:ea typeface="Quattrocento Sans" pitchFamily="34" charset="-122"/>
-                <a:cs typeface="Quattrocento Sans" pitchFamily="34" charset="-120"/>
-              </a:rPr>
               <a:t>}</a:t>
             </a:r>
             <a:endParaRPr lang="en-US" sz="1200" dirty="0"/>
@@ -11554,7 +11343,7 @@
               </a:lnSpc>
             </a:pPr>
             <a:r>
-              <a:rPr lang="en-US" sz="1300" spc="200" kern="0" dirty="0">
+              <a:rPr lang="en-US" sz="1300" kern="0" spc="200" dirty="0">
                 <a:solidFill>
                   <a:srgbClr val="D4943A"/>
                 </a:solidFill>
@@ -11605,11 +11394,6 @@
               </a:rPr>
               <a:t>Standardized docs </a:t>
             </a:r>
-            <a:pPr algn="l">
-              <a:lnSpc>
-                <a:spcPct val="160000"/>
-              </a:lnSpc>
-            </a:pPr>
             <a:r>
               <a:rPr lang="en-US" sz="1600" dirty="0">
                 <a:solidFill>
@@ -11621,11 +11405,6 @@
               </a:rPr>
               <a:t>+</a:t>
             </a:r>
-            <a:pPr algn="l">
-              <a:lnSpc>
-                <a:spcPct val="160000"/>
-              </a:lnSpc>
-            </a:pPr>
             <a:r>
               <a:rPr lang="en-US" sz="1600" dirty="0">
                 <a:solidFill>
@@ -11637,11 +11416,6 @@
               </a:rPr>
               <a:t> Better developer experience </a:t>
             </a:r>
-            <a:pPr algn="l">
-              <a:lnSpc>
-                <a:spcPct val="160000"/>
-              </a:lnSpc>
-            </a:pPr>
             <a:r>
               <a:rPr lang="en-US" sz="1600" dirty="0">
                 <a:solidFill>
@@ -11653,11 +11427,6 @@
               </a:rPr>
               <a:t>+</a:t>
             </a:r>
-            <a:pPr algn="l">
-              <a:lnSpc>
-                <a:spcPct val="160000"/>
-              </a:lnSpc>
-            </a:pPr>
             <a:r>
               <a:rPr lang="en-US" sz="1600" dirty="0">
                 <a:solidFill>
@@ -11669,11 +11438,6 @@
               </a:rPr>
               <a:t> Reduced dev time </a:t>
             </a:r>
-            <a:pPr algn="l">
-              <a:lnSpc>
-                <a:spcPct val="160000"/>
-              </a:lnSpc>
-            </a:pPr>
             <a:r>
               <a:rPr lang="en-US" sz="1600" dirty="0">
                 <a:solidFill>
@@ -11685,11 +11449,6 @@
               </a:rPr>
               <a:t>+</a:t>
             </a:r>
-            <a:pPr algn="l">
-              <a:lnSpc>
-                <a:spcPct val="160000"/>
-              </a:lnSpc>
-            </a:pPr>
             <a:r>
               <a:rPr lang="en-US" sz="1600" dirty="0">
                 <a:solidFill>
@@ -11701,11 +11460,6 @@
               </a:rPr>
               <a:t> Multi-language support </a:t>
             </a:r>
-            <a:pPr algn="l">
-              <a:lnSpc>
-                <a:spcPct val="160000"/>
-              </a:lnSpc>
-            </a:pPr>
             <a:r>
               <a:rPr lang="en-US" sz="1600" dirty="0">
                 <a:solidFill>
@@ -11717,11 +11471,6 @@
               </a:rPr>
               <a:t>+</a:t>
             </a:r>
-            <a:pPr algn="l">
-              <a:lnSpc>
-                <a:spcPct val="160000"/>
-              </a:lnSpc>
-            </a:pPr>
             <a:r>
               <a:rPr lang="en-US" sz="1600" dirty="0">
                 <a:solidFill>
@@ -11763,6 +11512,13 @@
             <a:tailEnd type="none"/>
           </a:ln>
         </p:spPr>
+        <p:txBody>
+          <a:bodyPr/>
+          <a:lstStyle/>
+          <a:p>
+            <a:endParaRPr lang="en-US"/>
+          </a:p>
+        </p:txBody>
       </p:sp>
     </p:spTree>
   </p:cSld>
@@ -11771,7 +11527,6 @@
   </p:clrMapOvr>
   <p:transition>
     <p:fade/>
-    <p:spd val="med"/>
   </p:transition>
 </p:sld>
 </file>
@@ -11784,6 +11539,7 @@
         <a:solidFill>
           <a:srgbClr val="F5F3EF"/>
         </a:solidFill>
+        <a:effectLst/>
       </p:bgPr>
     </p:bg>
     <p:spTree>
@@ -11827,7 +11583,7 @@
               </a:lnSpc>
             </a:pPr>
             <a:r>
-              <a:rPr lang="en-US" sz="1300" spc="200" kern="0" dirty="0">
+              <a:rPr lang="en-US" sz="1300" kern="0" spc="200" dirty="0">
                 <a:solidFill>
                   <a:srgbClr val="8A9B8C"/>
                 </a:solidFill>
@@ -11901,6 +11657,13 @@
           </a:solidFill>
           <a:ln/>
         </p:spPr>
+        <p:txBody>
+          <a:bodyPr/>
+          <a:lstStyle/>
+          <a:p>
+            <a:endParaRPr lang="en-US"/>
+          </a:p>
+        </p:txBody>
       </p:sp>
       <p:sp>
         <p:nvSpPr>
@@ -11929,7 +11692,7 @@
               </a:lnSpc>
             </a:pPr>
             <a:r>
-              <a:rPr lang="en-US" sz="1300" spc="200" kern="0" dirty="0">
+              <a:rPr lang="en-US" sz="1300" kern="0" spc="200" dirty="0">
                 <a:solidFill>
                   <a:srgbClr val="D4943A"/>
                 </a:solidFill>
@@ -11964,6 +11727,13 @@
           </a:solidFill>
           <a:ln/>
         </p:spPr>
+        <p:txBody>
+          <a:bodyPr/>
+          <a:lstStyle/>
+          <a:p>
+            <a:endParaRPr lang="en-US"/>
+          </a:p>
+        </p:txBody>
       </p:sp>
       <p:sp>
         <p:nvSpPr>
@@ -12175,7 +11945,7 @@
               </a:lnSpc>
             </a:pPr>
             <a:r>
-              <a:rPr lang="en-US" sz="1300" spc="200" kern="0" dirty="0">
+              <a:rPr lang="en-US" sz="1300" kern="0" spc="200" dirty="0">
                 <a:solidFill>
                   <a:srgbClr val="D4943A"/>
                 </a:solidFill>
@@ -12210,6 +11980,13 @@
           </a:solidFill>
           <a:ln/>
         </p:spPr>
+        <p:txBody>
+          <a:bodyPr/>
+          <a:lstStyle/>
+          <a:p>
+            <a:endParaRPr lang="en-US"/>
+          </a:p>
+        </p:txBody>
       </p:sp>
       <p:sp>
         <p:nvSpPr>
@@ -12421,7 +12198,7 @@
               </a:lnSpc>
             </a:pPr>
             <a:r>
-              <a:rPr lang="en-US" sz="1300" spc="200" kern="0" dirty="0">
+              <a:rPr lang="en-US" sz="1300" kern="0" spc="200" dirty="0">
                 <a:solidFill>
                   <a:srgbClr val="D4943A"/>
                 </a:solidFill>
@@ -12456,6 +12233,13 @@
           </a:solidFill>
           <a:ln/>
         </p:spPr>
+        <p:txBody>
+          <a:bodyPr/>
+          <a:lstStyle/>
+          <a:p>
+            <a:endParaRPr lang="en-US"/>
+          </a:p>
+        </p:txBody>
       </p:sp>
       <p:sp>
         <p:nvSpPr>
@@ -12663,6 +12447,13 @@
           </a:solidFill>
           <a:ln/>
         </p:spPr>
+        <p:txBody>
+          <a:bodyPr/>
+          <a:lstStyle/>
+          <a:p>
+            <a:endParaRPr lang="en-US"/>
+          </a:p>
+        </p:txBody>
       </p:sp>
       <p:sp>
         <p:nvSpPr>
@@ -12683,6 +12474,13 @@
           </a:solidFill>
           <a:ln/>
         </p:spPr>
+        <p:txBody>
+          <a:bodyPr/>
+          <a:lstStyle/>
+          <a:p>
+            <a:endParaRPr lang="en-US"/>
+          </a:p>
+        </p:txBody>
       </p:sp>
       <p:sp>
         <p:nvSpPr>
@@ -12774,6 +12572,13 @@
           </a:solidFill>
           <a:ln/>
         </p:spPr>
+        <p:txBody>
+          <a:bodyPr/>
+          <a:lstStyle/>
+          <a:p>
+            <a:endParaRPr lang="en-US"/>
+          </a:p>
+        </p:txBody>
       </p:sp>
       <p:sp>
         <p:nvSpPr>
@@ -12812,11 +12617,6 @@
               </a:rPr>
               <a:t>Security First:</a:t>
             </a:r>
-            <a:pPr algn="l">
-              <a:lnSpc>
-                <a:spcPct val="150000"/>
-              </a:lnSpc>
-            </a:pPr>
             <a:r>
               <a:rPr lang="en-US" sz="1600" dirty="0">
                 <a:solidFill>
@@ -12858,6 +12658,13 @@
             <a:tailEnd type="none"/>
           </a:ln>
         </p:spPr>
+        <p:txBody>
+          <a:bodyPr/>
+          <a:lstStyle/>
+          <a:p>
+            <a:endParaRPr lang="en-US"/>
+          </a:p>
+        </p:txBody>
       </p:sp>
     </p:spTree>
   </p:cSld>
@@ -12866,7 +12673,6 @@
   </p:clrMapOvr>
   <p:transition>
     <p:fade/>
-    <p:spd val="med"/>
   </p:transition>
 </p:sld>
 </file>
@@ -12879,6 +12685,7 @@
         <a:solidFill>
           <a:srgbClr val="F5F3EF"/>
         </a:solidFill>
+        <a:effectLst/>
       </p:bgPr>
     </p:bg>
     <p:spTree>
@@ -12922,7 +12729,7 @@
               </a:lnSpc>
             </a:pPr>
             <a:r>
-              <a:rPr lang="en-US" sz="1300" spc="200" kern="0" dirty="0">
+              <a:rPr lang="en-US" sz="1300" kern="0" spc="200" dirty="0">
                 <a:solidFill>
                   <a:srgbClr val="8A9B8C"/>
                 </a:solidFill>
@@ -12996,6 +12803,13 @@
           </a:solidFill>
           <a:ln/>
         </p:spPr>
+        <p:txBody>
+          <a:bodyPr/>
+          <a:lstStyle/>
+          <a:p>
+            <a:endParaRPr lang="en-US"/>
+          </a:p>
+        </p:txBody>
       </p:sp>
       <p:sp>
         <p:nvSpPr>
@@ -13057,6 +12871,13 @@
           </a:solidFill>
           <a:ln/>
         </p:spPr>
+        <p:txBody>
+          <a:bodyPr/>
+          <a:lstStyle/>
+          <a:p>
+            <a:endParaRPr lang="en-US"/>
+          </a:p>
+        </p:txBody>
       </p:sp>
       <p:sp>
         <p:nvSpPr>
@@ -13085,7 +12906,7 @@
               </a:lnSpc>
             </a:pPr>
             <a:r>
-              <a:rPr lang="en-US" sz="1600" b="1" spc="200" kern="0" dirty="0">
+              <a:rPr lang="en-US" sz="1600" b="1" kern="0" spc="200" dirty="0">
                 <a:solidFill>
                   <a:srgbClr val="FFFFFF"/>
                 </a:solidFill>
@@ -13118,6 +12939,13 @@
           </a:solidFill>
           <a:ln/>
         </p:spPr>
+        <p:txBody>
+          <a:bodyPr/>
+          <a:lstStyle/>
+          <a:p>
+            <a:endParaRPr lang="en-US"/>
+          </a:p>
+        </p:txBody>
       </p:sp>
       <p:sp>
         <p:nvSpPr>
@@ -13146,7 +12974,7 @@
               </a:lnSpc>
             </a:pPr>
             <a:r>
-              <a:rPr lang="en-US" sz="1600" b="1" spc="200" kern="0" dirty="0">
+              <a:rPr lang="en-US" sz="1600" b="1" kern="0" spc="200" dirty="0">
                 <a:solidFill>
                   <a:srgbClr val="FFFFFF"/>
                 </a:solidFill>
@@ -13181,6 +13009,13 @@
           </a:solidFill>
           <a:ln/>
         </p:spPr>
+        <p:txBody>
+          <a:bodyPr/>
+          <a:lstStyle/>
+          <a:p>
+            <a:endParaRPr lang="en-US"/>
+          </a:p>
+        </p:txBody>
       </p:sp>
       <p:sp>
         <p:nvSpPr>
@@ -13219,28 +13054,107 @@
               </a:rPr>
               <a:t>GET</a:t>
             </a:r>
+            <a:r>
+              <a:rPr lang="en-US" sz="1500" dirty="0">
+                <a:solidFill>
+                  <a:srgbClr val="1C1C1E"/>
+                </a:solidFill>
+                <a:latin typeface="Quattrocento Sans" pitchFamily="34" charset="0"/>
+                <a:ea typeface="Quattrocento Sans" pitchFamily="34" charset="-122"/>
+                <a:cs typeface="Quattrocento Sans" pitchFamily="34" charset="-120"/>
+              </a:rPr>
+              <a:t> /users/123/orders</a:t>
+            </a:r>
+            <a:endParaRPr lang="en-US" sz="1500" dirty="0"/>
+          </a:p>
+          <a:p>
             <a:pPr algn="l">
               <a:lnSpc>
                 <a:spcPct val="150000"/>
               </a:lnSpc>
             </a:pPr>
             <a:r>
-              <a:rPr lang="en-US" sz="1500" dirty="0">
-                <a:solidFill>
-                  <a:srgbClr val="1C1C1E"/>
-                </a:solidFill>
-                <a:latin typeface="Quattrocento Sans" pitchFamily="34" charset="0"/>
-                <a:ea typeface="Quattrocento Sans" pitchFamily="34" charset="-122"/>
-                <a:cs typeface="Quattrocento Sans" pitchFamily="34" charset="-120"/>
-              </a:rPr>
-              <a:t> </a:t>
-            </a:r>
+              <a:rPr lang="en-US" sz="1300" dirty="0">
+                <a:solidFill>
+                  <a:srgbClr val="8A9B8C"/>
+                </a:solidFill>
+                <a:latin typeface="Quattrocento Sans" pitchFamily="34" charset="0"/>
+                <a:ea typeface="Quattrocento Sans" pitchFamily="34" charset="-122"/>
+                <a:cs typeface="Quattrocento Sans" pitchFamily="34" charset="-120"/>
+              </a:rPr>
+              <a:t>Nouns + hierarchy + HTTP method</a:t>
+            </a:r>
+            <a:endParaRPr lang="en-US" sz="1500" dirty="0"/>
+          </a:p>
+        </p:txBody>
+      </p:sp>
+      <p:sp>
+        <p:nvSpPr>
+          <p:cNvPr id="12" name="Shape 10"/>
+          <p:cNvSpPr/>
+          <p:nvPr/>
+        </p:nvSpPr>
+        <p:spPr>
+          <a:xfrm>
+            <a:off x="8318500" y="2794000"/>
+            <a:ext cx="7175500" cy="1143000"/>
+          </a:xfrm>
+          <a:prstGeom prst="rect">
+            <a:avLst/>
+          </a:prstGeom>
+          <a:solidFill>
+            <a:srgbClr val="C44D4D">
+              <a:alpha val="6275"/>
+            </a:srgbClr>
+          </a:solidFill>
+          <a:ln/>
+        </p:spPr>
+        <p:txBody>
+          <a:bodyPr/>
+          <a:lstStyle/>
+          <a:p>
+            <a:endParaRPr lang="en-US"/>
+          </a:p>
+        </p:txBody>
+      </p:sp>
+      <p:sp>
+        <p:nvSpPr>
+          <p:cNvPr id="13" name="Text 11"/>
+          <p:cNvSpPr/>
+          <p:nvPr/>
+        </p:nvSpPr>
+        <p:spPr>
+          <a:xfrm>
+            <a:off x="8572500" y="2895600"/>
+            <a:ext cx="6667500" cy="952500"/>
+          </a:xfrm>
+          <a:prstGeom prst="rect">
+            <a:avLst/>
+          </a:prstGeom>
+          <a:noFill/>
+          <a:ln/>
+        </p:spPr>
+        <p:txBody>
+          <a:bodyPr wrap="square" lIns="0" tIns="0" rIns="0" bIns="0" rtlCol="0" anchor="ctr"/>
+          <a:lstStyle/>
+          <a:p>
             <a:pPr algn="l">
               <a:lnSpc>
                 <a:spcPct val="150000"/>
               </a:lnSpc>
             </a:pPr>
             <a:r>
+              <a:rPr lang="en-US" sz="1500" b="1" dirty="0">
+                <a:solidFill>
+                  <a:srgbClr val="1C1C1E"/>
+                </a:solidFill>
+                <a:latin typeface="Quattrocento Sans" pitchFamily="34" charset="0"/>
+                <a:ea typeface="Quattrocento Sans" pitchFamily="34" charset="-122"/>
+                <a:cs typeface="Quattrocento Sans" pitchFamily="34" charset="-120"/>
+              </a:rPr>
+              <a:t>GET</a:t>
+            </a:r>
+            <a:r>
               <a:rPr lang="en-US" sz="1500" dirty="0">
                 <a:solidFill>
                   <a:srgbClr val="1C1C1E"/>
@@ -13249,7 +13163,7 @@
                 <a:ea typeface="Quattrocento Sans" pitchFamily="34" charset="-122"/>
                 <a:cs typeface="Quattrocento Sans" pitchFamily="34" charset="-120"/>
               </a:rPr>
-              <a:t>/users/123/orders</a:t>
+              <a:t> /getUserOrders?id=123</a:t>
             </a:r>
             <a:endParaRPr lang="en-US" sz="1500" dirty="0"/>
           </a:p>
@@ -13268,7 +13182,7 @@
                 <a:ea typeface="Quattrocento Sans" pitchFamily="34" charset="-122"/>
                 <a:cs typeface="Quattrocento Sans" pitchFamily="34" charset="-120"/>
               </a:rPr>
-              <a:t>Nouns + hierarchy + HTTP method</a:t>
+              <a:t>Verbs in URL + query params for IDs</a:t>
             </a:r>
             <a:endParaRPr lang="en-US" sz="1500" dirty="0"/>
           </a:p>
@@ -13276,13 +13190,113 @@
       </p:sp>
       <p:sp>
         <p:nvSpPr>
-          <p:cNvPr id="12" name="Shape 10"/>
-          <p:cNvSpPr/>
-          <p:nvPr/>
-        </p:nvSpPr>
-        <p:spPr>
-          <a:xfrm>
-            <a:off x="8318500" y="2794000"/>
+          <p:cNvPr id="14" name="Shape 12"/>
+          <p:cNvSpPr/>
+          <p:nvPr/>
+        </p:nvSpPr>
+        <p:spPr>
+          <a:xfrm>
+            <a:off x="762000" y="4064000"/>
+            <a:ext cx="7175500" cy="1143000"/>
+          </a:xfrm>
+          <a:prstGeom prst="rect">
+            <a:avLst/>
+          </a:prstGeom>
+          <a:solidFill>
+            <a:srgbClr val="4A9B6B">
+              <a:alpha val="6275"/>
+            </a:srgbClr>
+          </a:solidFill>
+          <a:ln/>
+        </p:spPr>
+        <p:txBody>
+          <a:bodyPr/>
+          <a:lstStyle/>
+          <a:p>
+            <a:endParaRPr lang="en-US"/>
+          </a:p>
+        </p:txBody>
+      </p:sp>
+      <p:sp>
+        <p:nvSpPr>
+          <p:cNvPr id="15" name="Text 13"/>
+          <p:cNvSpPr/>
+          <p:nvPr/>
+        </p:nvSpPr>
+        <p:spPr>
+          <a:xfrm>
+            <a:off x="1016000" y="4165600"/>
+            <a:ext cx="6667500" cy="952500"/>
+          </a:xfrm>
+          <a:prstGeom prst="rect">
+            <a:avLst/>
+          </a:prstGeom>
+          <a:noFill/>
+          <a:ln/>
+        </p:spPr>
+        <p:txBody>
+          <a:bodyPr wrap="square" lIns="0" tIns="0" rIns="0" bIns="0" rtlCol="0" anchor="ctr"/>
+          <a:lstStyle/>
+          <a:p>
+            <a:pPr algn="l">
+              <a:lnSpc>
+                <a:spcPct val="150000"/>
+              </a:lnSpc>
+            </a:pPr>
+            <a:r>
+              <a:rPr lang="en-US" sz="1500" b="1" dirty="0">
+                <a:solidFill>
+                  <a:srgbClr val="1C1C1E"/>
+                </a:solidFill>
+                <a:latin typeface="Quattrocento Sans" pitchFamily="34" charset="0"/>
+                <a:ea typeface="Quattrocento Sans" pitchFamily="34" charset="-122"/>
+                <a:cs typeface="Quattrocento Sans" pitchFamily="34" charset="-120"/>
+              </a:rPr>
+              <a:t>201 Created</a:t>
+            </a:r>
+            <a:r>
+              <a:rPr lang="en-US" sz="1500" dirty="0">
+                <a:solidFill>
+                  <a:srgbClr val="1C1C1E"/>
+                </a:solidFill>
+                <a:latin typeface="Quattrocento Sans" pitchFamily="34" charset="0"/>
+                <a:ea typeface="Quattrocento Sans" pitchFamily="34" charset="-122"/>
+                <a:cs typeface="Quattrocento Sans" pitchFamily="34" charset="-120"/>
+              </a:rPr>
+              <a:t> + Location header</a:t>
+            </a:r>
+            <a:endParaRPr lang="en-US" sz="1500" dirty="0"/>
+          </a:p>
+          <a:p>
+            <a:pPr algn="l">
+              <a:lnSpc>
+                <a:spcPct val="150000"/>
+              </a:lnSpc>
+            </a:pPr>
+            <a:r>
+              <a:rPr lang="en-US" sz="1300" dirty="0">
+                <a:solidFill>
+                  <a:srgbClr val="8A9B8C"/>
+                </a:solidFill>
+                <a:latin typeface="Quattrocento Sans" pitchFamily="34" charset="0"/>
+                <a:ea typeface="Quattrocento Sans" pitchFamily="34" charset="-122"/>
+                <a:cs typeface="Quattrocento Sans" pitchFamily="34" charset="-120"/>
+              </a:rPr>
+              <a:t>Proper status code + resource location</a:t>
+            </a:r>
+            <a:endParaRPr lang="en-US" sz="1500" dirty="0"/>
+          </a:p>
+        </p:txBody>
+      </p:sp>
+      <p:sp>
+        <p:nvSpPr>
+          <p:cNvPr id="16" name="Shape 14"/>
+          <p:cNvSpPr/>
+          <p:nvPr/>
+        </p:nvSpPr>
+        <p:spPr>
+          <a:xfrm>
+            <a:off x="8318500" y="4064000"/>
             <a:ext cx="7175500" cy="1143000"/>
           </a:xfrm>
           <a:prstGeom prst="rect">
@@ -13295,16 +13309,23 @@
           </a:solidFill>
           <a:ln/>
         </p:spPr>
-      </p:sp>
-      <p:sp>
-        <p:nvSpPr>
-          <p:cNvPr id="13" name="Text 11"/>
-          <p:cNvSpPr/>
-          <p:nvPr/>
-        </p:nvSpPr>
-        <p:spPr>
-          <a:xfrm>
-            <a:off x="8572500" y="2895600"/>
+        <p:txBody>
+          <a:bodyPr/>
+          <a:lstStyle/>
+          <a:p>
+            <a:endParaRPr lang="en-US"/>
+          </a:p>
+        </p:txBody>
+      </p:sp>
+      <p:sp>
+        <p:nvSpPr>
+          <p:cNvPr id="17" name="Text 15"/>
+          <p:cNvSpPr/>
+          <p:nvPr/>
+        </p:nvSpPr>
+        <p:spPr>
+          <a:xfrm>
+            <a:off x="8572500" y="4165600"/>
             <a:ext cx="6667500" cy="952500"/>
           </a:xfrm>
           <a:prstGeom prst="rect">
@@ -13331,30 +13352,109 @@
                 <a:ea typeface="Quattrocento Sans" pitchFamily="34" charset="-122"/>
                 <a:cs typeface="Quattrocento Sans" pitchFamily="34" charset="-120"/>
               </a:rPr>
-              <a:t>GET</a:t>
-            </a:r>
+              <a:t>200 OK</a:t>
+            </a:r>
+            <a:r>
+              <a:rPr lang="en-US" sz="1500" dirty="0">
+                <a:solidFill>
+                  <a:srgbClr val="1C1C1E"/>
+                </a:solidFill>
+                <a:latin typeface="Quattrocento Sans" pitchFamily="34" charset="0"/>
+                <a:ea typeface="Quattrocento Sans" pitchFamily="34" charset="-122"/>
+                <a:cs typeface="Quattrocento Sans" pitchFamily="34" charset="-120"/>
+              </a:rPr>
+              <a:t> + body says "created"</a:t>
+            </a:r>
+            <a:endParaRPr lang="en-US" sz="1500" dirty="0"/>
+          </a:p>
+          <a:p>
             <a:pPr algn="l">
               <a:lnSpc>
                 <a:spcPct val="150000"/>
               </a:lnSpc>
             </a:pPr>
             <a:r>
-              <a:rPr lang="en-US" sz="1500" dirty="0">
-                <a:solidFill>
-                  <a:srgbClr val="1C1C1E"/>
-                </a:solidFill>
-                <a:latin typeface="Quattrocento Sans" pitchFamily="34" charset="0"/>
-                <a:ea typeface="Quattrocento Sans" pitchFamily="34" charset="-122"/>
-                <a:cs typeface="Quattrocento Sans" pitchFamily="34" charset="-120"/>
-              </a:rPr>
-              <a:t> </a:t>
-            </a:r>
+              <a:rPr lang="en-US" sz="1300" dirty="0">
+                <a:solidFill>
+                  <a:srgbClr val="8A9B8C"/>
+                </a:solidFill>
+                <a:latin typeface="Quattrocento Sans" pitchFamily="34" charset="0"/>
+                <a:ea typeface="Quattrocento Sans" pitchFamily="34" charset="-122"/>
+                <a:cs typeface="Quattrocento Sans" pitchFamily="34" charset="-120"/>
+              </a:rPr>
+              <a:t>Generic status, logic in response body</a:t>
+            </a:r>
+            <a:endParaRPr lang="en-US" sz="1500" dirty="0"/>
+          </a:p>
+        </p:txBody>
+      </p:sp>
+      <p:sp>
+        <p:nvSpPr>
+          <p:cNvPr id="18" name="Shape 16"/>
+          <p:cNvSpPr/>
+          <p:nvPr/>
+        </p:nvSpPr>
+        <p:spPr>
+          <a:xfrm>
+            <a:off x="762000" y="5334000"/>
+            <a:ext cx="7175500" cy="1143000"/>
+          </a:xfrm>
+          <a:prstGeom prst="rect">
+            <a:avLst/>
+          </a:prstGeom>
+          <a:solidFill>
+            <a:srgbClr val="4A9B6B">
+              <a:alpha val="6275"/>
+            </a:srgbClr>
+          </a:solidFill>
+          <a:ln/>
+        </p:spPr>
+        <p:txBody>
+          <a:bodyPr/>
+          <a:lstStyle/>
+          <a:p>
+            <a:endParaRPr lang="en-US"/>
+          </a:p>
+        </p:txBody>
+      </p:sp>
+      <p:sp>
+        <p:nvSpPr>
+          <p:cNvPr id="19" name="Text 17"/>
+          <p:cNvSpPr/>
+          <p:nvPr/>
+        </p:nvSpPr>
+        <p:spPr>
+          <a:xfrm>
+            <a:off x="1016000" y="5435600"/>
+            <a:ext cx="6667500" cy="952500"/>
+          </a:xfrm>
+          <a:prstGeom prst="rect">
+            <a:avLst/>
+          </a:prstGeom>
+          <a:noFill/>
+          <a:ln/>
+        </p:spPr>
+        <p:txBody>
+          <a:bodyPr wrap="square" lIns="0" tIns="0" rIns="0" bIns="0" rtlCol="0" anchor="ctr"/>
+          <a:lstStyle/>
+          <a:p>
             <a:pPr algn="l">
               <a:lnSpc>
                 <a:spcPct val="150000"/>
               </a:lnSpc>
             </a:pPr>
             <a:r>
+              <a:rPr lang="en-US" sz="1500" b="1" dirty="0">
+                <a:solidFill>
+                  <a:srgbClr val="1C1C1E"/>
+                </a:solidFill>
+                <a:latin typeface="Quattrocento Sans" pitchFamily="34" charset="0"/>
+                <a:ea typeface="Quattrocento Sans" pitchFamily="34" charset="-122"/>
+                <a:cs typeface="Quattrocento Sans" pitchFamily="34" charset="-120"/>
+              </a:rPr>
+              <a:t>Consistent</a:t>
+            </a:r>
+            <a:r>
               <a:rPr lang="en-US" sz="1500" dirty="0">
                 <a:solidFill>
                   <a:srgbClr val="1C1C1E"/>
@@ -13363,7 +13463,7 @@
                 <a:ea typeface="Quattrocento Sans" pitchFamily="34" charset="-122"/>
                 <a:cs typeface="Quattrocento Sans" pitchFamily="34" charset="-120"/>
               </a:rPr>
-              <a:t>/getUserOrders?id=123</a:t>
+              <a:t> error format</a:t>
             </a:r>
             <a:endParaRPr lang="en-US" sz="1500" dirty="0"/>
           </a:p>
@@ -13382,7 +13482,7 @@
                 <a:ea typeface="Quattrocento Sans" pitchFamily="34" charset="-122"/>
                 <a:cs typeface="Quattrocento Sans" pitchFamily="34" charset="-120"/>
               </a:rPr>
-              <a:t>Verbs in URL + query params for IDs</a:t>
+              <a:t>{"error": "Invalid email format"}</a:t>
             </a:r>
             <a:endParaRPr lang="en-US" sz="1500" dirty="0"/>
           </a:p>
@@ -13390,14 +13490,114 @@
       </p:sp>
       <p:sp>
         <p:nvSpPr>
-          <p:cNvPr id="14" name="Shape 12"/>
-          <p:cNvSpPr/>
-          <p:nvPr/>
-        </p:nvSpPr>
-        <p:spPr>
-          <a:xfrm>
-            <a:off x="762000" y="4064000"/>
+          <p:cNvPr id="20" name="Shape 18"/>
+          <p:cNvSpPr/>
+          <p:nvPr/>
+        </p:nvSpPr>
+        <p:spPr>
+          <a:xfrm>
+            <a:off x="8318500" y="5334000"/>
             <a:ext cx="7175500" cy="1143000"/>
+          </a:xfrm>
+          <a:prstGeom prst="rect">
+            <a:avLst/>
+          </a:prstGeom>
+          <a:solidFill>
+            <a:srgbClr val="C44D4D">
+              <a:alpha val="6275"/>
+            </a:srgbClr>
+          </a:solidFill>
+          <a:ln/>
+        </p:spPr>
+        <p:txBody>
+          <a:bodyPr/>
+          <a:lstStyle/>
+          <a:p>
+            <a:endParaRPr lang="en-US"/>
+          </a:p>
+        </p:txBody>
+      </p:sp>
+      <p:sp>
+        <p:nvSpPr>
+          <p:cNvPr id="21" name="Text 19"/>
+          <p:cNvSpPr/>
+          <p:nvPr/>
+        </p:nvSpPr>
+        <p:spPr>
+          <a:xfrm>
+            <a:off x="8572500" y="5435600"/>
+            <a:ext cx="6667500" cy="952500"/>
+          </a:xfrm>
+          <a:prstGeom prst="rect">
+            <a:avLst/>
+          </a:prstGeom>
+          <a:noFill/>
+          <a:ln/>
+        </p:spPr>
+        <p:txBody>
+          <a:bodyPr wrap="square" lIns="0" tIns="0" rIns="0" bIns="0" rtlCol="0" anchor="ctr"/>
+          <a:lstStyle/>
+          <a:p>
+            <a:pPr algn="l">
+              <a:lnSpc>
+                <a:spcPct val="150000"/>
+              </a:lnSpc>
+            </a:pPr>
+            <a:r>
+              <a:rPr lang="en-US" sz="1500" b="1" dirty="0">
+                <a:solidFill>
+                  <a:srgbClr val="1C1C1E"/>
+                </a:solidFill>
+                <a:latin typeface="Quattrocento Sans" pitchFamily="34" charset="0"/>
+                <a:ea typeface="Quattrocento Sans" pitchFamily="34" charset="-122"/>
+                <a:cs typeface="Quattrocento Sans" pitchFamily="34" charset="-120"/>
+              </a:rPr>
+              <a:t>Vague</a:t>
+            </a:r>
+            <a:r>
+              <a:rPr lang="en-US" sz="1500" dirty="0">
+                <a:solidFill>
+                  <a:srgbClr val="1C1C1E"/>
+                </a:solidFill>
+                <a:latin typeface="Quattrocento Sans" pitchFamily="34" charset="0"/>
+                <a:ea typeface="Quattrocento Sans" pitchFamily="34" charset="-122"/>
+                <a:cs typeface="Quattrocento Sans" pitchFamily="34" charset="-120"/>
+              </a:rPr>
+              <a:t> or leaking errors</a:t>
+            </a:r>
+            <a:endParaRPr lang="en-US" sz="1500" dirty="0"/>
+          </a:p>
+          <a:p>
+            <a:pPr algn="l">
+              <a:lnSpc>
+                <a:spcPct val="150000"/>
+              </a:lnSpc>
+            </a:pPr>
+            <a:r>
+              <a:rPr lang="en-US" sz="1300" dirty="0">
+                <a:solidFill>
+                  <a:srgbClr val="8A9B8C"/>
+                </a:solidFill>
+                <a:latin typeface="Quattrocento Sans" pitchFamily="34" charset="0"/>
+                <a:ea typeface="Quattrocento Sans" pitchFamily="34" charset="-122"/>
+                <a:cs typeface="Quattrocento Sans" pitchFamily="34" charset="-120"/>
+              </a:rPr>
+              <a:t>"Something went wrong" or stack traces</a:t>
+            </a:r>
+            <a:endParaRPr lang="en-US" sz="1500" dirty="0"/>
+          </a:p>
+        </p:txBody>
+      </p:sp>
+      <p:sp>
+        <p:nvSpPr>
+          <p:cNvPr id="22" name="Shape 20"/>
+          <p:cNvSpPr/>
+          <p:nvPr/>
+        </p:nvSpPr>
+        <p:spPr>
+          <a:xfrm>
+            <a:off x="762000" y="6604000"/>
+            <a:ext cx="7175500" cy="1016000"/>
           </a:xfrm>
           <a:prstGeom prst="rect">
             <a:avLst/>
@@ -13409,17 +13609,24 @@
           </a:solidFill>
           <a:ln/>
         </p:spPr>
-      </p:sp>
-      <p:sp>
-        <p:nvSpPr>
-          <p:cNvPr id="15" name="Text 13"/>
-          <p:cNvSpPr/>
-          <p:nvPr/>
-        </p:nvSpPr>
-        <p:spPr>
-          <a:xfrm>
-            <a:off x="1016000" y="4165600"/>
-            <a:ext cx="6667500" cy="952500"/>
+        <p:txBody>
+          <a:bodyPr/>
+          <a:lstStyle/>
+          <a:p>
+            <a:endParaRPr lang="en-US"/>
+          </a:p>
+        </p:txBody>
+      </p:sp>
+      <p:sp>
+        <p:nvSpPr>
+          <p:cNvPr id="23" name="Text 21"/>
+          <p:cNvSpPr/>
+          <p:nvPr/>
+        </p:nvSpPr>
+        <p:spPr>
+          <a:xfrm>
+            <a:off x="1016000" y="6667500"/>
+            <a:ext cx="6667500" cy="889000"/>
           </a:xfrm>
           <a:prstGeom prst="rect">
             <a:avLst/>
@@ -13445,26 +13652,91 @@
                 <a:ea typeface="Quattrocento Sans" pitchFamily="34" charset="-122"/>
                 <a:cs typeface="Quattrocento Sans" pitchFamily="34" charset="-120"/>
               </a:rPr>
-              <a:t>201 Created</a:t>
-            </a:r>
+              <a:t>Versioned</a:t>
+            </a:r>
+            <a:r>
+              <a:rPr lang="en-US" sz="1500" dirty="0">
+                <a:solidFill>
+                  <a:srgbClr val="1C1C1E"/>
+                </a:solidFill>
+                <a:latin typeface="Quattrocento Sans" pitchFamily="34" charset="0"/>
+                <a:ea typeface="Quattrocento Sans" pitchFamily="34" charset="-122"/>
+                <a:cs typeface="Quattrocento Sans" pitchFamily="34" charset="-120"/>
+              </a:rPr>
+              <a:t> from day one</a:t>
+            </a:r>
+            <a:endParaRPr lang="en-US" sz="1500" dirty="0"/>
+          </a:p>
+          <a:p>
             <a:pPr algn="l">
               <a:lnSpc>
                 <a:spcPct val="150000"/>
               </a:lnSpc>
             </a:pPr>
             <a:r>
-              <a:rPr lang="en-US" sz="1500" dirty="0">
-                <a:solidFill>
-                  <a:srgbClr val="1C1C1E"/>
-                </a:solidFill>
-                <a:latin typeface="Quattrocento Sans" pitchFamily="34" charset="0"/>
-                <a:ea typeface="Quattrocento Sans" pitchFamily="34" charset="-122"/>
-                <a:cs typeface="Quattrocento Sans" pitchFamily="34" charset="-120"/>
-              </a:rPr>
-              <a:t> + Location header</a:t>
+              <a:rPr lang="en-US" sz="1300" dirty="0">
+                <a:solidFill>
+                  <a:srgbClr val="8A9B8C"/>
+                </a:solidFill>
+                <a:latin typeface="Quattrocento Sans" pitchFamily="34" charset="0"/>
+                <a:ea typeface="Quattrocento Sans" pitchFamily="34" charset="-122"/>
+                <a:cs typeface="Quattrocento Sans" pitchFamily="34" charset="-120"/>
+              </a:rPr>
+              <a:t>/v1/users — explicit, predictable</a:t>
             </a:r>
             <a:endParaRPr lang="en-US" sz="1500" dirty="0"/>
           </a:p>
+        </p:txBody>
+      </p:sp>
+      <p:sp>
+        <p:nvSpPr>
+          <p:cNvPr id="24" name="Shape 22"/>
+          <p:cNvSpPr/>
+          <p:nvPr/>
+        </p:nvSpPr>
+        <p:spPr>
+          <a:xfrm>
+            <a:off x="8318500" y="6604000"/>
+            <a:ext cx="7175500" cy="1016000"/>
+          </a:xfrm>
+          <a:prstGeom prst="rect">
+            <a:avLst/>
+          </a:prstGeom>
+          <a:solidFill>
+            <a:srgbClr val="C44D4D">
+              <a:alpha val="6275"/>
+            </a:srgbClr>
+          </a:solidFill>
+          <a:ln/>
+        </p:spPr>
+        <p:txBody>
+          <a:bodyPr/>
+          <a:lstStyle/>
+          <a:p>
+            <a:endParaRPr lang="en-US"/>
+          </a:p>
+        </p:txBody>
+      </p:sp>
+      <p:sp>
+        <p:nvSpPr>
+          <p:cNvPr id="25" name="Text 23"/>
+          <p:cNvSpPr/>
+          <p:nvPr/>
+        </p:nvSpPr>
+        <p:spPr>
+          <a:xfrm>
+            <a:off x="8572500" y="6667500"/>
+            <a:ext cx="6667500" cy="889000"/>
+          </a:xfrm>
+          <a:prstGeom prst="rect">
+            <a:avLst/>
+          </a:prstGeom>
+          <a:noFill/>
+          <a:ln/>
+        </p:spPr>
+        <p:txBody>
+          <a:bodyPr wrap="square" lIns="0" tIns="0" rIns="0" bIns="0" rtlCol="0" anchor="ctr"/>
+          <a:lstStyle/>
           <a:p>
             <a:pPr algn="l">
               <a:lnSpc>
@@ -13472,62 +13744,18 @@
               </a:lnSpc>
             </a:pPr>
             <a:r>
-              <a:rPr lang="en-US" sz="1300" dirty="0">
-                <a:solidFill>
-                  <a:srgbClr val="8A9B8C"/>
-                </a:solidFill>
-                <a:latin typeface="Quattrocento Sans" pitchFamily="34" charset="0"/>
-                <a:ea typeface="Quattrocento Sans" pitchFamily="34" charset="-122"/>
-                <a:cs typeface="Quattrocento Sans" pitchFamily="34" charset="-120"/>
-              </a:rPr>
-              <a:t>Proper status code + resource location</a:t>
+              <a:rPr lang="en-US" sz="1500" b="1" dirty="0">
+                <a:solidFill>
+                  <a:srgbClr val="1C1C1E"/>
+                </a:solidFill>
+                <a:latin typeface="Quattrocento Sans" pitchFamily="34" charset="0"/>
+                <a:ea typeface="Quattrocento Sans" pitchFamily="34" charset="-122"/>
+                <a:cs typeface="Quattrocento Sans" pitchFamily="34" charset="-120"/>
+              </a:rPr>
+              <a:t>No versioning</a:t>
             </a:r>
             <a:endParaRPr lang="en-US" sz="1500" dirty="0"/>
           </a:p>
-        </p:txBody>
-      </p:sp>
-      <p:sp>
-        <p:nvSpPr>
-          <p:cNvPr id="16" name="Shape 14"/>
-          <p:cNvSpPr/>
-          <p:nvPr/>
-        </p:nvSpPr>
-        <p:spPr>
-          <a:xfrm>
-            <a:off x="8318500" y="4064000"/>
-            <a:ext cx="7175500" cy="1143000"/>
-          </a:xfrm>
-          <a:prstGeom prst="rect">
-            <a:avLst/>
-          </a:prstGeom>
-          <a:solidFill>
-            <a:srgbClr val="C44D4D">
-              <a:alpha val="6275"/>
-            </a:srgbClr>
-          </a:solidFill>
-          <a:ln/>
-        </p:spPr>
-      </p:sp>
-      <p:sp>
-        <p:nvSpPr>
-          <p:cNvPr id="17" name="Text 15"/>
-          <p:cNvSpPr/>
-          <p:nvPr/>
-        </p:nvSpPr>
-        <p:spPr>
-          <a:xfrm>
-            <a:off x="8572500" y="4165600"/>
-            <a:ext cx="6667500" cy="952500"/>
-          </a:xfrm>
-          <a:prstGeom prst="rect">
-            <a:avLst/>
-          </a:prstGeom>
-          <a:noFill/>
-          <a:ln/>
-        </p:spPr>
-        <p:txBody>
-          <a:bodyPr wrap="square" lIns="0" tIns="0" rIns="0" bIns="0" rtlCol="0" anchor="ctr"/>
-          <a:lstStyle/>
           <a:p>
             <a:pPr algn="l">
               <a:lnSpc>
@@ -13535,41 +13763,6 @@
               </a:lnSpc>
             </a:pPr>
             <a:r>
-              <a:rPr lang="en-US" sz="1500" b="1" dirty="0">
-                <a:solidFill>
-                  <a:srgbClr val="1C1C1E"/>
-                </a:solidFill>
-                <a:latin typeface="Quattrocento Sans" pitchFamily="34" charset="0"/>
-                <a:ea typeface="Quattrocento Sans" pitchFamily="34" charset="-122"/>
-                <a:cs typeface="Quattrocento Sans" pitchFamily="34" charset="-120"/>
-              </a:rPr>
-              <a:t>200 OK</a:t>
-            </a:r>
-            <a:pPr algn="l">
-              <a:lnSpc>
-                <a:spcPct val="150000"/>
-              </a:lnSpc>
-            </a:pPr>
-            <a:r>
-              <a:rPr lang="en-US" sz="1500" dirty="0">
-                <a:solidFill>
-                  <a:srgbClr val="1C1C1E"/>
-                </a:solidFill>
-                <a:latin typeface="Quattrocento Sans" pitchFamily="34" charset="0"/>
-                <a:ea typeface="Quattrocento Sans" pitchFamily="34" charset="-122"/>
-                <a:cs typeface="Quattrocento Sans" pitchFamily="34" charset="-120"/>
-              </a:rPr>
-              <a:t> + body says "created"</a:t>
-            </a:r>
-            <a:endParaRPr lang="en-US" sz="1500" dirty="0"/>
-          </a:p>
-          <a:p>
-            <a:pPr algn="l">
-              <a:lnSpc>
-                <a:spcPct val="150000"/>
-              </a:lnSpc>
-            </a:pPr>
-            <a:r>
               <a:rPr lang="en-US" sz="1300" dirty="0">
                 <a:solidFill>
                   <a:srgbClr val="8A9B8C"/>
@@ -13578,431 +13771,7 @@
                 <a:ea typeface="Quattrocento Sans" pitchFamily="34" charset="-122"/>
                 <a:cs typeface="Quattrocento Sans" pitchFamily="34" charset="-120"/>
               </a:rPr>
-              <a:t>Generic status, logic in response body</a:t>
-            </a:r>
-            <a:endParaRPr lang="en-US" sz="1500" dirty="0"/>
-          </a:p>
-        </p:txBody>
-      </p:sp>
-      <p:sp>
-        <p:nvSpPr>
-          <p:cNvPr id="18" name="Shape 16"/>
-          <p:cNvSpPr/>
-          <p:nvPr/>
-        </p:nvSpPr>
-        <p:spPr>
-          <a:xfrm>
-            <a:off x="762000" y="5334000"/>
-            <a:ext cx="7175500" cy="1143000"/>
-          </a:xfrm>
-          <a:prstGeom prst="rect">
-            <a:avLst/>
-          </a:prstGeom>
-          <a:solidFill>
-            <a:srgbClr val="4A9B6B">
-              <a:alpha val="6275"/>
-            </a:srgbClr>
-          </a:solidFill>
-          <a:ln/>
-        </p:spPr>
-      </p:sp>
-      <p:sp>
-        <p:nvSpPr>
-          <p:cNvPr id="19" name="Text 17"/>
-          <p:cNvSpPr/>
-          <p:nvPr/>
-        </p:nvSpPr>
-        <p:spPr>
-          <a:xfrm>
-            <a:off x="1016000" y="5435600"/>
-            <a:ext cx="6667500" cy="952500"/>
-          </a:xfrm>
-          <a:prstGeom prst="rect">
-            <a:avLst/>
-          </a:prstGeom>
-          <a:noFill/>
-          <a:ln/>
-        </p:spPr>
-        <p:txBody>
-          <a:bodyPr wrap="square" lIns="0" tIns="0" rIns="0" bIns="0" rtlCol="0" anchor="ctr"/>
-          <a:lstStyle/>
-          <a:p>
-            <a:pPr algn="l">
-              <a:lnSpc>
-                <a:spcPct val="150000"/>
-              </a:lnSpc>
-            </a:pPr>
-            <a:r>
-              <a:rPr lang="en-US" sz="1500" b="1" dirty="0">
-                <a:solidFill>
-                  <a:srgbClr val="1C1C1E"/>
-                </a:solidFill>
-                <a:latin typeface="Quattrocento Sans" pitchFamily="34" charset="0"/>
-                <a:ea typeface="Quattrocento Sans" pitchFamily="34" charset="-122"/>
-                <a:cs typeface="Quattrocento Sans" pitchFamily="34" charset="-120"/>
-              </a:rPr>
-              <a:t>Consistent</a:t>
-            </a:r>
-            <a:pPr algn="l">
-              <a:lnSpc>
-                <a:spcPct val="150000"/>
-              </a:lnSpc>
-            </a:pPr>
-            <a:r>
-              <a:rPr lang="en-US" sz="1500" dirty="0">
-                <a:solidFill>
-                  <a:srgbClr val="1C1C1E"/>
-                </a:solidFill>
-                <a:latin typeface="Quattrocento Sans" pitchFamily="34" charset="0"/>
-                <a:ea typeface="Quattrocento Sans" pitchFamily="34" charset="-122"/>
-                <a:cs typeface="Quattrocento Sans" pitchFamily="34" charset="-120"/>
-              </a:rPr>
-              <a:t> error format</a:t>
-            </a:r>
-            <a:endParaRPr lang="en-US" sz="1500" dirty="0"/>
-          </a:p>
-          <a:p>
-            <a:pPr algn="l">
-              <a:lnSpc>
-                <a:spcPct val="150000"/>
-              </a:lnSpc>
-            </a:pPr>
-            <a:r>
-              <a:rPr lang="en-US" sz="1300" dirty="0">
-                <a:solidFill>
-                  <a:srgbClr val="8A9B8C"/>
-                </a:solidFill>
-                <a:latin typeface="Quattrocento Sans" pitchFamily="34" charset="0"/>
-                <a:ea typeface="Quattrocento Sans" pitchFamily="34" charset="-122"/>
-                <a:cs typeface="Quattrocento Sans" pitchFamily="34" charset="-120"/>
-              </a:rPr>
-              <a:t>{"error": "Invalid email format"}</a:t>
-            </a:r>
-            <a:endParaRPr lang="en-US" sz="1500" dirty="0"/>
-          </a:p>
-        </p:txBody>
-      </p:sp>
-      <p:sp>
-        <p:nvSpPr>
-          <p:cNvPr id="20" name="Shape 18"/>
-          <p:cNvSpPr/>
-          <p:nvPr/>
-        </p:nvSpPr>
-        <p:spPr>
-          <a:xfrm>
-            <a:off x="8318500" y="5334000"/>
-            <a:ext cx="7175500" cy="1143000"/>
-          </a:xfrm>
-          <a:prstGeom prst="rect">
-            <a:avLst/>
-          </a:prstGeom>
-          <a:solidFill>
-            <a:srgbClr val="C44D4D">
-              <a:alpha val="6275"/>
-            </a:srgbClr>
-          </a:solidFill>
-          <a:ln/>
-        </p:spPr>
-      </p:sp>
-      <p:sp>
-        <p:nvSpPr>
-          <p:cNvPr id="21" name="Text 19"/>
-          <p:cNvSpPr/>
-          <p:nvPr/>
-        </p:nvSpPr>
-        <p:spPr>
-          <a:xfrm>
-            <a:off x="8572500" y="5435600"/>
-            <a:ext cx="6667500" cy="952500"/>
-          </a:xfrm>
-          <a:prstGeom prst="rect">
-            <a:avLst/>
-          </a:prstGeom>
-          <a:noFill/>
-          <a:ln/>
-        </p:spPr>
-        <p:txBody>
-          <a:bodyPr wrap="square" lIns="0" tIns="0" rIns="0" bIns="0" rtlCol="0" anchor="ctr"/>
-          <a:lstStyle/>
-          <a:p>
-            <a:pPr algn="l">
-              <a:lnSpc>
-                <a:spcPct val="150000"/>
-              </a:lnSpc>
-            </a:pPr>
-            <a:r>
-              <a:rPr lang="en-US" sz="1500" b="1" dirty="0">
-                <a:solidFill>
-                  <a:srgbClr val="1C1C1E"/>
-                </a:solidFill>
-                <a:latin typeface="Quattrocento Sans" pitchFamily="34" charset="0"/>
-                <a:ea typeface="Quattrocento Sans" pitchFamily="34" charset="-122"/>
-                <a:cs typeface="Quattrocento Sans" pitchFamily="34" charset="-120"/>
-              </a:rPr>
-              <a:t>Vague</a:t>
-            </a:r>
-            <a:pPr algn="l">
-              <a:lnSpc>
-                <a:spcPct val="150000"/>
-              </a:lnSpc>
-            </a:pPr>
-            <a:r>
-              <a:rPr lang="en-US" sz="1500" dirty="0">
-                <a:solidFill>
-                  <a:srgbClr val="1C1C1E"/>
-                </a:solidFill>
-                <a:latin typeface="Quattrocento Sans" pitchFamily="34" charset="0"/>
-                <a:ea typeface="Quattrocento Sans" pitchFamily="34" charset="-122"/>
-                <a:cs typeface="Quattrocento Sans" pitchFamily="34" charset="-120"/>
-              </a:rPr>
-              <a:t> or leaking errors</a:t>
-            </a:r>
-            <a:endParaRPr lang="en-US" sz="1500" dirty="0"/>
-          </a:p>
-          <a:p>
-            <a:pPr algn="l">
-              <a:lnSpc>
-                <a:spcPct val="150000"/>
-              </a:lnSpc>
-            </a:pPr>
-            <a:r>
-              <a:rPr lang="en-US" sz="1300" dirty="0">
-                <a:solidFill>
-                  <a:srgbClr val="8A9B8C"/>
-                </a:solidFill>
-                <a:latin typeface="Quattrocento Sans" pitchFamily="34" charset="0"/>
-                <a:ea typeface="Quattrocento Sans" pitchFamily="34" charset="-122"/>
-                <a:cs typeface="Quattrocento Sans" pitchFamily="34" charset="-120"/>
-              </a:rPr>
-              <a:t>"Something went wrong"</a:t>
-            </a:r>
-            <a:pPr algn="l">
-              <a:lnSpc>
-                <a:spcPct val="150000"/>
-              </a:lnSpc>
-            </a:pPr>
-            <a:r>
-              <a:rPr lang="en-US" sz="1300" dirty="0">
-                <a:solidFill>
-                  <a:srgbClr val="8A9B8C"/>
-                </a:solidFill>
-                <a:latin typeface="Quattrocento Sans" pitchFamily="34" charset="0"/>
-                <a:ea typeface="Quattrocento Sans" pitchFamily="34" charset="-122"/>
-                <a:cs typeface="Quattrocento Sans" pitchFamily="34" charset="-120"/>
-              </a:rPr>
-              <a:t> or stack traces</a:t>
-            </a:r>
-            <a:endParaRPr lang="en-US" sz="1500" dirty="0"/>
-          </a:p>
-        </p:txBody>
-      </p:sp>
-      <p:sp>
-        <p:nvSpPr>
-          <p:cNvPr id="22" name="Shape 20"/>
-          <p:cNvSpPr/>
-          <p:nvPr/>
-        </p:nvSpPr>
-        <p:spPr>
-          <a:xfrm>
-            <a:off x="762000" y="6604000"/>
-            <a:ext cx="7175500" cy="1016000"/>
-          </a:xfrm>
-          <a:prstGeom prst="rect">
-            <a:avLst/>
-          </a:prstGeom>
-          <a:solidFill>
-            <a:srgbClr val="4A9B6B">
-              <a:alpha val="6275"/>
-            </a:srgbClr>
-          </a:solidFill>
-          <a:ln/>
-        </p:spPr>
-      </p:sp>
-      <p:sp>
-        <p:nvSpPr>
-          <p:cNvPr id="23" name="Text 21"/>
-          <p:cNvSpPr/>
-          <p:nvPr/>
-        </p:nvSpPr>
-        <p:spPr>
-          <a:xfrm>
-            <a:off x="1016000" y="6667500"/>
-            <a:ext cx="6667500" cy="889000"/>
-          </a:xfrm>
-          <a:prstGeom prst="rect">
-            <a:avLst/>
-          </a:prstGeom>
-          <a:noFill/>
-          <a:ln/>
-        </p:spPr>
-        <p:txBody>
-          <a:bodyPr wrap="square" lIns="0" tIns="0" rIns="0" bIns="0" rtlCol="0" anchor="ctr"/>
-          <a:lstStyle/>
-          <a:p>
-            <a:pPr algn="l">
-              <a:lnSpc>
-                <a:spcPct val="150000"/>
-              </a:lnSpc>
-            </a:pPr>
-            <a:r>
-              <a:rPr lang="en-US" sz="1500" b="1" dirty="0">
-                <a:solidFill>
-                  <a:srgbClr val="1C1C1E"/>
-                </a:solidFill>
-                <a:latin typeface="Quattrocento Sans" pitchFamily="34" charset="0"/>
-                <a:ea typeface="Quattrocento Sans" pitchFamily="34" charset="-122"/>
-                <a:cs typeface="Quattrocento Sans" pitchFamily="34" charset="-120"/>
-              </a:rPr>
-              <a:t>Versioned</a:t>
-            </a:r>
-            <a:pPr algn="l">
-              <a:lnSpc>
-                <a:spcPct val="150000"/>
-              </a:lnSpc>
-            </a:pPr>
-            <a:r>
-              <a:rPr lang="en-US" sz="1500" dirty="0">
-                <a:solidFill>
-                  <a:srgbClr val="1C1C1E"/>
-                </a:solidFill>
-                <a:latin typeface="Quattrocento Sans" pitchFamily="34" charset="0"/>
-                <a:ea typeface="Quattrocento Sans" pitchFamily="34" charset="-122"/>
-                <a:cs typeface="Quattrocento Sans" pitchFamily="34" charset="-120"/>
-              </a:rPr>
-              <a:t> from day one</a:t>
-            </a:r>
-            <a:endParaRPr lang="en-US" sz="1500" dirty="0"/>
-          </a:p>
-          <a:p>
-            <a:pPr algn="l">
-              <a:lnSpc>
-                <a:spcPct val="150000"/>
-              </a:lnSpc>
-            </a:pPr>
-            <a:r>
-              <a:rPr lang="en-US" sz="1300" dirty="0">
-                <a:solidFill>
-                  <a:srgbClr val="8A9B8C"/>
-                </a:solidFill>
-                <a:latin typeface="Quattrocento Sans" pitchFamily="34" charset="0"/>
-                <a:ea typeface="Quattrocento Sans" pitchFamily="34" charset="-122"/>
-                <a:cs typeface="Quattrocento Sans" pitchFamily="34" charset="-120"/>
-              </a:rPr>
-              <a:t>/v1/users</a:t>
-            </a:r>
-            <a:pPr algn="l">
-              <a:lnSpc>
-                <a:spcPct val="150000"/>
-              </a:lnSpc>
-            </a:pPr>
-            <a:r>
-              <a:rPr lang="en-US" sz="1300" dirty="0">
-                <a:solidFill>
-                  <a:srgbClr val="8A9B8C"/>
-                </a:solidFill>
-                <a:latin typeface="Quattrocento Sans" pitchFamily="34" charset="0"/>
-                <a:ea typeface="Quattrocento Sans" pitchFamily="34" charset="-122"/>
-                <a:cs typeface="Quattrocento Sans" pitchFamily="34" charset="-120"/>
-              </a:rPr>
-              <a:t> — explicit, predictable</a:t>
-            </a:r>
-            <a:endParaRPr lang="en-US" sz="1500" dirty="0"/>
-          </a:p>
-        </p:txBody>
-      </p:sp>
-      <p:sp>
-        <p:nvSpPr>
-          <p:cNvPr id="24" name="Shape 22"/>
-          <p:cNvSpPr/>
-          <p:nvPr/>
-        </p:nvSpPr>
-        <p:spPr>
-          <a:xfrm>
-            <a:off x="8318500" y="6604000"/>
-            <a:ext cx="7175500" cy="1016000"/>
-          </a:xfrm>
-          <a:prstGeom prst="rect">
-            <a:avLst/>
-          </a:prstGeom>
-          <a:solidFill>
-            <a:srgbClr val="C44D4D">
-              <a:alpha val="6275"/>
-            </a:srgbClr>
-          </a:solidFill>
-          <a:ln/>
-        </p:spPr>
-      </p:sp>
-      <p:sp>
-        <p:nvSpPr>
-          <p:cNvPr id="25" name="Text 23"/>
-          <p:cNvSpPr/>
-          <p:nvPr/>
-        </p:nvSpPr>
-        <p:spPr>
-          <a:xfrm>
-            <a:off x="8572500" y="6667500"/>
-            <a:ext cx="6667500" cy="889000"/>
-          </a:xfrm>
-          <a:prstGeom prst="rect">
-            <a:avLst/>
-          </a:prstGeom>
-          <a:noFill/>
-          <a:ln/>
-        </p:spPr>
-        <p:txBody>
-          <a:bodyPr wrap="square" lIns="0" tIns="0" rIns="0" bIns="0" rtlCol="0" anchor="ctr"/>
-          <a:lstStyle/>
-          <a:p>
-            <a:pPr algn="l">
-              <a:lnSpc>
-                <a:spcPct val="150000"/>
-              </a:lnSpc>
-            </a:pPr>
-            <a:r>
-              <a:rPr lang="en-US" sz="1500" b="1" dirty="0">
-                <a:solidFill>
-                  <a:srgbClr val="1C1C1E"/>
-                </a:solidFill>
-                <a:latin typeface="Quattrocento Sans" pitchFamily="34" charset="0"/>
-                <a:ea typeface="Quattrocento Sans" pitchFamily="34" charset="-122"/>
-                <a:cs typeface="Quattrocento Sans" pitchFamily="34" charset="-120"/>
-              </a:rPr>
-              <a:t>No versioning</a:t>
-            </a:r>
-            <a:endParaRPr lang="en-US" sz="1500" dirty="0"/>
-          </a:p>
-          <a:p>
-            <a:pPr algn="l">
-              <a:lnSpc>
-                <a:spcPct val="150000"/>
-              </a:lnSpc>
-            </a:pPr>
-            <a:r>
-              <a:rPr lang="en-US" sz="1300" dirty="0">
-                <a:solidFill>
-                  <a:srgbClr val="8A9B8C"/>
-                </a:solidFill>
-                <a:latin typeface="Quattrocento Sans" pitchFamily="34" charset="0"/>
-                <a:ea typeface="Quattrocento Sans" pitchFamily="34" charset="-122"/>
-                <a:cs typeface="Quattrocento Sans" pitchFamily="34" charset="-120"/>
-              </a:rPr>
-              <a:t>/users</a:t>
-            </a:r>
-            <a:pPr algn="l">
-              <a:lnSpc>
-                <a:spcPct val="150000"/>
-              </a:lnSpc>
-            </a:pPr>
-            <a:r>
-              <a:rPr lang="en-US" sz="1300" dirty="0">
-                <a:solidFill>
-                  <a:srgbClr val="8A9B8C"/>
-                </a:solidFill>
-                <a:latin typeface="Quattrocento Sans" pitchFamily="34" charset="0"/>
-                <a:ea typeface="Quattrocento Sans" pitchFamily="34" charset="-122"/>
-                <a:cs typeface="Quattrocento Sans" pitchFamily="34" charset="-120"/>
-              </a:rPr>
-              <a:t> — breaks on changes</a:t>
+              <a:t>/users — breaks on changes</a:t>
             </a:r>
             <a:endParaRPr lang="en-US" sz="1500" dirty="0"/>
           </a:p>
@@ -14034,6 +13803,13 @@
             <a:tailEnd type="none"/>
           </a:ln>
         </p:spPr>
+        <p:txBody>
+          <a:bodyPr/>
+          <a:lstStyle/>
+          <a:p>
+            <a:endParaRPr lang="en-US"/>
+          </a:p>
+        </p:txBody>
       </p:sp>
     </p:spTree>
   </p:cSld>
@@ -14042,7 +13818,6 @@
   </p:clrMapOvr>
   <p:transition>
     <p:fade/>
-    <p:spd val="med"/>
   </p:transition>
 </p:sld>
 </file>
@@ -14066,15 +13841,15 @@
       </p:grpSpPr>
       <p:pic>
         <p:nvPicPr>
-          <p:cNvPr id="2" name="Image 0" descr="https://kimi-img.moonshot.cn/pub/slides/okc/r3tmzt32f22la/mnt/agents/output/api_design/images/8_Abstract_Technology_Background_Digital.png">    </p:cNvPr>
+          <p:cNvPr id="2" name="Image 0" descr="https://kimi-img.moonshot.cn/pub/slides/okc/r3tmzt32f22la/mnt/agents/output/api_design/images/8_Abstract_Technology_Background_Digital.png"/>
           <p:cNvPicPr>
             <a:picLocks noChangeAspect="1"/>
           </p:cNvPicPr>
           <p:nvPr/>
         </p:nvPicPr>
         <p:blipFill>
-          <a:blip r:embed="rId1"/>
-          <a:srcRect l="111" r="111" t="0" b="0"/>
+          <a:blip r:embed="rId3"/>
+          <a:srcRect l="111" r="111"/>
           <a:stretch/>
         </p:blipFill>
         <p:spPr>
@@ -14101,7 +13876,7 @@
           <a:prstGeom prst="rect">
             <a:avLst/>
           </a:prstGeom>
-          <a:gradFill rotWithShape="1" flip="none">
+          <a:gradFill flip="none" rotWithShape="1">
             <a:gsLst>
               <a:gs pos="0">
                 <a:srgbClr val="1B4D4D">
@@ -14125,6 +13900,13 @@
             <a:prstDash val="solid"/>
           </a:ln>
         </p:spPr>
+        <p:txBody>
+          <a:bodyPr/>
+          <a:lstStyle/>
+          <a:p>
+            <a:endParaRPr lang="en-US"/>
+          </a:p>
+        </p:txBody>
       </p:sp>
       <p:sp>
         <p:nvSpPr>
@@ -14153,7 +13935,7 @@
               </a:lnSpc>
             </a:pPr>
             <a:r>
-              <a:rPr lang="en-US" sz="1300" spc="200" kern="0" dirty="0">
+              <a:rPr lang="en-US" sz="1300" kern="0" spc="200" dirty="0">
                 <a:solidFill>
                   <a:srgbClr val="D4943A"/>
                 </a:solidFill>
@@ -14186,6 +13968,13 @@
           </a:solidFill>
           <a:ln/>
         </p:spPr>
+        <p:txBody>
+          <a:bodyPr/>
+          <a:lstStyle/>
+          <a:p>
+            <a:endParaRPr lang="en-US"/>
+          </a:p>
+        </p:txBody>
       </p:sp>
       <p:sp>
         <p:nvSpPr>
@@ -14243,6 +14032,31 @@
               </a:rPr>
               <a:t>Design them with </a:t>
             </a:r>
+            <a:r>
+              <a:rPr lang="en-US" sz="2200" b="1" dirty="0">
+                <a:solidFill>
+                  <a:srgbClr val="FFFFFF"/>
+                </a:solidFill>
+                <a:latin typeface="Quattrocento Sans" pitchFamily="34" charset="0"/>
+                <a:ea typeface="Quattrocento Sans" pitchFamily="34" charset="-122"/>
+                <a:cs typeface="Quattrocento Sans" pitchFamily="34" charset="-120"/>
+              </a:rPr>
+              <a:t>REST principles</a:t>
+            </a:r>
+            <a:r>
+              <a:rPr lang="en-US" sz="2200" dirty="0">
+                <a:solidFill>
+                  <a:srgbClr val="FFFFFF"/>
+                </a:solidFill>
+                <a:latin typeface="Quattrocento Sans" pitchFamily="34" charset="0"/>
+                <a:ea typeface="Quattrocento Sans" pitchFamily="34" charset="-122"/>
+                <a:cs typeface="Quattrocento Sans" pitchFamily="34" charset="-120"/>
+              </a:rPr>
+              <a:t>,</a:t>
+            </a:r>
+            <a:endParaRPr lang="en-US" sz="2200" dirty="0"/>
+          </a:p>
+          <a:p>
             <a:pPr algn="ctr">
               <a:lnSpc>
                 <a:spcPct val="160000"/>
@@ -14257,8 +14071,44 @@
                 <a:ea typeface="Quattrocento Sans" pitchFamily="34" charset="-122"/>
                 <a:cs typeface="Quattrocento Sans" pitchFamily="34" charset="-120"/>
               </a:rPr>
-              <a:t>REST principles</a:t>
-            </a:r>
+              <a:t>version wisely</a:t>
+            </a:r>
+            <a:r>
+              <a:rPr lang="en-US" sz="2200" dirty="0">
+                <a:solidFill>
+                  <a:srgbClr val="FFFFFF"/>
+                </a:solidFill>
+                <a:latin typeface="Quattrocento Sans" pitchFamily="34" charset="0"/>
+                <a:ea typeface="Quattrocento Sans" pitchFamily="34" charset="-122"/>
+                <a:cs typeface="Quattrocento Sans" pitchFamily="34" charset="-120"/>
+              </a:rPr>
+              <a:t>, </a:t>
+            </a:r>
+            <a:r>
+              <a:rPr lang="en-US" sz="2200" b="1" dirty="0">
+                <a:solidFill>
+                  <a:srgbClr val="FFFFFF"/>
+                </a:solidFill>
+                <a:latin typeface="Quattrocento Sans" pitchFamily="34" charset="0"/>
+                <a:ea typeface="Quattrocento Sans" pitchFamily="34" charset="-122"/>
+                <a:cs typeface="Quattrocento Sans" pitchFamily="34" charset="-120"/>
+              </a:rPr>
+              <a:t>document thoroughly</a:t>
+            </a:r>
+            <a:r>
+              <a:rPr lang="en-US" sz="2200" dirty="0">
+                <a:solidFill>
+                  <a:srgbClr val="FFFFFF"/>
+                </a:solidFill>
+                <a:latin typeface="Quattrocento Sans" pitchFamily="34" charset="0"/>
+                <a:ea typeface="Quattrocento Sans" pitchFamily="34" charset="-122"/>
+                <a:cs typeface="Quattrocento Sans" pitchFamily="34" charset="-120"/>
+              </a:rPr>
+              <a:t>,</a:t>
+            </a:r>
+            <a:endParaRPr lang="en-US" sz="2200" dirty="0"/>
+          </a:p>
+          <a:p>
             <a:pPr algn="ctr">
               <a:lnSpc>
                 <a:spcPct val="160000"/>
@@ -14273,16 +14123,8 @@
                 <a:ea typeface="Quattrocento Sans" pitchFamily="34" charset="-122"/>
                 <a:cs typeface="Quattrocento Sans" pitchFamily="34" charset="-120"/>
               </a:rPr>
-              <a:t>,</a:t>
-            </a:r>
-            <a:endParaRPr lang="en-US" sz="2200" dirty="0"/>
-          </a:p>
-          <a:p>
-            <a:pPr algn="ctr">
-              <a:lnSpc>
-                <a:spcPct val="160000"/>
-              </a:lnSpc>
-            </a:pPr>
+              <a:t>and always </a:t>
+            </a:r>
             <a:r>
               <a:rPr lang="en-US" sz="2200" b="1" dirty="0">
                 <a:solidFill>
@@ -14292,96 +14134,8 @@
                 <a:ea typeface="Quattrocento Sans" pitchFamily="34" charset="-122"/>
                 <a:cs typeface="Quattrocento Sans" pitchFamily="34" charset="-120"/>
               </a:rPr>
-              <a:t>version wisely</a:t>
-            </a:r>
-            <a:pPr algn="ctr">
-              <a:lnSpc>
-                <a:spcPct val="160000"/>
-              </a:lnSpc>
-            </a:pPr>
-            <a:r>
-              <a:rPr lang="en-US" sz="2200" dirty="0">
-                <a:solidFill>
-                  <a:srgbClr val="FFFFFF"/>
-                </a:solidFill>
-                <a:latin typeface="Quattrocento Sans" pitchFamily="34" charset="0"/>
-                <a:ea typeface="Quattrocento Sans" pitchFamily="34" charset="-122"/>
-                <a:cs typeface="Quattrocento Sans" pitchFamily="34" charset="-120"/>
-              </a:rPr>
-              <a:t>, </a:t>
-            </a:r>
-            <a:pPr algn="ctr">
-              <a:lnSpc>
-                <a:spcPct val="160000"/>
-              </a:lnSpc>
-            </a:pPr>
-            <a:r>
-              <a:rPr lang="en-US" sz="2200" b="1" dirty="0">
-                <a:solidFill>
-                  <a:srgbClr val="FFFFFF"/>
-                </a:solidFill>
-                <a:latin typeface="Quattrocento Sans" pitchFamily="34" charset="0"/>
-                <a:ea typeface="Quattrocento Sans" pitchFamily="34" charset="-122"/>
-                <a:cs typeface="Quattrocento Sans" pitchFamily="34" charset="-120"/>
-              </a:rPr>
-              <a:t>document thoroughly</a:t>
-            </a:r>
-            <a:pPr algn="ctr">
-              <a:lnSpc>
-                <a:spcPct val="160000"/>
-              </a:lnSpc>
-            </a:pPr>
-            <a:r>
-              <a:rPr lang="en-US" sz="2200" dirty="0">
-                <a:solidFill>
-                  <a:srgbClr val="FFFFFF"/>
-                </a:solidFill>
-                <a:latin typeface="Quattrocento Sans" pitchFamily="34" charset="0"/>
-                <a:ea typeface="Quattrocento Sans" pitchFamily="34" charset="-122"/>
-                <a:cs typeface="Quattrocento Sans" pitchFamily="34" charset="-120"/>
-              </a:rPr>
-              <a:t>,</a:t>
-            </a:r>
-            <a:endParaRPr lang="en-US" sz="2200" dirty="0"/>
-          </a:p>
-          <a:p>
-            <a:pPr algn="ctr">
-              <a:lnSpc>
-                <a:spcPct val="160000"/>
-              </a:lnSpc>
-            </a:pPr>
-            <a:r>
-              <a:rPr lang="en-US" sz="2200" dirty="0">
-                <a:solidFill>
-                  <a:srgbClr val="FFFFFF"/>
-                </a:solidFill>
-                <a:latin typeface="Quattrocento Sans" pitchFamily="34" charset="0"/>
-                <a:ea typeface="Quattrocento Sans" pitchFamily="34" charset="-122"/>
-                <a:cs typeface="Quattrocento Sans" pitchFamily="34" charset="-120"/>
-              </a:rPr>
-              <a:t>and always </a:t>
-            </a:r>
-            <a:pPr algn="ctr">
-              <a:lnSpc>
-                <a:spcPct val="160000"/>
-              </a:lnSpc>
-            </a:pPr>
-            <a:r>
-              <a:rPr lang="en-US" sz="2200" b="1" dirty="0">
-                <a:solidFill>
-                  <a:srgbClr val="FFFFFF"/>
-                </a:solidFill>
-                <a:latin typeface="Quattrocento Sans" pitchFamily="34" charset="0"/>
-                <a:ea typeface="Quattrocento Sans" pitchFamily="34" charset="-122"/>
-                <a:cs typeface="Quattrocento Sans" pitchFamily="34" charset="-120"/>
-              </a:rPr>
               <a:t>validate &amp; optimize</a:t>
             </a:r>
-            <a:pPr algn="ctr">
-              <a:lnSpc>
-                <a:spcPct val="160000"/>
-              </a:lnSpc>
-            </a:pPr>
             <a:r>
               <a:rPr lang="en-US" sz="2200" dirty="0">
                 <a:solidFill>
@@ -14424,7 +14178,7 @@
               </a:lnSpc>
             </a:pPr>
             <a:r>
-              <a:rPr lang="en-US" sz="3200" spc="600" kern="0" dirty="0">
+              <a:rPr lang="en-US" sz="3200" kern="0" spc="600" dirty="0">
                 <a:solidFill>
                   <a:srgbClr val="D4943A"/>
                 </a:solidFill>
@@ -14445,7 +14199,6 @@
   </p:clrMapOvr>
   <p:transition>
     <p:fade/>
-    <p:spd val="med"/>
   </p:transition>
 </p:sld>
 </file>
@@ -14458,6 +14211,7 @@
         <a:solidFill>
           <a:srgbClr val="F5F3EF"/>
         </a:solidFill>
+        <a:effectLst/>
       </p:bgPr>
     </p:bg>
     <p:spTree>
@@ -14501,7 +14255,7 @@
               </a:lnSpc>
             </a:pPr>
             <a:r>
-              <a:rPr lang="en-US" sz="1300" spc="200" kern="0" dirty="0">
+              <a:rPr lang="en-US" sz="1300" kern="0" spc="200" dirty="0">
                 <a:solidFill>
                   <a:srgbClr val="8A9B8C"/>
                 </a:solidFill>
@@ -14575,6 +14329,13 @@
           </a:solidFill>
           <a:ln/>
         </p:spPr>
+        <p:txBody>
+          <a:bodyPr/>
+          <a:lstStyle/>
+          <a:p>
+            <a:endParaRPr lang="en-US"/>
+          </a:p>
+        </p:txBody>
       </p:sp>
       <p:sp>
         <p:nvSpPr>
@@ -14597,6 +14358,13 @@
           </a:solidFill>
           <a:ln/>
         </p:spPr>
+        <p:txBody>
+          <a:bodyPr/>
+          <a:lstStyle/>
+          <a:p>
+            <a:endParaRPr lang="en-US"/>
+          </a:p>
+        </p:txBody>
       </p:sp>
       <p:sp>
         <p:nvSpPr>
@@ -14742,6 +14510,13 @@
           </a:solidFill>
           <a:ln/>
         </p:spPr>
+        <p:txBody>
+          <a:bodyPr/>
+          <a:lstStyle/>
+          <a:p>
+            <a:endParaRPr lang="en-US"/>
+          </a:p>
+        </p:txBody>
       </p:sp>
       <p:sp>
         <p:nvSpPr>
@@ -14887,6 +14662,13 @@
           </a:solidFill>
           <a:ln/>
         </p:spPr>
+        <p:txBody>
+          <a:bodyPr/>
+          <a:lstStyle/>
+          <a:p>
+            <a:endParaRPr lang="en-US"/>
+          </a:p>
+        </p:txBody>
       </p:sp>
       <p:sp>
         <p:nvSpPr>
@@ -15032,6 +14814,13 @@
           </a:solidFill>
           <a:ln/>
         </p:spPr>
+        <p:txBody>
+          <a:bodyPr/>
+          <a:lstStyle/>
+          <a:p>
+            <a:endParaRPr lang="en-US"/>
+          </a:p>
+        </p:txBody>
       </p:sp>
       <p:sp>
         <p:nvSpPr>
@@ -15163,7 +14952,6 @@
   </p:clrMapOvr>
   <p:transition>
     <p:fade/>
-    <p:spd val="med"/>
   </p:transition>
 </p:sld>
 </file>
@@ -15187,15 +14975,15 @@
       </p:grpSpPr>
       <p:pic>
         <p:nvPicPr>
-          <p:cNvPr id="2" name="Image 0" descr="https://kimi-img.moonshot.cn/pub/slides/okc/r3tmzt32f22la/mnt/agents/output/api_design/images/7_Abstract_network_connections_with.png">    </p:cNvPr>
+          <p:cNvPr id="2" name="Image 0" descr="https://kimi-img.moonshot.cn/pub/slides/okc/r3tmzt32f22la/mnt/agents/output/api_design/images/7_Abstract_network_connections_with.png"/>
           <p:cNvPicPr>
             <a:picLocks noChangeAspect="1"/>
           </p:cNvPicPr>
           <p:nvPr/>
         </p:nvPicPr>
         <p:blipFill>
-          <a:blip r:embed="rId1"/>
-          <a:srcRect l="160" r="160" t="0" b="0"/>
+          <a:blip r:embed="rId3"/>
+          <a:srcRect l="160" r="160"/>
           <a:stretch/>
         </p:blipFill>
         <p:spPr>
@@ -15222,7 +15010,7 @@
           <a:prstGeom prst="rect">
             <a:avLst/>
           </a:prstGeom>
-          <a:gradFill rotWithShape="1" flip="none">
+          <a:gradFill flip="none" rotWithShape="1">
             <a:gsLst>
               <a:gs pos="0">
                 <a:srgbClr val="1B4D4D">
@@ -15246,6 +15034,13 @@
             <a:prstDash val="solid"/>
           </a:ln>
         </p:spPr>
+        <p:txBody>
+          <a:bodyPr/>
+          <a:lstStyle/>
+          <a:p>
+            <a:endParaRPr lang="en-US"/>
+          </a:p>
+        </p:txBody>
       </p:sp>
       <p:sp>
         <p:nvSpPr>
@@ -15307,6 +15102,13 @@
           </a:solidFill>
           <a:ln/>
         </p:spPr>
+        <p:txBody>
+          <a:bodyPr/>
+          <a:lstStyle/>
+          <a:p>
+            <a:endParaRPr lang="en-US"/>
+          </a:p>
+        </p:txBody>
       </p:sp>
       <p:sp>
         <p:nvSpPr>
@@ -15335,7 +15137,7 @@
               </a:lnSpc>
             </a:pPr>
             <a:r>
-              <a:rPr lang="en-US" sz="4000" spc="400" kern="0" dirty="0">
+              <a:rPr lang="en-US" sz="4000" kern="0" spc="400" dirty="0">
                 <a:solidFill>
                   <a:srgbClr val="FFFFFF"/>
                 </a:solidFill>
@@ -15397,7 +15199,6 @@
   </p:clrMapOvr>
   <p:transition>
     <p:fade/>
-    <p:spd val="med"/>
   </p:transition>
 </p:sld>
 </file>
@@ -15410,6 +15211,7 @@
         <a:solidFill>
           <a:srgbClr val="F5F3EF"/>
         </a:solidFill>
+        <a:effectLst/>
       </p:bgPr>
     </p:bg>
     <p:spTree>
@@ -15453,7 +15255,7 @@
               </a:lnSpc>
             </a:pPr>
             <a:r>
-              <a:rPr lang="en-US" sz="1300" spc="200" kern="0" dirty="0">
+              <a:rPr lang="en-US" sz="1300" kern="0" spc="200" dirty="0">
                 <a:solidFill>
                   <a:srgbClr val="8A9B8C"/>
                 </a:solidFill>
@@ -15527,6 +15329,13 @@
           </a:solidFill>
           <a:ln/>
         </p:spPr>
+        <p:txBody>
+          <a:bodyPr/>
+          <a:lstStyle/>
+          <a:p>
+            <a:endParaRPr lang="en-US"/>
+          </a:p>
+        </p:txBody>
       </p:sp>
       <p:sp>
         <p:nvSpPr>
@@ -15549,6 +15358,13 @@
           </a:solidFill>
           <a:ln/>
         </p:spPr>
+        <p:txBody>
+          <a:bodyPr/>
+          <a:lstStyle/>
+          <a:p>
+            <a:endParaRPr lang="en-US"/>
+          </a:p>
+        </p:txBody>
       </p:sp>
       <p:sp>
         <p:nvSpPr>
@@ -15569,6 +15385,13 @@
           </a:solidFill>
           <a:ln/>
         </p:spPr>
+        <p:txBody>
+          <a:bodyPr/>
+          <a:lstStyle/>
+          <a:p>
+            <a:endParaRPr lang="en-US"/>
+          </a:p>
+        </p:txBody>
       </p:sp>
       <p:sp>
         <p:nvSpPr>
@@ -15597,7 +15420,7 @@
               </a:lnSpc>
             </a:pPr>
             <a:r>
-              <a:rPr lang="en-US" sz="1300" spc="200" kern="0" dirty="0">
+              <a:rPr lang="en-US" sz="1300" kern="0" spc="200" dirty="0">
                 <a:solidFill>
                   <a:srgbClr val="D4943A"/>
                 </a:solidFill>
@@ -15648,12 +15471,160 @@
               </a:rPr>
               <a:t>An </a:t>
             </a:r>
+            <a:r>
+              <a:rPr lang="en-US" sz="1700" b="1" dirty="0">
+                <a:solidFill>
+                  <a:srgbClr val="1C1C1E"/>
+                </a:solidFill>
+                <a:latin typeface="Quattrocento Sans" pitchFamily="34" charset="0"/>
+                <a:ea typeface="Quattrocento Sans" pitchFamily="34" charset="-122"/>
+                <a:cs typeface="Quattrocento Sans" pitchFamily="34" charset="-120"/>
+              </a:rPr>
+              <a:t>API</a:t>
+            </a:r>
+            <a:r>
+              <a:rPr lang="en-US" sz="1700" dirty="0">
+                <a:solidFill>
+                  <a:srgbClr val="1C1C1E"/>
+                </a:solidFill>
+                <a:latin typeface="Quattrocento Sans" pitchFamily="34" charset="0"/>
+                <a:ea typeface="Quattrocento Sans" pitchFamily="34" charset="-122"/>
+                <a:cs typeface="Quattrocento Sans" pitchFamily="34" charset="-120"/>
+              </a:rPr>
+              <a:t> (Application Programming Interface) is a set of rules that allows different software applications to </a:t>
+            </a:r>
+            <a:r>
+              <a:rPr lang="en-US" sz="1700" b="1" dirty="0">
+                <a:solidFill>
+                  <a:srgbClr val="1C1C1E"/>
+                </a:solidFill>
+                <a:latin typeface="Quattrocento Sans" pitchFamily="34" charset="0"/>
+                <a:ea typeface="Quattrocento Sans" pitchFamily="34" charset="-122"/>
+                <a:cs typeface="Quattrocento Sans" pitchFamily="34" charset="-120"/>
+              </a:rPr>
+              <a:t>communicate</a:t>
+            </a:r>
+            <a:r>
+              <a:rPr lang="en-US" sz="1700" dirty="0">
+                <a:solidFill>
+                  <a:srgbClr val="1C1C1E"/>
+                </a:solidFill>
+                <a:latin typeface="Quattrocento Sans" pitchFamily="34" charset="0"/>
+                <a:ea typeface="Quattrocento Sans" pitchFamily="34" charset="-122"/>
+                <a:cs typeface="Quattrocento Sans" pitchFamily="34" charset="-120"/>
+              </a:rPr>
+              <a:t> with each other.</a:t>
+            </a:r>
+            <a:endParaRPr lang="en-US" sz="1700" dirty="0"/>
+          </a:p>
+        </p:txBody>
+      </p:sp>
+      <p:sp>
+        <p:nvSpPr>
+          <p:cNvPr id="9" name="Text 7"/>
+          <p:cNvSpPr/>
+          <p:nvPr/>
+        </p:nvSpPr>
+        <p:spPr>
+          <a:xfrm>
+            <a:off x="762000" y="3810000"/>
+            <a:ext cx="2540000" cy="279400"/>
+          </a:xfrm>
+          <a:prstGeom prst="rect">
+            <a:avLst/>
+          </a:prstGeom>
+          <a:noFill/>
+          <a:ln/>
+        </p:spPr>
+        <p:txBody>
+          <a:bodyPr wrap="none" lIns="0" tIns="0" rIns="0" bIns="0" rtlCol="0" anchor="ctr"/>
+          <a:lstStyle/>
+          <a:p>
+            <a:pPr algn="l">
+              <a:lnSpc>
+                <a:spcPct val="120000"/>
+              </a:lnSpc>
+            </a:pPr>
+            <a:r>
+              <a:rPr lang="en-US" sz="1300" kern="0" spc="200" dirty="0">
+                <a:solidFill>
+                  <a:srgbClr val="D4943A"/>
+                </a:solidFill>
+                <a:latin typeface="Liter" pitchFamily="34" charset="0"/>
+                <a:ea typeface="Liter" pitchFamily="34" charset="-122"/>
+                <a:cs typeface="Liter" pitchFamily="34" charset="-120"/>
+              </a:rPr>
+              <a:t>KEY POINTS</a:t>
+            </a:r>
+            <a:endParaRPr lang="en-US" sz="1300" dirty="0"/>
+          </a:p>
+        </p:txBody>
+      </p:sp>
+      <p:sp>
+        <p:nvSpPr>
+          <p:cNvPr id="10" name="Shape 8"/>
+          <p:cNvSpPr/>
+          <p:nvPr/>
+        </p:nvSpPr>
+        <p:spPr>
+          <a:xfrm>
+            <a:off x="762000" y="4318000"/>
+            <a:ext cx="101600" cy="101600"/>
+          </a:xfrm>
+          <a:prstGeom prst="rect">
+            <a:avLst/>
+          </a:prstGeom>
+          <a:solidFill>
+            <a:srgbClr val="1B4D4D"/>
+          </a:solidFill>
+          <a:ln/>
+        </p:spPr>
+        <p:txBody>
+          <a:bodyPr/>
+          <a:lstStyle/>
+          <a:p>
+            <a:endParaRPr lang="en-US"/>
+          </a:p>
+        </p:txBody>
+      </p:sp>
+      <p:sp>
+        <p:nvSpPr>
+          <p:cNvPr id="11" name="Text 9"/>
+          <p:cNvSpPr/>
+          <p:nvPr/>
+        </p:nvSpPr>
+        <p:spPr>
+          <a:xfrm>
+            <a:off x="1016000" y="4216400"/>
+            <a:ext cx="8128000" cy="762000"/>
+          </a:xfrm>
+          <a:prstGeom prst="rect">
+            <a:avLst/>
+          </a:prstGeom>
+          <a:noFill/>
+          <a:ln/>
+        </p:spPr>
+        <p:txBody>
+          <a:bodyPr wrap="square" lIns="0" tIns="0" rIns="0" bIns="0" rtlCol="0" anchor="t"/>
+          <a:lstStyle/>
+          <a:p>
             <a:pPr algn="l">
               <a:lnSpc>
                 <a:spcPct val="150000"/>
               </a:lnSpc>
             </a:pPr>
             <a:r>
+              <a:rPr lang="en-US" sz="1700" dirty="0">
+                <a:solidFill>
+                  <a:srgbClr val="1C1C1E"/>
+                </a:solidFill>
+                <a:latin typeface="Quattrocento Sans" pitchFamily="34" charset="0"/>
+                <a:ea typeface="Quattrocento Sans" pitchFamily="34" charset="-122"/>
+                <a:cs typeface="Quattrocento Sans" pitchFamily="34" charset="-120"/>
+              </a:rPr>
+              <a:t>Defines </a:t>
+            </a:r>
+            <a:r>
               <a:rPr lang="en-US" sz="1700" b="1" dirty="0">
                 <a:solidFill>
                   <a:srgbClr val="1C1C1E"/>
@@ -15662,8 +15633,71 @@
                 <a:ea typeface="Quattrocento Sans" pitchFamily="34" charset="-122"/>
                 <a:cs typeface="Quattrocento Sans" pitchFamily="34" charset="-120"/>
               </a:rPr>
-              <a:t>API</a:t>
-            </a:r>
+              <a:t>how requests and responses</a:t>
+            </a:r>
+            <a:r>
+              <a:rPr lang="en-US" sz="1700" dirty="0">
+                <a:solidFill>
+                  <a:srgbClr val="1C1C1E"/>
+                </a:solidFill>
+                <a:latin typeface="Quattrocento Sans" pitchFamily="34" charset="0"/>
+                <a:ea typeface="Quattrocento Sans" pitchFamily="34" charset="-122"/>
+                <a:cs typeface="Quattrocento Sans" pitchFamily="34" charset="-120"/>
+              </a:rPr>
+              <a:t> should be structured between systems</a:t>
+            </a:r>
+            <a:endParaRPr lang="en-US" sz="1700" dirty="0"/>
+          </a:p>
+        </p:txBody>
+      </p:sp>
+      <p:sp>
+        <p:nvSpPr>
+          <p:cNvPr id="12" name="Shape 10"/>
+          <p:cNvSpPr/>
+          <p:nvPr/>
+        </p:nvSpPr>
+        <p:spPr>
+          <a:xfrm>
+            <a:off x="762000" y="5080000"/>
+            <a:ext cx="101600" cy="101600"/>
+          </a:xfrm>
+          <a:prstGeom prst="rect">
+            <a:avLst/>
+          </a:prstGeom>
+          <a:solidFill>
+            <a:srgbClr val="1B4D4D"/>
+          </a:solidFill>
+          <a:ln/>
+        </p:spPr>
+        <p:txBody>
+          <a:bodyPr/>
+          <a:lstStyle/>
+          <a:p>
+            <a:endParaRPr lang="en-US"/>
+          </a:p>
+        </p:txBody>
+      </p:sp>
+      <p:sp>
+        <p:nvSpPr>
+          <p:cNvPr id="13" name="Text 11"/>
+          <p:cNvSpPr/>
+          <p:nvPr/>
+        </p:nvSpPr>
+        <p:spPr>
+          <a:xfrm>
+            <a:off x="1016000" y="4978400"/>
+            <a:ext cx="8128000" cy="762000"/>
+          </a:xfrm>
+          <a:prstGeom prst="rect">
+            <a:avLst/>
+          </a:prstGeom>
+          <a:noFill/>
+          <a:ln/>
+        </p:spPr>
+        <p:txBody>
+          <a:bodyPr wrap="square" lIns="0" tIns="0" rIns="0" bIns="0" rtlCol="0" anchor="t"/>
+          <a:lstStyle/>
+          <a:p>
             <a:pPr algn="l">
               <a:lnSpc>
                 <a:spcPct val="150000"/>
@@ -15678,14 +15712,99 @@
                 <a:ea typeface="Quattrocento Sans" pitchFamily="34" charset="-122"/>
                 <a:cs typeface="Quattrocento Sans" pitchFamily="34" charset="-120"/>
               </a:rPr>
-              <a:t> (Application Programming Interface) is a set of rules that allows different software applications to </a:t>
-            </a:r>
+              <a:t>Enables </a:t>
+            </a:r>
+            <a:r>
+              <a:rPr lang="en-US" sz="1700" b="1" dirty="0">
+                <a:solidFill>
+                  <a:srgbClr val="1C1C1E"/>
+                </a:solidFill>
+                <a:latin typeface="Quattrocento Sans" pitchFamily="34" charset="0"/>
+                <a:ea typeface="Quattrocento Sans" pitchFamily="34" charset="-122"/>
+                <a:cs typeface="Quattrocento Sans" pitchFamily="34" charset="-120"/>
+              </a:rPr>
+              <a:t>seamless integration</a:t>
+            </a:r>
+            <a:r>
+              <a:rPr lang="en-US" sz="1700" dirty="0">
+                <a:solidFill>
+                  <a:srgbClr val="1C1C1E"/>
+                </a:solidFill>
+                <a:latin typeface="Quattrocento Sans" pitchFamily="34" charset="0"/>
+                <a:ea typeface="Quattrocento Sans" pitchFamily="34" charset="-122"/>
+                <a:cs typeface="Quattrocento Sans" pitchFamily="34" charset="-120"/>
+              </a:rPr>
+              <a:t> between different software services</a:t>
+            </a:r>
+            <a:endParaRPr lang="en-US" sz="1700" dirty="0"/>
+          </a:p>
+        </p:txBody>
+      </p:sp>
+      <p:sp>
+        <p:nvSpPr>
+          <p:cNvPr id="14" name="Shape 12"/>
+          <p:cNvSpPr/>
+          <p:nvPr/>
+        </p:nvSpPr>
+        <p:spPr>
+          <a:xfrm>
+            <a:off x="762000" y="5842000"/>
+            <a:ext cx="101600" cy="101600"/>
+          </a:xfrm>
+          <a:prstGeom prst="rect">
+            <a:avLst/>
+          </a:prstGeom>
+          <a:solidFill>
+            <a:srgbClr val="1B4D4D"/>
+          </a:solidFill>
+          <a:ln/>
+        </p:spPr>
+        <p:txBody>
+          <a:bodyPr/>
+          <a:lstStyle/>
+          <a:p>
+            <a:endParaRPr lang="en-US"/>
+          </a:p>
+        </p:txBody>
+      </p:sp>
+      <p:sp>
+        <p:nvSpPr>
+          <p:cNvPr id="15" name="Text 13"/>
+          <p:cNvSpPr/>
+          <p:nvPr/>
+        </p:nvSpPr>
+        <p:spPr>
+          <a:xfrm>
+            <a:off x="1016000" y="5740400"/>
+            <a:ext cx="8128000" cy="762000"/>
+          </a:xfrm>
+          <a:prstGeom prst="rect">
+            <a:avLst/>
+          </a:prstGeom>
+          <a:noFill/>
+          <a:ln/>
+        </p:spPr>
+        <p:txBody>
+          <a:bodyPr wrap="square" lIns="0" tIns="0" rIns="0" bIns="0" rtlCol="0" anchor="t"/>
+          <a:lstStyle/>
+          <a:p>
             <a:pPr algn="l">
               <a:lnSpc>
                 <a:spcPct val="150000"/>
               </a:lnSpc>
             </a:pPr>
             <a:r>
+              <a:rPr lang="en-US" sz="1700" dirty="0">
+                <a:solidFill>
+                  <a:srgbClr val="1C1C1E"/>
+                </a:solidFill>
+                <a:latin typeface="Quattrocento Sans" pitchFamily="34" charset="0"/>
+                <a:ea typeface="Quattrocento Sans" pitchFamily="34" charset="-122"/>
+                <a:cs typeface="Quattrocento Sans" pitchFamily="34" charset="-120"/>
+              </a:rPr>
+              <a:t>Acts as a </a:t>
+            </a:r>
+            <a:r>
               <a:rPr lang="en-US" sz="1700" b="1" dirty="0">
                 <a:solidFill>
                   <a:srgbClr val="1C1C1E"/>
@@ -15694,333 +15813,8 @@
                 <a:ea typeface="Quattrocento Sans" pitchFamily="34" charset="-122"/>
                 <a:cs typeface="Quattrocento Sans" pitchFamily="34" charset="-120"/>
               </a:rPr>
-              <a:t>communicate</a:t>
-            </a:r>
-            <a:pPr algn="l">
-              <a:lnSpc>
-                <a:spcPct val="150000"/>
-              </a:lnSpc>
-            </a:pPr>
-            <a:r>
-              <a:rPr lang="en-US" sz="1700" dirty="0">
-                <a:solidFill>
-                  <a:srgbClr val="1C1C1E"/>
-                </a:solidFill>
-                <a:latin typeface="Quattrocento Sans" pitchFamily="34" charset="0"/>
-                <a:ea typeface="Quattrocento Sans" pitchFamily="34" charset="-122"/>
-                <a:cs typeface="Quattrocento Sans" pitchFamily="34" charset="-120"/>
-              </a:rPr>
-              <a:t> with each other.</a:t>
-            </a:r>
-            <a:endParaRPr lang="en-US" sz="1700" dirty="0"/>
-          </a:p>
-        </p:txBody>
-      </p:sp>
-      <p:sp>
-        <p:nvSpPr>
-          <p:cNvPr id="9" name="Text 7"/>
-          <p:cNvSpPr/>
-          <p:nvPr/>
-        </p:nvSpPr>
-        <p:spPr>
-          <a:xfrm>
-            <a:off x="762000" y="3810000"/>
-            <a:ext cx="2540000" cy="279400"/>
-          </a:xfrm>
-          <a:prstGeom prst="rect">
-            <a:avLst/>
-          </a:prstGeom>
-          <a:noFill/>
-          <a:ln/>
-        </p:spPr>
-        <p:txBody>
-          <a:bodyPr wrap="none" lIns="0" tIns="0" rIns="0" bIns="0" rtlCol="0" anchor="ctr"/>
-          <a:lstStyle/>
-          <a:p>
-            <a:pPr algn="l">
-              <a:lnSpc>
-                <a:spcPct val="120000"/>
-              </a:lnSpc>
-            </a:pPr>
-            <a:r>
-              <a:rPr lang="en-US" sz="1300" spc="200" kern="0" dirty="0">
-                <a:solidFill>
-                  <a:srgbClr val="D4943A"/>
-                </a:solidFill>
-                <a:latin typeface="Liter" pitchFamily="34" charset="0"/>
-                <a:ea typeface="Liter" pitchFamily="34" charset="-122"/>
-                <a:cs typeface="Liter" pitchFamily="34" charset="-120"/>
-              </a:rPr>
-              <a:t>KEY POINTS</a:t>
-            </a:r>
-            <a:endParaRPr lang="en-US" sz="1300" dirty="0"/>
-          </a:p>
-        </p:txBody>
-      </p:sp>
-      <p:sp>
-        <p:nvSpPr>
-          <p:cNvPr id="10" name="Shape 8"/>
-          <p:cNvSpPr/>
-          <p:nvPr/>
-        </p:nvSpPr>
-        <p:spPr>
-          <a:xfrm>
-            <a:off x="762000" y="4318000"/>
-            <a:ext cx="101600" cy="101600"/>
-          </a:xfrm>
-          <a:prstGeom prst="rect">
-            <a:avLst/>
-          </a:prstGeom>
-          <a:solidFill>
-            <a:srgbClr val="1B4D4D"/>
-          </a:solidFill>
-          <a:ln/>
-        </p:spPr>
-      </p:sp>
-      <p:sp>
-        <p:nvSpPr>
-          <p:cNvPr id="11" name="Text 9"/>
-          <p:cNvSpPr/>
-          <p:nvPr/>
-        </p:nvSpPr>
-        <p:spPr>
-          <a:xfrm>
-            <a:off x="1016000" y="4216400"/>
-            <a:ext cx="8128000" cy="762000"/>
-          </a:xfrm>
-          <a:prstGeom prst="rect">
-            <a:avLst/>
-          </a:prstGeom>
-          <a:noFill/>
-          <a:ln/>
-        </p:spPr>
-        <p:txBody>
-          <a:bodyPr wrap="square" lIns="0" tIns="0" rIns="0" bIns="0" rtlCol="0" anchor="t"/>
-          <a:lstStyle/>
-          <a:p>
-            <a:pPr algn="l">
-              <a:lnSpc>
-                <a:spcPct val="150000"/>
-              </a:lnSpc>
-            </a:pPr>
-            <a:r>
-              <a:rPr lang="en-US" sz="1700" dirty="0">
-                <a:solidFill>
-                  <a:srgbClr val="1C1C1E"/>
-                </a:solidFill>
-                <a:latin typeface="Quattrocento Sans" pitchFamily="34" charset="0"/>
-                <a:ea typeface="Quattrocento Sans" pitchFamily="34" charset="-122"/>
-                <a:cs typeface="Quattrocento Sans" pitchFamily="34" charset="-120"/>
-              </a:rPr>
-              <a:t>Defines </a:t>
-            </a:r>
-            <a:pPr algn="l">
-              <a:lnSpc>
-                <a:spcPct val="150000"/>
-              </a:lnSpc>
-            </a:pPr>
-            <a:r>
-              <a:rPr lang="en-US" sz="1700" b="1" dirty="0">
-                <a:solidFill>
-                  <a:srgbClr val="1C1C1E"/>
-                </a:solidFill>
-                <a:latin typeface="Quattrocento Sans" pitchFamily="34" charset="0"/>
-                <a:ea typeface="Quattrocento Sans" pitchFamily="34" charset="-122"/>
-                <a:cs typeface="Quattrocento Sans" pitchFamily="34" charset="-120"/>
-              </a:rPr>
-              <a:t>how requests and responses</a:t>
-            </a:r>
-            <a:pPr algn="l">
-              <a:lnSpc>
-                <a:spcPct val="150000"/>
-              </a:lnSpc>
-            </a:pPr>
-            <a:r>
-              <a:rPr lang="en-US" sz="1700" dirty="0">
-                <a:solidFill>
-                  <a:srgbClr val="1C1C1E"/>
-                </a:solidFill>
-                <a:latin typeface="Quattrocento Sans" pitchFamily="34" charset="0"/>
-                <a:ea typeface="Quattrocento Sans" pitchFamily="34" charset="-122"/>
-                <a:cs typeface="Quattrocento Sans" pitchFamily="34" charset="-120"/>
-              </a:rPr>
-              <a:t> should be structured between systems</a:t>
-            </a:r>
-            <a:endParaRPr lang="en-US" sz="1700" dirty="0"/>
-          </a:p>
-        </p:txBody>
-      </p:sp>
-      <p:sp>
-        <p:nvSpPr>
-          <p:cNvPr id="12" name="Shape 10"/>
-          <p:cNvSpPr/>
-          <p:nvPr/>
-        </p:nvSpPr>
-        <p:spPr>
-          <a:xfrm>
-            <a:off x="762000" y="5080000"/>
-            <a:ext cx="101600" cy="101600"/>
-          </a:xfrm>
-          <a:prstGeom prst="rect">
-            <a:avLst/>
-          </a:prstGeom>
-          <a:solidFill>
-            <a:srgbClr val="1B4D4D"/>
-          </a:solidFill>
-          <a:ln/>
-        </p:spPr>
-      </p:sp>
-      <p:sp>
-        <p:nvSpPr>
-          <p:cNvPr id="13" name="Text 11"/>
-          <p:cNvSpPr/>
-          <p:nvPr/>
-        </p:nvSpPr>
-        <p:spPr>
-          <a:xfrm>
-            <a:off x="1016000" y="4978400"/>
-            <a:ext cx="8128000" cy="762000"/>
-          </a:xfrm>
-          <a:prstGeom prst="rect">
-            <a:avLst/>
-          </a:prstGeom>
-          <a:noFill/>
-          <a:ln/>
-        </p:spPr>
-        <p:txBody>
-          <a:bodyPr wrap="square" lIns="0" tIns="0" rIns="0" bIns="0" rtlCol="0" anchor="t"/>
-          <a:lstStyle/>
-          <a:p>
-            <a:pPr algn="l">
-              <a:lnSpc>
-                <a:spcPct val="150000"/>
-              </a:lnSpc>
-            </a:pPr>
-            <a:r>
-              <a:rPr lang="en-US" sz="1700" dirty="0">
-                <a:solidFill>
-                  <a:srgbClr val="1C1C1E"/>
-                </a:solidFill>
-                <a:latin typeface="Quattrocento Sans" pitchFamily="34" charset="0"/>
-                <a:ea typeface="Quattrocento Sans" pitchFamily="34" charset="-122"/>
-                <a:cs typeface="Quattrocento Sans" pitchFamily="34" charset="-120"/>
-              </a:rPr>
-              <a:t>Enables </a:t>
-            </a:r>
-            <a:pPr algn="l">
-              <a:lnSpc>
-                <a:spcPct val="150000"/>
-              </a:lnSpc>
-            </a:pPr>
-            <a:r>
-              <a:rPr lang="en-US" sz="1700" b="1" dirty="0">
-                <a:solidFill>
-                  <a:srgbClr val="1C1C1E"/>
-                </a:solidFill>
-                <a:latin typeface="Quattrocento Sans" pitchFamily="34" charset="0"/>
-                <a:ea typeface="Quattrocento Sans" pitchFamily="34" charset="-122"/>
-                <a:cs typeface="Quattrocento Sans" pitchFamily="34" charset="-120"/>
-              </a:rPr>
-              <a:t>seamless integration</a:t>
-            </a:r>
-            <a:pPr algn="l">
-              <a:lnSpc>
-                <a:spcPct val="150000"/>
-              </a:lnSpc>
-            </a:pPr>
-            <a:r>
-              <a:rPr lang="en-US" sz="1700" dirty="0">
-                <a:solidFill>
-                  <a:srgbClr val="1C1C1E"/>
-                </a:solidFill>
-                <a:latin typeface="Quattrocento Sans" pitchFamily="34" charset="0"/>
-                <a:ea typeface="Quattrocento Sans" pitchFamily="34" charset="-122"/>
-                <a:cs typeface="Quattrocento Sans" pitchFamily="34" charset="-120"/>
-              </a:rPr>
-              <a:t> between different software services</a:t>
-            </a:r>
-            <a:endParaRPr lang="en-US" sz="1700" dirty="0"/>
-          </a:p>
-        </p:txBody>
-      </p:sp>
-      <p:sp>
-        <p:nvSpPr>
-          <p:cNvPr id="14" name="Shape 12"/>
-          <p:cNvSpPr/>
-          <p:nvPr/>
-        </p:nvSpPr>
-        <p:spPr>
-          <a:xfrm>
-            <a:off x="762000" y="5842000"/>
-            <a:ext cx="101600" cy="101600"/>
-          </a:xfrm>
-          <a:prstGeom prst="rect">
-            <a:avLst/>
-          </a:prstGeom>
-          <a:solidFill>
-            <a:srgbClr val="1B4D4D"/>
-          </a:solidFill>
-          <a:ln/>
-        </p:spPr>
-      </p:sp>
-      <p:sp>
-        <p:nvSpPr>
-          <p:cNvPr id="15" name="Text 13"/>
-          <p:cNvSpPr/>
-          <p:nvPr/>
-        </p:nvSpPr>
-        <p:spPr>
-          <a:xfrm>
-            <a:off x="1016000" y="5740400"/>
-            <a:ext cx="8128000" cy="762000"/>
-          </a:xfrm>
-          <a:prstGeom prst="rect">
-            <a:avLst/>
-          </a:prstGeom>
-          <a:noFill/>
-          <a:ln/>
-        </p:spPr>
-        <p:txBody>
-          <a:bodyPr wrap="square" lIns="0" tIns="0" rIns="0" bIns="0" rtlCol="0" anchor="t"/>
-          <a:lstStyle/>
-          <a:p>
-            <a:pPr algn="l">
-              <a:lnSpc>
-                <a:spcPct val="150000"/>
-              </a:lnSpc>
-            </a:pPr>
-            <a:r>
-              <a:rPr lang="en-US" sz="1700" dirty="0">
-                <a:solidFill>
-                  <a:srgbClr val="1C1C1E"/>
-                </a:solidFill>
-                <a:latin typeface="Quattrocento Sans" pitchFamily="34" charset="0"/>
-                <a:ea typeface="Quattrocento Sans" pitchFamily="34" charset="-122"/>
-                <a:cs typeface="Quattrocento Sans" pitchFamily="34" charset="-120"/>
-              </a:rPr>
-              <a:t>Acts as a </a:t>
-            </a:r>
-            <a:pPr algn="l">
-              <a:lnSpc>
-                <a:spcPct val="150000"/>
-              </a:lnSpc>
-            </a:pPr>
-            <a:r>
-              <a:rPr lang="en-US" sz="1700" b="1" dirty="0">
-                <a:solidFill>
-                  <a:srgbClr val="1C1C1E"/>
-                </a:solidFill>
-                <a:latin typeface="Quattrocento Sans" pitchFamily="34" charset="0"/>
-                <a:ea typeface="Quattrocento Sans" pitchFamily="34" charset="-122"/>
-                <a:cs typeface="Quattrocento Sans" pitchFamily="34" charset="-120"/>
-              </a:rPr>
               <a:t>bridge</a:t>
             </a:r>
-            <a:pPr algn="l">
-              <a:lnSpc>
-                <a:spcPct val="150000"/>
-              </a:lnSpc>
-            </a:pPr>
             <a:r>
               <a:rPr lang="en-US" sz="1700" dirty="0">
                 <a:solidFill>
@@ -16057,6 +15851,13 @@
           </a:solidFill>
           <a:ln/>
         </p:spPr>
+        <p:txBody>
+          <a:bodyPr/>
+          <a:lstStyle/>
+          <a:p>
+            <a:endParaRPr lang="en-US"/>
+          </a:p>
+        </p:txBody>
       </p:sp>
       <p:sp>
         <p:nvSpPr>
@@ -16085,7 +15886,7 @@
               </a:lnSpc>
             </a:pPr>
             <a:r>
-              <a:rPr lang="en-US" sz="1400" spc="200" kern="0" dirty="0">
+              <a:rPr lang="en-US" sz="1400" kern="0" spc="200" dirty="0">
                 <a:solidFill>
                   <a:srgbClr val="D4943A"/>
                 </a:solidFill>
@@ -16127,6 +15928,13 @@
             <a:prstDash val="solid"/>
           </a:ln>
         </p:spPr>
+        <p:txBody>
+          <a:bodyPr/>
+          <a:lstStyle/>
+          <a:p>
+            <a:endParaRPr lang="en-US"/>
+          </a:p>
+        </p:txBody>
       </p:sp>
       <p:sp>
         <p:nvSpPr>
@@ -16193,6 +16001,13 @@
             <a:tailEnd type="arrow"/>
           </a:ln>
         </p:spPr>
+        <p:txBody>
+          <a:bodyPr/>
+          <a:lstStyle/>
+          <a:p>
+            <a:endParaRPr lang="en-US"/>
+          </a:p>
+        </p:txBody>
       </p:sp>
       <p:sp>
         <p:nvSpPr>
@@ -16215,6 +16030,13 @@
           </a:solidFill>
           <a:ln/>
         </p:spPr>
+        <p:txBody>
+          <a:bodyPr/>
+          <a:lstStyle/>
+          <a:p>
+            <a:endParaRPr lang="en-US"/>
+          </a:p>
+        </p:txBody>
       </p:sp>
       <p:sp>
         <p:nvSpPr>
@@ -16281,6 +16103,13 @@
             <a:tailEnd type="none"/>
           </a:ln>
         </p:spPr>
+        <p:txBody>
+          <a:bodyPr/>
+          <a:lstStyle/>
+          <a:p>
+            <a:endParaRPr lang="en-US"/>
+          </a:p>
+        </p:txBody>
       </p:sp>
       <p:sp>
         <p:nvSpPr>
@@ -16310,6 +16139,13 @@
             <a:prstDash val="solid"/>
           </a:ln>
         </p:spPr>
+        <p:txBody>
+          <a:bodyPr/>
+          <a:lstStyle/>
+          <a:p>
+            <a:endParaRPr lang="en-US"/>
+          </a:p>
+        </p:txBody>
       </p:sp>
       <p:sp>
         <p:nvSpPr>
@@ -16501,6 +16337,13 @@
             <a:tailEnd type="none"/>
           </a:ln>
         </p:spPr>
+        <p:txBody>
+          <a:bodyPr/>
+          <a:lstStyle/>
+          <a:p>
+            <a:endParaRPr lang="en-US"/>
+          </a:p>
+        </p:txBody>
       </p:sp>
     </p:spTree>
   </p:cSld>
@@ -16509,7 +16352,6 @@
   </p:clrMapOvr>
   <p:transition>
     <p:fade/>
-    <p:spd val="med"/>
   </p:transition>
 </p:sld>
 </file>
@@ -16522,6 +16364,7 @@
         <a:solidFill>
           <a:srgbClr val="F5F3EF"/>
         </a:solidFill>
+        <a:effectLst/>
       </p:bgPr>
     </p:bg>
     <p:spTree>
@@ -16565,7 +16408,7 @@
               </a:lnSpc>
             </a:pPr>
             <a:r>
-              <a:rPr lang="en-US" sz="1300" spc="200" kern="0" dirty="0">
+              <a:rPr lang="en-US" sz="1300" kern="0" spc="200" dirty="0">
                 <a:solidFill>
                   <a:srgbClr val="8A9B8C"/>
                 </a:solidFill>
@@ -16639,6 +16482,13 @@
           </a:solidFill>
           <a:ln/>
         </p:spPr>
+        <p:txBody>
+          <a:bodyPr/>
+          <a:lstStyle/>
+          <a:p>
+            <a:endParaRPr lang="en-US"/>
+          </a:p>
+        </p:txBody>
       </p:sp>
       <p:sp>
         <p:nvSpPr>
@@ -16677,11 +16527,6 @@
               </a:rPr>
               <a:t>APIs operate on a </a:t>
             </a:r>
-            <a:pPr algn="l">
-              <a:lnSpc>
-                <a:spcPct val="150000"/>
-              </a:lnSpc>
-            </a:pPr>
             <a:r>
               <a:rPr lang="en-US" sz="1700" b="1" dirty="0">
                 <a:solidFill>
@@ -16693,11 +16538,6 @@
               </a:rPr>
               <a:t>client-server model</a:t>
             </a:r>
-            <a:pPr algn="l">
-              <a:lnSpc>
-                <a:spcPct val="150000"/>
-              </a:lnSpc>
-            </a:pPr>
             <a:r>
               <a:rPr lang="en-US" sz="1700" dirty="0">
                 <a:solidFill>
@@ -16734,6 +16574,13 @@
           </a:solidFill>
           <a:ln/>
         </p:spPr>
+        <p:txBody>
+          <a:bodyPr/>
+          <a:lstStyle/>
+          <a:p>
+            <a:endParaRPr lang="en-US"/>
+          </a:p>
+        </p:txBody>
       </p:sp>
       <p:sp>
         <p:nvSpPr>
@@ -16882,6 +16729,13 @@
             <a:tailEnd type="arrow"/>
           </a:ln>
         </p:spPr>
+        <p:txBody>
+          <a:bodyPr/>
+          <a:lstStyle/>
+          <a:p>
+            <a:endParaRPr lang="en-US"/>
+          </a:p>
+        </p:txBody>
       </p:sp>
       <p:sp>
         <p:nvSpPr>
@@ -16904,6 +16758,13 @@
           </a:solidFill>
           <a:ln/>
         </p:spPr>
+        <p:txBody>
+          <a:bodyPr/>
+          <a:lstStyle/>
+          <a:p>
+            <a:endParaRPr lang="en-US"/>
+          </a:p>
+        </p:txBody>
       </p:sp>
       <p:sp>
         <p:nvSpPr>
@@ -17052,6 +16913,13 @@
             <a:tailEnd type="arrow"/>
           </a:ln>
         </p:spPr>
+        <p:txBody>
+          <a:bodyPr/>
+          <a:lstStyle/>
+          <a:p>
+            <a:endParaRPr lang="en-US"/>
+          </a:p>
+        </p:txBody>
       </p:sp>
       <p:sp>
         <p:nvSpPr>
@@ -17074,6 +16942,13 @@
           </a:solidFill>
           <a:ln/>
         </p:spPr>
+        <p:txBody>
+          <a:bodyPr/>
+          <a:lstStyle/>
+          <a:p>
+            <a:endParaRPr lang="en-US"/>
+          </a:p>
+        </p:txBody>
       </p:sp>
       <p:sp>
         <p:nvSpPr>
@@ -17222,6 +17097,13 @@
             <a:tailEnd type="arrow"/>
           </a:ln>
         </p:spPr>
+        <p:txBody>
+          <a:bodyPr/>
+          <a:lstStyle/>
+          <a:p>
+            <a:endParaRPr lang="en-US"/>
+          </a:p>
+        </p:txBody>
       </p:sp>
       <p:sp>
         <p:nvSpPr>
@@ -17244,6 +17126,13 @@
           </a:solidFill>
           <a:ln/>
         </p:spPr>
+        <p:txBody>
+          <a:bodyPr/>
+          <a:lstStyle/>
+          <a:p>
+            <a:endParaRPr lang="en-US"/>
+          </a:p>
+        </p:txBody>
       </p:sp>
       <p:sp>
         <p:nvSpPr>
@@ -17394,6 +17283,13 @@
             <a:tailEnd type="none"/>
           </a:ln>
         </p:spPr>
+        <p:txBody>
+          <a:bodyPr/>
+          <a:lstStyle/>
+          <a:p>
+            <a:endParaRPr lang="en-US"/>
+          </a:p>
+        </p:txBody>
       </p:sp>
     </p:spTree>
   </p:cSld>
@@ -17402,7 +17298,6 @@
   </p:clrMapOvr>
   <p:transition>
     <p:fade/>
-    <p:spd val="med"/>
   </p:transition>
 </p:sld>
 </file>
@@ -17415,6 +17310,7 @@
         <a:solidFill>
           <a:srgbClr val="F5F3EF"/>
         </a:solidFill>
+        <a:effectLst/>
       </p:bgPr>
     </p:bg>
     <p:spTree>
@@ -17458,7 +17354,7 @@
               </a:lnSpc>
             </a:pPr>
             <a:r>
-              <a:rPr lang="en-US" sz="1300" spc="200" kern="0" dirty="0">
+              <a:rPr lang="en-US" sz="1300" kern="0" spc="200" dirty="0">
                 <a:solidFill>
                   <a:srgbClr val="8A9B8C"/>
                 </a:solidFill>
@@ -17532,6 +17428,13 @@
           </a:solidFill>
           <a:ln/>
         </p:spPr>
+        <p:txBody>
+          <a:bodyPr/>
+          <a:lstStyle/>
+          <a:p>
+            <a:endParaRPr lang="en-US"/>
+          </a:p>
+        </p:txBody>
       </p:sp>
       <p:sp>
         <p:nvSpPr>
@@ -17554,6 +17457,13 @@
           </a:solidFill>
           <a:ln/>
         </p:spPr>
+        <p:txBody>
+          <a:bodyPr/>
+          <a:lstStyle/>
+          <a:p>
+            <a:endParaRPr lang="en-US"/>
+          </a:p>
+        </p:txBody>
       </p:sp>
       <p:sp>
         <p:nvSpPr>
@@ -17574,6 +17484,13 @@
           </a:solidFill>
           <a:ln/>
         </p:spPr>
+        <p:txBody>
+          <a:bodyPr/>
+          <a:lstStyle/>
+          <a:p>
+            <a:endParaRPr lang="en-US"/>
+          </a:p>
+        </p:txBody>
       </p:sp>
       <p:sp>
         <p:nvSpPr>
@@ -17746,6 +17663,13 @@
           </a:solidFill>
           <a:ln/>
         </p:spPr>
+        <p:txBody>
+          <a:bodyPr/>
+          <a:lstStyle/>
+          <a:p>
+            <a:endParaRPr lang="en-US"/>
+          </a:p>
+        </p:txBody>
       </p:sp>
       <p:sp>
         <p:nvSpPr>
@@ -17825,11 +17749,6 @@
               </a:rPr>
               <a:t>Older type that uses </a:t>
             </a:r>
-            <a:pPr algn="l">
-              <a:lnSpc>
-                <a:spcPct val="150000"/>
-              </a:lnSpc>
-            </a:pPr>
             <a:r>
               <a:rPr lang="en-US" sz="1500" b="1" dirty="0">
                 <a:solidFill>
@@ -17841,11 +17760,6 @@
               </a:rPr>
               <a:t>XML</a:t>
             </a:r>
-            <a:pPr algn="l">
-              <a:lnSpc>
-                <a:spcPct val="150000"/>
-              </a:lnSpc>
-            </a:pPr>
             <a:r>
               <a:rPr lang="en-US" sz="1500" dirty="0">
                 <a:solidFill>
@@ -17882,6 +17796,13 @@
           </a:solidFill>
           <a:ln/>
         </p:spPr>
+        <p:txBody>
+          <a:bodyPr/>
+          <a:lstStyle/>
+          <a:p>
+            <a:endParaRPr lang="en-US"/>
+          </a:p>
+        </p:txBody>
       </p:sp>
       <p:sp>
         <p:nvSpPr>
@@ -17902,6 +17823,13 @@
           </a:solidFill>
           <a:ln/>
         </p:spPr>
+        <p:txBody>
+          <a:bodyPr/>
+          <a:lstStyle/>
+          <a:p>
+            <a:endParaRPr lang="en-US"/>
+          </a:p>
+        </p:txBody>
       </p:sp>
       <p:sp>
         <p:nvSpPr>
@@ -18001,6 +17929,13 @@
           </a:solidFill>
           <a:ln/>
         </p:spPr>
+        <p:txBody>
+          <a:bodyPr/>
+          <a:lstStyle/>
+          <a:p>
+            <a:endParaRPr lang="en-US"/>
+          </a:p>
+        </p:txBody>
       </p:sp>
       <p:sp>
         <p:nvSpPr>
@@ -18080,11 +18015,6 @@
               </a:rPr>
               <a:t>The client sends a request to execute a </a:t>
             </a:r>
-            <a:pPr algn="l">
-              <a:lnSpc>
-                <a:spcPct val="150000"/>
-              </a:lnSpc>
-            </a:pPr>
             <a:r>
               <a:rPr lang="en-US" sz="1500" b="1" dirty="0">
                 <a:solidFill>
@@ -18096,11 +18026,6 @@
               </a:rPr>
               <a:t>remote procedure</a:t>
             </a:r>
-            <a:pPr algn="l">
-              <a:lnSpc>
-                <a:spcPct val="150000"/>
-              </a:lnSpc>
-            </a:pPr>
             <a:r>
               <a:rPr lang="en-US" sz="1500" dirty="0">
                 <a:solidFill>
@@ -18137,6 +18062,13 @@
           </a:solidFill>
           <a:ln/>
         </p:spPr>
+        <p:txBody>
+          <a:bodyPr/>
+          <a:lstStyle/>
+          <a:p>
+            <a:endParaRPr lang="en-US"/>
+          </a:p>
+        </p:txBody>
       </p:sp>
       <p:sp>
         <p:nvSpPr>
@@ -18307,6 +18239,13 @@
           </a:solidFill>
           <a:ln/>
         </p:spPr>
+        <p:txBody>
+          <a:bodyPr/>
+          <a:lstStyle/>
+          <a:p>
+            <a:endParaRPr lang="en-US"/>
+          </a:p>
+        </p:txBody>
       </p:sp>
       <p:sp>
         <p:nvSpPr>
@@ -18376,7 +18315,7 @@
               </a:lnSpc>
             </a:pPr>
             <a:r>
-              <a:rPr lang="en-US" sz="1200" spc="100" kern="0" dirty="0">
+              <a:rPr lang="en-US" sz="1200" kern="0" spc="100" dirty="0">
                 <a:solidFill>
                   <a:srgbClr val="D4943A"/>
                 </a:solidFill>
@@ -18427,11 +18366,6 @@
               </a:rPr>
               <a:t>The most widely used type. Client sends requests with data; server responds with data. Operates over </a:t>
             </a:r>
-            <a:pPr algn="l">
-              <a:lnSpc>
-                <a:spcPct val="150000"/>
-              </a:lnSpc>
-            </a:pPr>
             <a:r>
               <a:rPr lang="en-US" sz="1500" b="1" dirty="0">
                 <a:solidFill>
@@ -18443,11 +18377,6 @@
               </a:rPr>
               <a:t>HTTP</a:t>
             </a:r>
-            <a:pPr algn="l">
-              <a:lnSpc>
-                <a:spcPct val="150000"/>
-              </a:lnSpc>
-            </a:pPr>
             <a:r>
               <a:rPr lang="en-US" sz="1500" dirty="0">
                 <a:solidFill>
@@ -18484,6 +18413,13 @@
           </a:solidFill>
           <a:ln/>
         </p:spPr>
+        <p:txBody>
+          <a:bodyPr/>
+          <a:lstStyle/>
+          <a:p>
+            <a:endParaRPr lang="en-US"/>
+          </a:p>
+        </p:txBody>
       </p:sp>
       <p:sp>
         <p:nvSpPr>
@@ -18504,6 +18440,13 @@
           </a:solidFill>
           <a:ln/>
         </p:spPr>
+        <p:txBody>
+          <a:bodyPr/>
+          <a:lstStyle/>
+          <a:p>
+            <a:endParaRPr lang="en-US"/>
+          </a:p>
+        </p:txBody>
       </p:sp>
       <p:sp>
         <p:nvSpPr>
@@ -18701,6 +18644,13 @@
           </a:solidFill>
           <a:ln/>
         </p:spPr>
+        <p:txBody>
+          <a:bodyPr/>
+          <a:lstStyle/>
+          <a:p>
+            <a:endParaRPr lang="en-US"/>
+          </a:p>
+        </p:txBody>
       </p:sp>
       <p:sp>
         <p:nvSpPr>
@@ -18780,11 +18730,6 @@
               </a:rPr>
               <a:t>Supports </a:t>
             </a:r>
-            <a:pPr algn="l">
-              <a:lnSpc>
-                <a:spcPct val="150000"/>
-              </a:lnSpc>
-            </a:pPr>
             <a:r>
               <a:rPr lang="en-US" sz="1500" b="1" dirty="0">
                 <a:solidFill>
@@ -18796,11 +18741,6 @@
               </a:rPr>
               <a:t>two-way communication</a:t>
             </a:r>
-            <a:pPr algn="l">
-              <a:lnSpc>
-                <a:spcPct val="150000"/>
-              </a:lnSpc>
-            </a:pPr>
             <a:r>
               <a:rPr lang="en-US" sz="1500" dirty="0">
                 <a:solidFill>
@@ -18839,6 +18779,13 @@
           </a:solidFill>
           <a:ln/>
         </p:spPr>
+        <p:txBody>
+          <a:bodyPr/>
+          <a:lstStyle/>
+          <a:p>
+            <a:endParaRPr lang="en-US"/>
+          </a:p>
+        </p:txBody>
       </p:sp>
       <p:sp>
         <p:nvSpPr>
@@ -18859,6 +18806,13 @@
           </a:solidFill>
           <a:ln/>
         </p:spPr>
+        <p:txBody>
+          <a:bodyPr/>
+          <a:lstStyle/>
+          <a:p>
+            <a:endParaRPr lang="en-US"/>
+          </a:p>
+        </p:txBody>
       </p:sp>
       <p:sp>
         <p:nvSpPr>
@@ -18984,6 +18938,13 @@
           </a:solidFill>
           <a:ln/>
         </p:spPr>
+        <p:txBody>
+          <a:bodyPr/>
+          <a:lstStyle/>
+          <a:p>
+            <a:endParaRPr lang="en-US"/>
+          </a:p>
+        </p:txBody>
       </p:sp>
       <p:sp>
         <p:nvSpPr>
@@ -19022,11 +18983,6 @@
               </a:rPr>
               <a:t>Key Insight:</a:t>
             </a:r>
-            <a:pPr algn="l">
-              <a:lnSpc>
-                <a:spcPct val="150000"/>
-              </a:lnSpc>
-            </a:pPr>
             <a:r>
               <a:rPr lang="en-US" sz="1600" dirty="0">
                 <a:solidFill>
@@ -19068,6 +19024,13 @@
             <a:tailEnd type="none"/>
           </a:ln>
         </p:spPr>
+        <p:txBody>
+          <a:bodyPr/>
+          <a:lstStyle/>
+          <a:p>
+            <a:endParaRPr lang="en-US"/>
+          </a:p>
+        </p:txBody>
       </p:sp>
     </p:spTree>
   </p:cSld>
@@ -19076,7 +19039,6 @@
   </p:clrMapOvr>
   <p:transition>
     <p:fade/>
-    <p:spd val="med"/>
   </p:transition>
 </p:sld>
 </file>
@@ -19100,15 +19062,15 @@
       </p:grpSpPr>
       <p:pic>
         <p:nvPicPr>
-          <p:cNvPr id="2" name="Image 0" descr="https://kimi-img.moonshot.cn/pub/slides/okc/r3tmzt32f22la/mnt/agents/output/api_design/images/5_Abstract_Glowing_Digital_Network.png">    </p:cNvPr>
+          <p:cNvPr id="2" name="Image 0" descr="https://kimi-img.moonshot.cn/pub/slides/okc/r3tmzt32f22la/mnt/agents/output/api_design/images/5_Abstract_Glowing_Digital_Network.png"/>
           <p:cNvPicPr>
             <a:picLocks noChangeAspect="1"/>
           </p:cNvPicPr>
           <p:nvPr/>
         </p:nvPicPr>
         <p:blipFill>
-          <a:blip r:embed="rId1"/>
-          <a:srcRect l="0" r="0" t="0" b="0"/>
+          <a:blip r:embed="rId3"/>
+          <a:srcRect/>
           <a:stretch/>
         </p:blipFill>
         <p:spPr>
@@ -19135,7 +19097,7 @@
           <a:prstGeom prst="rect">
             <a:avLst/>
           </a:prstGeom>
-          <a:gradFill rotWithShape="1" flip="none">
+          <a:gradFill flip="none" rotWithShape="1">
             <a:gsLst>
               <a:gs pos="0">
                 <a:srgbClr val="1B4D4D">
@@ -19159,6 +19121,13 @@
             <a:prstDash val="solid"/>
           </a:ln>
         </p:spPr>
+        <p:txBody>
+          <a:bodyPr/>
+          <a:lstStyle/>
+          <a:p>
+            <a:endParaRPr lang="en-US"/>
+          </a:p>
+        </p:txBody>
       </p:sp>
       <p:sp>
         <p:nvSpPr>
@@ -19220,6 +19189,13 @@
           </a:solidFill>
           <a:ln/>
         </p:spPr>
+        <p:txBody>
+          <a:bodyPr/>
+          <a:lstStyle/>
+          <a:p>
+            <a:endParaRPr lang="en-US"/>
+          </a:p>
+        </p:txBody>
       </p:sp>
       <p:sp>
         <p:nvSpPr>
@@ -19248,7 +19224,7 @@
               </a:lnSpc>
             </a:pPr>
             <a:r>
-              <a:rPr lang="en-US" sz="4000" spc="400" kern="0" dirty="0">
+              <a:rPr lang="en-US" sz="4000" kern="0" spc="400" dirty="0">
                 <a:solidFill>
                   <a:srgbClr val="FFFFFF"/>
                 </a:solidFill>
@@ -19310,7 +19286,6 @@
   </p:clrMapOvr>
   <p:transition>
     <p:fade/>
-    <p:spd val="med"/>
   </p:transition>
 </p:sld>
 </file>
@@ -19323,6 +19298,7 @@
         <a:solidFill>
           <a:srgbClr val="F5F3EF"/>
         </a:solidFill>
+        <a:effectLst/>
       </p:bgPr>
     </p:bg>
     <p:spTree>
@@ -19366,7 +19342,7 @@
               </a:lnSpc>
             </a:pPr>
             <a:r>
-              <a:rPr lang="en-US" sz="1300" spc="200" kern="0" dirty="0">
+              <a:rPr lang="en-US" sz="1300" kern="0" spc="200" dirty="0">
                 <a:solidFill>
                   <a:srgbClr val="8A9B8C"/>
                 </a:solidFill>
@@ -19440,6 +19416,13 @@
           </a:solidFill>
           <a:ln/>
         </p:spPr>
+        <p:txBody>
+          <a:bodyPr/>
+          <a:lstStyle/>
+          <a:p>
+            <a:endParaRPr lang="en-US"/>
+          </a:p>
+        </p:txBody>
       </p:sp>
       <p:sp>
         <p:nvSpPr>
@@ -19478,11 +19461,6 @@
               </a:rPr>
               <a:t>REST (Representational State Transfer) defines </a:t>
             </a:r>
-            <a:pPr algn="l">
-              <a:lnSpc>
-                <a:spcPct val="140000"/>
-              </a:lnSpc>
-            </a:pPr>
             <a:r>
               <a:rPr lang="en-US" sz="1600" b="1" dirty="0">
                 <a:solidFill>
@@ -19494,11 +19472,6 @@
               </a:rPr>
               <a:t>6 architectural constraints</a:t>
             </a:r>
-            <a:pPr algn="l">
-              <a:lnSpc>
-                <a:spcPct val="140000"/>
-              </a:lnSpc>
-            </a:pPr>
             <a:r>
               <a:rPr lang="en-US" sz="1600" dirty="0">
                 <a:solidFill>
@@ -19535,6 +19508,13 @@
           </a:solidFill>
           <a:ln/>
         </p:spPr>
+        <p:txBody>
+          <a:bodyPr/>
+          <a:lstStyle/>
+          <a:p>
+            <a:endParaRPr lang="en-US"/>
+          </a:p>
+        </p:txBody>
       </p:sp>
       <p:sp>
         <p:nvSpPr>
@@ -19751,6 +19731,13 @@
           </a:solidFill>
           <a:ln/>
         </p:spPr>
+        <p:txBody>
+          <a:bodyPr/>
+          <a:lstStyle/>
+          <a:p>
+            <a:endParaRPr lang="en-US"/>
+          </a:p>
+        </p:txBody>
       </p:sp>
       <p:sp>
         <p:nvSpPr>
@@ -19855,6 +19842,13 @@
           </a:solidFill>
           <a:ln/>
         </p:spPr>
+        <p:txBody>
+          <a:bodyPr/>
+          <a:lstStyle/>
+          <a:p>
+            <a:endParaRPr lang="en-US"/>
+          </a:p>
+        </p:txBody>
       </p:sp>
       <p:sp>
         <p:nvSpPr>
@@ -20082,6 +20076,13 @@
           </a:solidFill>
           <a:ln/>
         </p:spPr>
+        <p:txBody>
+          <a:bodyPr/>
+          <a:lstStyle/>
+          <a:p>
+            <a:endParaRPr lang="en-US"/>
+          </a:p>
+        </p:txBody>
       </p:sp>
       <p:sp>
         <p:nvSpPr>
@@ -20186,6 +20187,13 @@
           </a:solidFill>
           <a:ln/>
         </p:spPr>
+        <p:txBody>
+          <a:bodyPr/>
+          <a:lstStyle/>
+          <a:p>
+            <a:endParaRPr lang="en-US"/>
+          </a:p>
+        </p:txBody>
       </p:sp>
       <p:sp>
         <p:nvSpPr>
@@ -20276,6 +20284,13 @@
           </a:solidFill>
           <a:ln/>
         </p:spPr>
+        <p:txBody>
+          <a:bodyPr/>
+          <a:lstStyle/>
+          <a:p>
+            <a:endParaRPr lang="en-US"/>
+          </a:p>
+        </p:txBody>
       </p:sp>
       <p:sp>
         <p:nvSpPr>
@@ -20380,6 +20395,13 @@
           </a:solidFill>
           <a:ln/>
         </p:spPr>
+        <p:txBody>
+          <a:bodyPr/>
+          <a:lstStyle/>
+          <a:p>
+            <a:endParaRPr lang="en-US"/>
+          </a:p>
+        </p:txBody>
       </p:sp>
       <p:sp>
         <p:nvSpPr>
@@ -20558,6 +20580,13 @@
           </a:solidFill>
           <a:ln/>
         </p:spPr>
+        <p:txBody>
+          <a:bodyPr/>
+          <a:lstStyle/>
+          <a:p>
+            <a:endParaRPr lang="en-US"/>
+          </a:p>
+        </p:txBody>
       </p:sp>
       <p:sp>
         <p:nvSpPr>
@@ -20662,6 +20691,13 @@
           </a:solidFill>
           <a:ln/>
         </p:spPr>
+        <p:txBody>
+          <a:bodyPr/>
+          <a:lstStyle/>
+          <a:p>
+            <a:endParaRPr lang="en-US"/>
+          </a:p>
+        </p:txBody>
       </p:sp>
       <p:sp>
         <p:nvSpPr>
@@ -20858,6 +20894,13 @@
           </a:solidFill>
           <a:ln/>
         </p:spPr>
+        <p:txBody>
+          <a:bodyPr/>
+          <a:lstStyle/>
+          <a:p>
+            <a:endParaRPr lang="en-US"/>
+          </a:p>
+        </p:txBody>
       </p:sp>
       <p:sp>
         <p:nvSpPr>
@@ -20962,6 +21005,13 @@
           </a:solidFill>
           <a:ln/>
         </p:spPr>
+        <p:txBody>
+          <a:bodyPr/>
+          <a:lstStyle/>
+          <a:p>
+            <a:endParaRPr lang="en-US"/>
+          </a:p>
+        </p:txBody>
       </p:sp>
       <p:sp>
         <p:nvSpPr>
@@ -21102,6 +21152,13 @@
           </a:solidFill>
           <a:ln/>
         </p:spPr>
+        <p:txBody>
+          <a:bodyPr/>
+          <a:lstStyle/>
+          <a:p>
+            <a:endParaRPr lang="en-US"/>
+          </a:p>
+        </p:txBody>
       </p:sp>
       <p:sp>
         <p:nvSpPr>
@@ -21140,11 +21197,6 @@
               </a:rPr>
               <a:t>Code on Demand</a:t>
             </a:r>
-            <a:pPr algn="l">
-              <a:lnSpc>
-                <a:spcPct val="120000"/>
-              </a:lnSpc>
-            </a:pPr>
             <a:r>
               <a:rPr lang="en-US" sz="1700" dirty="0">
                 <a:solidFill>
@@ -21156,11 +21208,6 @@
               </a:rPr>
               <a:t> </a:t>
             </a:r>
-            <a:pPr algn="l">
-              <a:lnSpc>
-                <a:spcPct val="120000"/>
-              </a:lnSpc>
-            </a:pPr>
             <a:r>
               <a:rPr lang="en-US" sz="1200" dirty="0">
                 <a:solidFill>
@@ -21254,11 +21301,6 @@
               </a:rPr>
               <a:t>Remember:</a:t>
             </a:r>
-            <a:pPr algn="l">
-              <a:lnSpc>
-                <a:spcPct val="150000"/>
-              </a:lnSpc>
-            </a:pPr>
             <a:r>
               <a:rPr lang="en-US" sz="1600" dirty="0">
                 <a:solidFill>
@@ -21270,11 +21312,6 @@
               </a:rPr>
               <a:t> An API that follows these constraints is called </a:t>
             </a:r>
-            <a:pPr algn="l">
-              <a:lnSpc>
-                <a:spcPct val="150000"/>
-              </a:lnSpc>
-            </a:pPr>
             <a:r>
               <a:rPr lang="en-US" sz="1600" b="1" dirty="0">
                 <a:solidFill>
@@ -21286,11 +21323,6 @@
               </a:rPr>
               <a:t>"RESTful"</a:t>
             </a:r>
-            <a:pPr algn="l">
-              <a:lnSpc>
-                <a:spcPct val="150000"/>
-              </a:lnSpc>
-            </a:pPr>
             <a:r>
               <a:rPr lang="en-US" sz="1600" dirty="0">
                 <a:solidFill>
@@ -21332,6 +21364,13 @@
             <a:tailEnd type="none"/>
           </a:ln>
         </p:spPr>
+        <p:txBody>
+          <a:bodyPr/>
+          <a:lstStyle/>
+          <a:p>
+            <a:endParaRPr lang="en-US"/>
+          </a:p>
+        </p:txBody>
       </p:sp>
     </p:spTree>
   </p:cSld>
@@ -21340,7 +21379,6 @@
   </p:clrMapOvr>
   <p:transition>
     <p:fade/>
-    <p:spd val="med"/>
   </p:transition>
 </p:sld>
 </file>
@@ -21353,6 +21391,7 @@
         <a:solidFill>
           <a:srgbClr val="F5F3EF"/>
         </a:solidFill>
+        <a:effectLst/>
       </p:bgPr>
     </p:bg>
     <p:spTree>
@@ -21396,7 +21435,7 @@
               </a:lnSpc>
             </a:pPr>
             <a:r>
-              <a:rPr lang="en-US" sz="1300" spc="200" kern="0" dirty="0">
+              <a:rPr lang="en-US" sz="1300" kern="0" spc="200" dirty="0">
                 <a:solidFill>
                   <a:srgbClr val="8A9B8C"/>
                 </a:solidFill>
@@ -21470,6 +21509,13 @@
           </a:solidFill>
           <a:ln/>
         </p:spPr>
+        <p:txBody>
+          <a:bodyPr/>
+          <a:lstStyle/>
+          <a:p>
+            <a:endParaRPr lang="en-US"/>
+          </a:p>
+        </p:txBody>
       </p:sp>
       <p:sp>
         <p:nvSpPr>
@@ -21508,11 +21554,6 @@
               </a:rPr>
               <a:t>HTTP verbs map directly to </a:t>
             </a:r>
-            <a:pPr algn="l">
-              <a:lnSpc>
-                <a:spcPct val="140000"/>
-              </a:lnSpc>
-            </a:pPr>
             <a:r>
               <a:rPr lang="en-US" sz="1600" b="1" dirty="0">
                 <a:solidFill>
@@ -21524,11 +21565,6 @@
               </a:rPr>
               <a:t>CRUD operations</a:t>
             </a:r>
-            <a:pPr algn="l">
-              <a:lnSpc>
-                <a:spcPct val="140000"/>
-              </a:lnSpc>
-            </a:pPr>
             <a:r>
               <a:rPr lang="en-US" sz="1600" dirty="0">
                 <a:solidFill>
@@ -21567,10 +21603,34 @@
             <a:tbl>
               <a:tblPr/>
               <a:tblGrid>
-                <a:gridCol w="2209800"/>
-                <a:gridCol w="2946400"/>
-                <a:gridCol w="5156200"/>
-                <a:gridCol w="4419600"/>
+                <a:gridCol w="2209800">
+                  <a:extLst>
+                    <a:ext uri="{9D8B030D-6E8A-4147-A177-3AD203B41FA5}">
+                      <a16:colId xmlns:a16="http://schemas.microsoft.com/office/drawing/2014/main" val="20000"/>
+                    </a:ext>
+                  </a:extLst>
+                </a:gridCol>
+                <a:gridCol w="2946400">
+                  <a:extLst>
+                    <a:ext uri="{9D8B030D-6E8A-4147-A177-3AD203B41FA5}">
+                      <a16:colId xmlns:a16="http://schemas.microsoft.com/office/drawing/2014/main" val="20001"/>
+                    </a:ext>
+                  </a:extLst>
+                </a:gridCol>
+                <a:gridCol w="5156200">
+                  <a:extLst>
+                    <a:ext uri="{9D8B030D-6E8A-4147-A177-3AD203B41FA5}">
+                      <a16:colId xmlns:a16="http://schemas.microsoft.com/office/drawing/2014/main" val="20002"/>
+                    </a:ext>
+                  </a:extLst>
+                </a:gridCol>
+                <a:gridCol w="4419600">
+                  <a:extLst>
+                    <a:ext uri="{9D8B030D-6E8A-4147-A177-3AD203B41FA5}">
+                      <a16:colId xmlns:a16="http://schemas.microsoft.com/office/drawing/2014/main" val="20003"/>
+                    </a:ext>
+                  </a:extLst>
+                </a:gridCol>
               </a:tblGrid>
               <a:tr h="675640">
                 <a:tc>
@@ -21789,6 +21849,11 @@
                     </a:solidFill>
                   </a:tcPr>
                 </a:tc>
+                <a:extLst>
+                  <a:ext uri="{0D108BD9-81ED-4DB2-BD59-A6C34878D82A}">
+                    <a16:rowId xmlns:a16="http://schemas.microsoft.com/office/drawing/2014/main" val="10000"/>
+                  </a:ext>
+                </a:extLst>
               </a:tr>
               <a:tr h="830072">
                 <a:tc>
@@ -22007,6 +22072,11 @@
                     </a:solidFill>
                   </a:tcPr>
                 </a:tc>
+                <a:extLst>
+                  <a:ext uri="{0D108BD9-81ED-4DB2-BD59-A6C34878D82A}">
+                    <a16:rowId xmlns:a16="http://schemas.microsoft.com/office/drawing/2014/main" val="10001"/>
+                  </a:ext>
+                </a:extLst>
               </a:tr>
               <a:tr h="830072">
                 <a:tc>
@@ -22225,6 +22295,11 @@
                     </a:solidFill>
                   </a:tcPr>
                 </a:tc>
+                <a:extLst>
+                  <a:ext uri="{0D108BD9-81ED-4DB2-BD59-A6C34878D82A}">
+                    <a16:rowId xmlns:a16="http://schemas.microsoft.com/office/drawing/2014/main" val="10002"/>
+                  </a:ext>
+                </a:extLst>
               </a:tr>
               <a:tr h="830072">
                 <a:tc>
@@ -22443,6 +22518,11 @@
                     </a:solidFill>
                   </a:tcPr>
                 </a:tc>
+                <a:extLst>
+                  <a:ext uri="{0D108BD9-81ED-4DB2-BD59-A6C34878D82A}">
+                    <a16:rowId xmlns:a16="http://schemas.microsoft.com/office/drawing/2014/main" val="10003"/>
+                  </a:ext>
+                </a:extLst>
               </a:tr>
               <a:tr h="830072">
                 <a:tc>
@@ -22661,6 +22741,11 @@
                     </a:solidFill>
                   </a:tcPr>
                 </a:tc>
+                <a:extLst>
+                  <a:ext uri="{0D108BD9-81ED-4DB2-BD59-A6C34878D82A}">
+                    <a16:rowId xmlns:a16="http://schemas.microsoft.com/office/drawing/2014/main" val="10004"/>
+                  </a:ext>
+                </a:extLst>
               </a:tr>
               <a:tr h="830072">
                 <a:tc>
@@ -22879,6 +22964,11 @@
                     </a:solidFill>
                   </a:tcPr>
                 </a:tc>
+                <a:extLst>
+                  <a:ext uri="{0D108BD9-81ED-4DB2-BD59-A6C34878D82A}">
+                    <a16:rowId xmlns:a16="http://schemas.microsoft.com/office/drawing/2014/main" val="10005"/>
+                  </a:ext>
+                </a:extLst>
               </a:tr>
             </a:tbl>
           </a:graphicData>
@@ -22921,11 +23011,6 @@
               </a:rPr>
               <a:t>Tip:</a:t>
             </a:r>
-            <a:pPr algn="l">
-              <a:lnSpc>
-                <a:spcPct val="150000"/>
-              </a:lnSpc>
-            </a:pPr>
             <a:r>
               <a:rPr lang="en-US" sz="1600" dirty="0">
                 <a:solidFill>
@@ -22935,71 +23020,7 @@
                 <a:ea typeface="Quattrocento Sans" pitchFamily="34" charset="-122"/>
                 <a:cs typeface="Quattrocento Sans" pitchFamily="34" charset="-120"/>
               </a:rPr>
-              <a:t> Use nouns (not verbs) in your URLs. Say </a:t>
-            </a:r>
-            <a:pPr algn="l">
-              <a:lnSpc>
-                <a:spcPct val="150000"/>
-              </a:lnSpc>
-            </a:pPr>
-            <a:r>
-              <a:rPr lang="en-US" sz="1600" dirty="0">
-                <a:solidFill>
-                  <a:srgbClr val="1C1C1E"/>
-                </a:solidFill>
-                <a:latin typeface="Quattrocento Sans" pitchFamily="34" charset="0"/>
-                <a:ea typeface="Quattrocento Sans" pitchFamily="34" charset="-122"/>
-                <a:cs typeface="Quattrocento Sans" pitchFamily="34" charset="-120"/>
-              </a:rPr>
-              <a:t>/users</a:t>
-            </a:r>
-            <a:pPr algn="l">
-              <a:lnSpc>
-                <a:spcPct val="150000"/>
-              </a:lnSpc>
-            </a:pPr>
-            <a:r>
-              <a:rPr lang="en-US" sz="1600" dirty="0">
-                <a:solidFill>
-                  <a:srgbClr val="1C1C1E"/>
-                </a:solidFill>
-                <a:latin typeface="Quattrocento Sans" pitchFamily="34" charset="0"/>
-                <a:ea typeface="Quattrocento Sans" pitchFamily="34" charset="-122"/>
-                <a:cs typeface="Quattrocento Sans" pitchFamily="34" charset="-120"/>
-              </a:rPr>
-              <a:t> not </a:t>
-            </a:r>
-            <a:pPr algn="l">
-              <a:lnSpc>
-                <a:spcPct val="150000"/>
-              </a:lnSpc>
-            </a:pPr>
-            <a:r>
-              <a:rPr lang="en-US" sz="1600" dirty="0">
-                <a:solidFill>
-                  <a:srgbClr val="1C1C1E"/>
-                </a:solidFill>
-                <a:latin typeface="Quattrocento Sans" pitchFamily="34" charset="0"/>
-                <a:ea typeface="Quattrocento Sans" pitchFamily="34" charset="-122"/>
-                <a:cs typeface="Quattrocento Sans" pitchFamily="34" charset="-120"/>
-              </a:rPr>
-              <a:t>/getUsers</a:t>
-            </a:r>
-            <a:pPr algn="l">
-              <a:lnSpc>
-                <a:spcPct val="150000"/>
-              </a:lnSpc>
-            </a:pPr>
-            <a:r>
-              <a:rPr lang="en-US" sz="1600" dirty="0">
-                <a:solidFill>
-                  <a:srgbClr val="1C1C1E"/>
-                </a:solidFill>
-                <a:latin typeface="Quattrocento Sans" pitchFamily="34" charset="0"/>
-                <a:ea typeface="Quattrocento Sans" pitchFamily="34" charset="-122"/>
-                <a:cs typeface="Quattrocento Sans" pitchFamily="34" charset="-120"/>
-              </a:rPr>
-              <a:t> — the HTTP method already tells us the action.</a:t>
+              <a:t> Use nouns (not verbs) in your URLs. Say /users not /getUsers — the HTTP method already tells us the action.</a:t>
             </a:r>
             <a:endParaRPr lang="en-US" sz="1600" dirty="0"/>
           </a:p>
@@ -23031,6 +23052,13 @@
             <a:tailEnd type="none"/>
           </a:ln>
         </p:spPr>
+        <p:txBody>
+          <a:bodyPr/>
+          <a:lstStyle/>
+          <a:p>
+            <a:endParaRPr lang="en-US"/>
+          </a:p>
+        </p:txBody>
       </p:sp>
     </p:spTree>
   </p:cSld>
@@ -23039,7 +23067,6 @@
   </p:clrMapOvr>
   <p:transition>
     <p:fade/>
-    <p:spd val="med"/>
   </p:transition>
 </p:sld>
 </file>
@@ -23337,4 +23364,319 @@
     </a:ext>
   </a:extLst>
 </a:theme>
+</file>
+
+<file path=ppt/theme/theme2.xml><?xml version="1.0" encoding="utf-8"?>
+<a:theme xmlns:a="http://schemas.openxmlformats.org/drawingml/2006/main" name="Office Theme">
+  <a:themeElements>
+    <a:clrScheme name="Office">
+      <a:dk1>
+        <a:sysClr val="windowText" lastClr="000000"/>
+      </a:dk1>
+      <a:lt1>
+        <a:sysClr val="window" lastClr="FFFFFF"/>
+      </a:lt1>
+      <a:dk2>
+        <a:srgbClr val="0E2841"/>
+      </a:dk2>
+      <a:lt2>
+        <a:srgbClr val="E8E8E8"/>
+      </a:lt2>
+      <a:accent1>
+        <a:srgbClr val="156082"/>
+      </a:accent1>
+      <a:accent2>
+        <a:srgbClr val="E97132"/>
+      </a:accent2>
+      <a:accent3>
+        <a:srgbClr val="196B24"/>
+      </a:accent3>
+      <a:accent4>
+        <a:srgbClr val="0F9ED5"/>
+      </a:accent4>
+      <a:accent5>
+        <a:srgbClr val="A02B93"/>
+      </a:accent5>
+      <a:accent6>
+        <a:srgbClr val="4EA72E"/>
+      </a:accent6>
+      <a:hlink>
+        <a:srgbClr val="467886"/>
+      </a:hlink>
+      <a:folHlink>
+        <a:srgbClr val="96607D"/>
+      </a:folHlink>
+    </a:clrScheme>
+    <a:fontScheme name="Office">
+      <a:majorFont>
+        <a:latin typeface="Aptos Display" panose="02110004020202020204"/>
+        <a:ea typeface=""/>
+        <a:cs typeface=""/>
+        <a:font script="Jpan" typeface="游ゴシック Light"/>
+        <a:font script="Hang" typeface="맑은 고딕"/>
+        <a:font script="Hans" typeface="等线 Light"/>
+        <a:font script="Hant" typeface="新細明體"/>
+        <a:font script="Arab" typeface="Times New Roman"/>
+        <a:font script="Hebr" typeface="Times New Roman"/>
+        <a:font script="Thai" typeface="Angsana New"/>
+        <a:font script="Ethi" typeface="Nyala"/>
+        <a:font script="Beng" typeface="Vrinda"/>
+        <a:font script="Gujr" typeface="Shruti"/>
+        <a:font script="Khmr" typeface="MoolBoran"/>
+        <a:font script="Knda" typeface="Tunga"/>
+        <a:font script="Guru" typeface="Raavi"/>
+        <a:font script="Cans" typeface="Euphemia"/>
+        <a:font script="Cher" typeface="Plantagenet Cherokee"/>
+        <a:font script="Yiii" typeface="Microsoft Yi Baiti"/>
+        <a:font script="Tibt" typeface="Microsoft Himalaya"/>
+        <a:font script="Thaa" typeface="MV Boli"/>
+        <a:font script="Deva" typeface="Mangal"/>
+        <a:font script="Telu" typeface="Gautami"/>
+        <a:font script="Taml" typeface="Latha"/>
+        <a:font script="Syrc" typeface="Estrangelo Edessa"/>
+        <a:font script="Orya" typeface="Kalinga"/>
+        <a:font script="Mlym" typeface="Kartika"/>
+        <a:font script="Laoo" typeface="DokChampa"/>
+        <a:font script="Sinh" typeface="Iskoola Pota"/>
+        <a:font script="Mong" typeface="Mongolian Baiti"/>
+        <a:font script="Viet" typeface="Times New Roman"/>
+        <a:font script="Uigh" typeface="Microsoft Uighur"/>
+        <a:font script="Geor" typeface="Sylfaen"/>
+        <a:font script="Armn" typeface="Arial"/>
+        <a:font script="Bugi" typeface="Leelawadee UI"/>
+        <a:font script="Bopo" typeface="Microsoft JhengHei"/>
+        <a:font script="Java" typeface="Javanese Text"/>
+        <a:font script="Lisu" typeface="Segoe UI"/>
+        <a:font script="Mymr" typeface="Myanmar Text"/>
+        <a:font script="Nkoo" typeface="Ebrima"/>
+        <a:font script="Olck" typeface="Nirmala UI"/>
+        <a:font script="Osma" typeface="Ebrima"/>
+        <a:font script="Phag" typeface="Phagspa"/>
+        <a:font script="Syrn" typeface="Estrangelo Edessa"/>
+        <a:font script="Syrj" typeface="Estrangelo Edessa"/>
+        <a:font script="Syre" typeface="Estrangelo Edessa"/>
+        <a:font script="Sora" typeface="Nirmala UI"/>
+        <a:font script="Tale" typeface="Microsoft Tai Le"/>
+        <a:font script="Talu" typeface="Microsoft New Tai Lue"/>
+        <a:font script="Tfng" typeface="Ebrima"/>
+      </a:majorFont>
+      <a:minorFont>
+        <a:latin typeface="Aptos" panose="02110004020202020204"/>
+        <a:ea typeface=""/>
+        <a:cs typeface=""/>
+        <a:font script="Jpan" typeface="游ゴシック"/>
+        <a:font script="Hang" typeface="맑은 고딕"/>
+        <a:font script="Hans" typeface="等线"/>
+        <a:font script="Hant" typeface="新細明體"/>
+        <a:font script="Arab" typeface="Arial"/>
+        <a:font script="Hebr" typeface="Arial"/>
+        <a:font script="Thai" typeface="Cordia New"/>
+        <a:font script="Ethi" typeface="Nyala"/>
+        <a:font script="Beng" typeface="Vrinda"/>
+        <a:font script="Gujr" typeface="Shruti"/>
+        <a:font script="Khmr" typeface="DaunPenh"/>
+        <a:font script="Knda" typeface="Tunga"/>
+        <a:font script="Guru" typeface="Raavi"/>
+        <a:font script="Cans" typeface="Euphemia"/>
+        <a:font script="Cher" typeface="Plantagenet Cherokee"/>
+        <a:font script="Yiii" typeface="Microsoft Yi Baiti"/>
+        <a:font script="Tibt" typeface="Microsoft Himalaya"/>
+        <a:font script="Thaa" typeface="MV Boli"/>
+        <a:font script="Deva" typeface="Mangal"/>
+        <a:font script="Telu" typeface="Gautami"/>
+        <a:font script="Taml" typeface="Latha"/>
+        <a:font script="Syrc" typeface="Estrangelo Edessa"/>
+        <a:font script="Orya" typeface="Kalinga"/>
+        <a:font script="Mlym" typeface="Kartika"/>
+        <a:font script="Laoo" typeface="DokChampa"/>
+        <a:font script="Sinh" typeface="Iskoola Pota"/>
+        <a:font script="Mong" typeface="Mongolian Baiti"/>
+        <a:font script="Viet" typeface="Arial"/>
+        <a:font script="Uigh" typeface="Microsoft Uighur"/>
+        <a:font script="Geor" typeface="Sylfaen"/>
+        <a:font script="Armn" typeface="Arial"/>
+        <a:font script="Bugi" typeface="Leelawadee UI"/>
+        <a:font script="Bopo" typeface="Microsoft JhengHei"/>
+        <a:font script="Java" typeface="Javanese Text"/>
+        <a:font script="Lisu" typeface="Segoe UI"/>
+        <a:font script="Mymr" typeface="Myanmar Text"/>
+        <a:font script="Nkoo" typeface="Ebrima"/>
+        <a:font script="Olck" typeface="Nirmala UI"/>
+        <a:font script="Osma" typeface="Ebrima"/>
+        <a:font script="Phag" typeface="Phagspa"/>
+        <a:font script="Syrn" typeface="Estrangelo Edessa"/>
+        <a:font script="Syrj" typeface="Estrangelo Edessa"/>
+        <a:font script="Syre" typeface="Estrangelo Edessa"/>
+        <a:font script="Sora" typeface="Nirmala UI"/>
+        <a:font script="Tale" typeface="Microsoft Tai Le"/>
+        <a:font script="Talu" typeface="Microsoft New Tai Lue"/>
+        <a:font script="Tfng" typeface="Ebrima"/>
+      </a:minorFont>
+    </a:fontScheme>
+    <a:fmtScheme name="Office">
+      <a:fillStyleLst>
+        <a:solidFill>
+          <a:schemeClr val="phClr"/>
+        </a:solidFill>
+        <a:gradFill rotWithShape="1">
+          <a:gsLst>
+            <a:gs pos="0">
+              <a:schemeClr val="phClr">
+                <a:lumMod val="110000"/>
+                <a:satMod val="105000"/>
+                <a:tint val="67000"/>
+              </a:schemeClr>
+            </a:gs>
+            <a:gs pos="50000">
+              <a:schemeClr val="phClr">
+                <a:lumMod val="105000"/>
+                <a:satMod val="103000"/>
+                <a:tint val="73000"/>
+              </a:schemeClr>
+            </a:gs>
+            <a:gs pos="100000">
+              <a:schemeClr val="phClr">
+                <a:lumMod val="105000"/>
+                <a:satMod val="109000"/>
+                <a:tint val="81000"/>
+              </a:schemeClr>
+            </a:gs>
+          </a:gsLst>
+          <a:lin ang="5400000" scaled="0"/>
+        </a:gradFill>
+        <a:gradFill rotWithShape="1">
+          <a:gsLst>
+            <a:gs pos="0">
+              <a:schemeClr val="phClr">
+                <a:satMod val="103000"/>
+                <a:lumMod val="102000"/>
+                <a:tint val="94000"/>
+              </a:schemeClr>
+            </a:gs>
+            <a:gs pos="50000">
+              <a:schemeClr val="phClr">
+                <a:satMod val="110000"/>
+                <a:lumMod val="100000"/>
+                <a:shade val="100000"/>
+              </a:schemeClr>
+            </a:gs>
+            <a:gs pos="100000">
+              <a:schemeClr val="phClr">
+                <a:lumMod val="99000"/>
+                <a:satMod val="120000"/>
+                <a:shade val="78000"/>
+              </a:schemeClr>
+            </a:gs>
+          </a:gsLst>
+          <a:lin ang="5400000" scaled="0"/>
+        </a:gradFill>
+      </a:fillStyleLst>
+      <a:lnStyleLst>
+        <a:ln w="12700" cap="flat" cmpd="sng" algn="ctr">
+          <a:solidFill>
+            <a:schemeClr val="phClr"/>
+          </a:solidFill>
+          <a:prstDash val="solid"/>
+          <a:miter lim="800000"/>
+        </a:ln>
+        <a:ln w="19050" cap="flat" cmpd="sng" algn="ctr">
+          <a:solidFill>
+            <a:schemeClr val="phClr"/>
+          </a:solidFill>
+          <a:prstDash val="solid"/>
+          <a:miter lim="800000"/>
+        </a:ln>
+        <a:ln w="25400" cap="flat" cmpd="sng" algn="ctr">
+          <a:solidFill>
+            <a:schemeClr val="phClr"/>
+          </a:solidFill>
+          <a:prstDash val="solid"/>
+          <a:miter lim="800000"/>
+        </a:ln>
+      </a:lnStyleLst>
+      <a:effectStyleLst>
+        <a:effectStyle>
+          <a:effectLst/>
+        </a:effectStyle>
+        <a:effectStyle>
+          <a:effectLst/>
+        </a:effectStyle>
+        <a:effectStyle>
+          <a:effectLst>
+            <a:outerShdw blurRad="57150" dist="19050" dir="5400000" algn="ctr" rotWithShape="0">
+              <a:srgbClr val="000000">
+                <a:alpha val="63000"/>
+              </a:srgbClr>
+            </a:outerShdw>
+          </a:effectLst>
+        </a:effectStyle>
+      </a:effectStyleLst>
+      <a:bgFillStyleLst>
+        <a:solidFill>
+          <a:schemeClr val="phClr"/>
+        </a:solidFill>
+        <a:solidFill>
+          <a:schemeClr val="phClr">
+            <a:tint val="95000"/>
+            <a:satMod val="170000"/>
+          </a:schemeClr>
+        </a:solidFill>
+        <a:gradFill rotWithShape="1">
+          <a:gsLst>
+            <a:gs pos="0">
+              <a:schemeClr val="phClr">
+                <a:tint val="93000"/>
+                <a:satMod val="150000"/>
+                <a:shade val="98000"/>
+                <a:lumMod val="102000"/>
+              </a:schemeClr>
+            </a:gs>
+            <a:gs pos="50000">
+              <a:schemeClr val="phClr">
+                <a:tint val="98000"/>
+                <a:satMod val="130000"/>
+                <a:shade val="90000"/>
+                <a:lumMod val="103000"/>
+              </a:schemeClr>
+            </a:gs>
+            <a:gs pos="100000">
+              <a:schemeClr val="phClr">
+                <a:shade val="63000"/>
+                <a:satMod val="120000"/>
+              </a:schemeClr>
+            </a:gs>
+          </a:gsLst>
+          <a:lin ang="5400000" scaled="0"/>
+        </a:gradFill>
+      </a:bgFillStyleLst>
+    </a:fmtScheme>
+  </a:themeElements>
+  <a:objectDefaults>
+    <a:lnDef>
+      <a:spPr/>
+      <a:bodyPr/>
+      <a:lstStyle/>
+      <a:style>
+        <a:lnRef idx="2">
+          <a:schemeClr val="accent1"/>
+        </a:lnRef>
+        <a:fillRef idx="0">
+          <a:schemeClr val="accent1"/>
+        </a:fillRef>
+        <a:effectRef idx="1">
+          <a:schemeClr val="accent1"/>
+        </a:effectRef>
+        <a:fontRef idx="minor">
+          <a:schemeClr val="tx1"/>
+        </a:fontRef>
+      </a:style>
+    </a:lnDef>
+  </a:objectDefaults>
+  <a:extraClrSchemeLst/>
+  <a:extLst>
+    <a:ext uri="{05A4C25C-085E-4340-85A3-A5531E510DB2}">
+      <thm15:themeFamily xmlns:thm15="http://schemas.microsoft.com/office/thememl/2012/main" name="Office Theme" id="{2E142A2C-CD16-42D6-873A-C26D2A0506FA}" vid="{1BDDFF52-6CD6-40A5-AB3C-68EB2F1E4D0A}"/>
+    </a:ext>
+  </a:extLst>
+</a:theme>
 </file>